--- a/docs/universalbank_consistente_proposal_ru.pptx
+++ b/docs/universalbank_consistente_proposal_ru.pptx
@@ -22,6 +22,12 @@
     <p:sldId id="270" r:id="rId21"/>
     <p:sldId id="271" r:id="rId22"/>
     <p:sldId id="272" r:id="rId23"/>
+    <p:sldId id="273" r:id="rId24"/>
+    <p:sldId id="274" r:id="rId25"/>
+    <p:sldId id="275" r:id="rId26"/>
+    <p:sldId id="276" r:id="rId27"/>
+    <p:sldId id="277" r:id="rId28"/>
+    <p:sldId id="278" r:id="rId29"/>
   </p:sldIdLst>
   <p:sldSz cx="12191695" cy="6858000" type="screen4x3"/>
   <p:notesSz cx="6858000" cy="9144000"/>
@@ -3301,6 +3307,1874 @@
                   <a:srgbClr val="C8A24B"/>
                 </a:solidFill>
               </a:rPr>
+              <a:t>НАПРАВЛЕНИЕ 1 · ИИ</a:t>
+            </a:r>
+          </a:p>
+        </p:txBody>
+      </p:sp>
+      <p:sp>
+        <p:nvSpPr>
+          <p:cNvPr id="4" name="Rectangle 3"/>
+          <p:cNvSpPr/>
+          <p:nvPr/>
+        </p:nvSpPr>
+        <p:spPr>
+          <a:xfrm>
+            <a:off x="640080" y="731520"/>
+            <a:ext cx="10881360" cy="777240"/>
+          </a:xfrm>
+          <a:prstGeom prst="rect">
+            <a:avLst/>
+          </a:prstGeom>
+          <a:solidFill>
+            <a:srgbClr val="1F5D43"/>
+          </a:solidFill>
+          <a:ln>
+            <a:noFill/>
+          </a:ln>
+          <a:effectLst/>
+        </p:spPr>
+        <p:style>
+          <a:lnRef idx="1">
+            <a:schemeClr val="accent1"/>
+          </a:lnRef>
+          <a:fillRef idx="3">
+            <a:schemeClr val="accent1"/>
+          </a:fillRef>
+          <a:effectRef idx="2">
+            <a:schemeClr val="accent1"/>
+          </a:effectRef>
+          <a:fontRef idx="minor">
+            <a:schemeClr val="lt1"/>
+          </a:fontRef>
+        </p:style>
+        <p:txBody>
+          <a:bodyPr rtlCol="0" anchor="ctr" wrap="square"/>
+          <a:lstStyle/>
+          <a:p>
+            <a:pPr algn="ctr"/>
+            <a:r>
+              <a:rPr sz="2100" b="1">
+                <a:solidFill>
+                  <a:srgbClr val="FFFFFF"/>
+                </a:solidFill>
+              </a:rPr>
+              <a:t>   Две разговорные поверхности, одно ядро Grok</a:t>
+            </a:r>
+          </a:p>
+        </p:txBody>
+      </p:sp>
+      <p:pic>
+        <p:nvPicPr>
+          <p:cNvPr id="5" name="Picture 4" descr="d2-ai-chat.png"/>
+          <p:cNvPicPr>
+            <a:picLocks noChangeAspect="1"/>
+          </p:cNvPicPr>
+          <p:nvPr/>
+        </p:nvPicPr>
+        <p:blipFill>
+          <a:blip r:embed="rId2"/>
+          <a:stretch>
+            <a:fillRect/>
+          </a:stretch>
+        </p:blipFill>
+        <p:spPr>
+          <a:xfrm>
+            <a:off x="548640" y="3366474"/>
+            <a:ext cx="6583680" cy="1405212"/>
+          </a:xfrm>
+          <a:prstGeom prst="rect">
+            <a:avLst/>
+          </a:prstGeom>
+        </p:spPr>
+      </p:pic>
+      <p:sp>
+        <p:nvSpPr>
+          <p:cNvPr id="6" name="TextBox 5"/>
+          <p:cNvSpPr txBox="1"/>
+          <p:nvPr/>
+        </p:nvSpPr>
+        <p:spPr>
+          <a:xfrm>
+            <a:off x="548640" y="6355080"/>
+            <a:ext cx="6583680" cy="365760"/>
+          </a:xfrm>
+          <a:prstGeom prst="rect">
+            <a:avLst/>
+          </a:prstGeom>
+          <a:noFill/>
+        </p:spPr>
+        <p:txBody>
+          <a:bodyPr wrap="none">
+            <a:spAutoFit/>
+          </a:bodyPr>
+          <a:lstStyle/>
+          <a:p>
+            <a:pPr algn="ctr"/>
+            <a:r>
+              <a:rPr sz="1000" i="1">
+                <a:solidFill>
+                  <a:srgbClr val="415046"/>
+                </a:solidFill>
+              </a:rPr>
+              <a:t>Триаж заявок в чате и отчётность для инвесторов в чате</a:t>
+            </a:r>
+          </a:p>
+        </p:txBody>
+      </p:sp>
+      <p:sp>
+        <p:nvSpPr>
+          <p:cNvPr id="7" name="TextBox 6"/>
+          <p:cNvSpPr txBox="1"/>
+          <p:nvPr/>
+        </p:nvSpPr>
+        <p:spPr>
+          <a:xfrm>
+            <a:off x="7406640" y="1828800"/>
+            <a:ext cx="4480560" cy="4572000"/>
+          </a:xfrm>
+          <a:prstGeom prst="rect">
+            <a:avLst/>
+          </a:prstGeom>
+          <a:noFill/>
+        </p:spPr>
+        <p:txBody>
+          <a:bodyPr wrap="square">
+            <a:spAutoFit/>
+          </a:bodyPr>
+          <a:lstStyle/>
+          <a:p>
+            <a:pPr>
+              <a:spcAft>
+                <a:spcPts val="900"/>
+              </a:spcAft>
+            </a:pPr>
+            <a:r>
+              <a:rPr sz="1300">
+                <a:solidFill>
+                  <a:srgbClr val="14231B"/>
+                </a:solidFill>
+              </a:rPr>
+              <a:t>•  Триаж превращает описание продавца на естественном языке в индикативный рейтинг, ставку аванса и список документов — за секунды.</a:t>
+            </a:r>
+          </a:p>
+          <a:p>
+            <a:pPr>
+              <a:spcAft>
+                <a:spcPts val="900"/>
+              </a:spcAft>
+            </a:pPr>
+            <a:r>
+              <a:rPr sz="1300">
+                <a:solidFill>
+                  <a:srgbClr val="14231B"/>
+                </a:solidFill>
+              </a:rPr>
+              <a:t>•  Отчётность отвечает на вопросы инвестора на основе его реальных позиций — без выдуманных цифр.</a:t>
+            </a:r>
+          </a:p>
+          <a:p>
+            <a:pPr>
+              <a:spcAft>
+                <a:spcPts val="900"/>
+              </a:spcAft>
+            </a:pPr>
+            <a:r>
+              <a:rPr sz="1300">
+                <a:solidFill>
+                  <a:srgbClr val="14231B"/>
+                </a:solidFill>
+              </a:rPr>
+              <a:t>•  Grok оценивает и объясняет; финальное решение всегда за человеком. Каждое решение ИИ логируется и проверяемо.</a:t>
+            </a:r>
+          </a:p>
+        </p:txBody>
+      </p:sp>
+    </p:spTree>
+  </p:cSld>
+  <p:clrMapOvr>
+    <a:masterClrMapping/>
+  </p:clrMapOvr>
+</p:sld>
+</file>
+
+<file path=ppt/slides/slide11.xml><?xml version="1.0" encoding="utf-8"?>
+<p:sld xmlns:a="http://schemas.openxmlformats.org/drawingml/2006/main" xmlns:p="http://schemas.openxmlformats.org/presentationml/2006/main" xmlns:r="http://schemas.openxmlformats.org/officeDocument/2006/relationships">
+  <p:cSld>
+    <p:spTree>
+      <p:nvGrpSpPr>
+        <p:cNvPr id="1" name=""/>
+        <p:cNvGrpSpPr/>
+        <p:nvPr/>
+      </p:nvGrpSpPr>
+      <p:grpSpPr/>
+      <p:sp>
+        <p:nvSpPr>
+          <p:cNvPr id="2" name="Rectangle 1"/>
+          <p:cNvSpPr/>
+          <p:nvPr/>
+        </p:nvSpPr>
+        <p:spPr>
+          <a:xfrm>
+            <a:off x="0" y="0"/>
+            <a:ext cx="12191695" cy="6858000"/>
+          </a:xfrm>
+          <a:prstGeom prst="rect">
+            <a:avLst/>
+          </a:prstGeom>
+          <a:solidFill>
+            <a:srgbClr val="F7F6F1"/>
+          </a:solidFill>
+          <a:ln>
+            <a:noFill/>
+          </a:ln>
+          <a:effectLst/>
+        </p:spPr>
+        <p:style>
+          <a:lnRef idx="1">
+            <a:schemeClr val="accent1"/>
+          </a:lnRef>
+          <a:fillRef idx="3">
+            <a:schemeClr val="accent1"/>
+          </a:fillRef>
+          <a:effectRef idx="2">
+            <a:schemeClr val="accent1"/>
+          </a:effectRef>
+          <a:fontRef idx="minor">
+            <a:schemeClr val="lt1"/>
+          </a:fontRef>
+        </p:style>
+        <p:txBody>
+          <a:bodyPr rtlCol="0" anchor="ctr"/>
+          <a:lstStyle/>
+          <a:p>
+            <a:pPr algn="ctr"/>
+          </a:p>
+        </p:txBody>
+      </p:sp>
+      <p:sp>
+        <p:nvSpPr>
+          <p:cNvPr id="3" name="TextBox 2"/>
+          <p:cNvSpPr txBox="1"/>
+          <p:nvPr/>
+        </p:nvSpPr>
+        <p:spPr>
+          <a:xfrm>
+            <a:off x="640080" y="365760"/>
+            <a:ext cx="10972800" cy="365760"/>
+          </a:xfrm>
+          <a:prstGeom prst="rect">
+            <a:avLst/>
+          </a:prstGeom>
+          <a:noFill/>
+        </p:spPr>
+        <p:txBody>
+          <a:bodyPr wrap="none">
+            <a:spAutoFit/>
+          </a:bodyPr>
+          <a:lstStyle/>
+          <a:p>
+            <a:r>
+              <a:rPr sz="1100" b="1">
+                <a:solidFill>
+                  <a:srgbClr val="C8A24B"/>
+                </a:solidFill>
+              </a:rPr>
+              <a:t>НАПРАВЛЕНИЕ 1 · КРЕДИТНЫЙ СКОРИНГ</a:t>
+            </a:r>
+          </a:p>
+        </p:txBody>
+      </p:sp>
+      <p:sp>
+        <p:nvSpPr>
+          <p:cNvPr id="4" name="Rectangle 3"/>
+          <p:cNvSpPr/>
+          <p:nvPr/>
+        </p:nvSpPr>
+        <p:spPr>
+          <a:xfrm>
+            <a:off x="640080" y="731520"/>
+            <a:ext cx="10881360" cy="777240"/>
+          </a:xfrm>
+          <a:prstGeom prst="rect">
+            <a:avLst/>
+          </a:prstGeom>
+          <a:solidFill>
+            <a:srgbClr val="1F5D43"/>
+          </a:solidFill>
+          <a:ln>
+            <a:noFill/>
+          </a:ln>
+          <a:effectLst/>
+        </p:spPr>
+        <p:style>
+          <a:lnRef idx="1">
+            <a:schemeClr val="accent1"/>
+          </a:lnRef>
+          <a:fillRef idx="3">
+            <a:schemeClr val="accent1"/>
+          </a:fillRef>
+          <a:effectRef idx="2">
+            <a:schemeClr val="accent1"/>
+          </a:effectRef>
+          <a:fontRef idx="minor">
+            <a:schemeClr val="lt1"/>
+          </a:fontRef>
+        </p:style>
+        <p:txBody>
+          <a:bodyPr rtlCol="0" anchor="ctr" wrap="square"/>
+          <a:lstStyle/>
+          <a:p>
+            <a:pPr algn="ctr"/>
+            <a:r>
+              <a:rPr sz="2100" b="1">
+                <a:solidFill>
+                  <a:srgbClr val="FFFFFF"/>
+                </a:solidFill>
+              </a:rPr>
+              <a:t>   Скоринг в духе open banking, узбекская версия</a:t>
+            </a:r>
+          </a:p>
+        </p:txBody>
+      </p:sp>
+      <p:pic>
+        <p:nvPicPr>
+          <p:cNvPr id="5" name="Picture 4" descr="d3-scoring.png"/>
+          <p:cNvPicPr>
+            <a:picLocks noChangeAspect="1"/>
+          </p:cNvPicPr>
+          <p:nvPr/>
+        </p:nvPicPr>
+        <p:blipFill>
+          <a:blip r:embed="rId2"/>
+          <a:stretch>
+            <a:fillRect/>
+          </a:stretch>
+        </p:blipFill>
+        <p:spPr>
+          <a:xfrm>
+            <a:off x="548640" y="3192925"/>
+            <a:ext cx="6583680" cy="1752310"/>
+          </a:xfrm>
+          <a:prstGeom prst="rect">
+            <a:avLst/>
+          </a:prstGeom>
+        </p:spPr>
+      </p:pic>
+      <p:sp>
+        <p:nvSpPr>
+          <p:cNvPr id="6" name="TextBox 5"/>
+          <p:cNvSpPr txBox="1"/>
+          <p:nvPr/>
+        </p:nvSpPr>
+        <p:spPr>
+          <a:xfrm>
+            <a:off x="548640" y="6355080"/>
+            <a:ext cx="6583680" cy="365760"/>
+          </a:xfrm>
+          <a:prstGeom prst="rect">
+            <a:avLst/>
+          </a:prstGeom>
+          <a:noFill/>
+        </p:spPr>
+        <p:txBody>
+          <a:bodyPr wrap="none">
+            <a:spAutoFit/>
+          </a:bodyPr>
+          <a:lstStyle/>
+          <a:p>
+            <a:pPr algn="ctr"/>
+            <a:r>
+              <a:rPr sz="1000" i="1">
+                <a:solidFill>
+                  <a:srgbClr val="415046"/>
+                </a:solidFill>
+              </a:rPr>
+              <a:t>Слияние данных в стиле Plaid, адаптированное к инфраструктуре Узбекистана</a:t>
+            </a:r>
+          </a:p>
+        </p:txBody>
+      </p:sp>
+      <p:sp>
+        <p:nvSpPr>
+          <p:cNvPr id="7" name="TextBox 6"/>
+          <p:cNvSpPr txBox="1"/>
+          <p:nvPr/>
+        </p:nvSpPr>
+        <p:spPr>
+          <a:xfrm>
+            <a:off x="7406640" y="1828800"/>
+            <a:ext cx="4480560" cy="4572000"/>
+          </a:xfrm>
+          <a:prstGeom prst="rect">
+            <a:avLst/>
+          </a:prstGeom>
+          <a:noFill/>
+        </p:spPr>
+        <p:txBody>
+          <a:bodyPr wrap="square">
+            <a:spAutoFit/>
+          </a:bodyPr>
+          <a:lstStyle/>
+          <a:p>
+            <a:pPr>
+              <a:spcAft>
+                <a:spcPts val="900"/>
+              </a:spcAft>
+            </a:pPr>
+            <a:r>
+              <a:rPr sz="1300">
+                <a:solidFill>
+                  <a:srgbClr val="14231B"/>
+                </a:solidFill>
+              </a:rPr>
+              <a:t>•  Модель Plaid — это подключи счёт, прочитай денежные потоки, прими решение. В Узбекистане богатейший источник — SoliqOnline (проверенные счета и налоговый оборот) плюс банковские транзакции и бюро CRIF.</a:t>
+            </a:r>
+          </a:p>
+          <a:p>
+            <a:pPr>
+              <a:spcAft>
+                <a:spcPts val="900"/>
+              </a:spcAft>
+            </a:pPr>
+            <a:r>
+              <a:rPr sz="1300">
+                <a:solidFill>
+                  <a:srgbClr val="14231B"/>
+                </a:solidFill>
+              </a:rPr>
+              <a:t>•  Модель выдаёт рейтинг, ставку аванса и цену; Grok формирует понятное обоснование и причины отказа.</a:t>
+            </a:r>
+          </a:p>
+          <a:p>
+            <a:pPr>
+              <a:spcAft>
+                <a:spcPts val="900"/>
+              </a:spcAft>
+            </a:pPr>
+            <a:r>
+              <a:rPr sz="1300">
+                <a:solidFill>
+                  <a:srgbClr val="14231B"/>
+                </a:solidFill>
+              </a:rPr>
+              <a:t>•  Каждое решение версионируется и воспроизводимо — ключевая методология Consistente и то, что запросит регулятор.</a:t>
+            </a:r>
+          </a:p>
+        </p:txBody>
+      </p:sp>
+    </p:spTree>
+  </p:cSld>
+  <p:clrMapOvr>
+    <a:masterClrMapping/>
+  </p:clrMapOvr>
+</p:sld>
+</file>
+
+<file path=ppt/slides/slide12.xml><?xml version="1.0" encoding="utf-8"?>
+<p:sld xmlns:a="http://schemas.openxmlformats.org/drawingml/2006/main" xmlns:p="http://schemas.openxmlformats.org/presentationml/2006/main" xmlns:r="http://schemas.openxmlformats.org/officeDocument/2006/relationships">
+  <p:cSld>
+    <p:spTree>
+      <p:nvGrpSpPr>
+        <p:cNvPr id="1" name=""/>
+        <p:cNvGrpSpPr/>
+        <p:nvPr/>
+      </p:nvGrpSpPr>
+      <p:grpSpPr/>
+      <p:sp>
+        <p:nvSpPr>
+          <p:cNvPr id="2" name="Rectangle 1"/>
+          <p:cNvSpPr/>
+          <p:nvPr/>
+        </p:nvSpPr>
+        <p:spPr>
+          <a:xfrm>
+            <a:off x="0" y="0"/>
+            <a:ext cx="12191695" cy="6858000"/>
+          </a:xfrm>
+          <a:prstGeom prst="rect">
+            <a:avLst/>
+          </a:prstGeom>
+          <a:solidFill>
+            <a:srgbClr val="F7F6F1"/>
+          </a:solidFill>
+          <a:ln>
+            <a:noFill/>
+          </a:ln>
+          <a:effectLst/>
+        </p:spPr>
+        <p:style>
+          <a:lnRef idx="1">
+            <a:schemeClr val="accent1"/>
+          </a:lnRef>
+          <a:fillRef idx="3">
+            <a:schemeClr val="accent1"/>
+          </a:fillRef>
+          <a:effectRef idx="2">
+            <a:schemeClr val="accent1"/>
+          </a:effectRef>
+          <a:fontRef idx="minor">
+            <a:schemeClr val="lt1"/>
+          </a:fontRef>
+        </p:style>
+        <p:txBody>
+          <a:bodyPr rtlCol="0" anchor="ctr"/>
+          <a:lstStyle/>
+          <a:p>
+            <a:pPr algn="ctr"/>
+          </a:p>
+        </p:txBody>
+      </p:sp>
+      <p:sp>
+        <p:nvSpPr>
+          <p:cNvPr id="3" name="TextBox 2"/>
+          <p:cNvSpPr txBox="1"/>
+          <p:nvPr/>
+        </p:nvSpPr>
+        <p:spPr>
+          <a:xfrm>
+            <a:off x="640080" y="365760"/>
+            <a:ext cx="10972800" cy="365760"/>
+          </a:xfrm>
+          <a:prstGeom prst="rect">
+            <a:avLst/>
+          </a:prstGeom>
+          <a:noFill/>
+        </p:spPr>
+        <p:txBody>
+          <a:bodyPr wrap="none">
+            <a:spAutoFit/>
+          </a:bodyPr>
+          <a:lstStyle/>
+          <a:p>
+            <a:r>
+              <a:rPr sz="1100" b="1">
+                <a:solidFill>
+                  <a:srgbClr val="C8A24B"/>
+                </a:solidFill>
+              </a:rPr>
+              <a:t>ЭКОНОМИКА</a:t>
+            </a:r>
+          </a:p>
+        </p:txBody>
+      </p:sp>
+      <p:sp>
+        <p:nvSpPr>
+          <p:cNvPr id="4" name="Rectangle 3"/>
+          <p:cNvSpPr/>
+          <p:nvPr/>
+        </p:nvSpPr>
+        <p:spPr>
+          <a:xfrm>
+            <a:off x="640080" y="731520"/>
+            <a:ext cx="10881360" cy="777240"/>
+          </a:xfrm>
+          <a:prstGeom prst="rect">
+            <a:avLst/>
+          </a:prstGeom>
+          <a:solidFill>
+            <a:srgbClr val="1F5D43"/>
+          </a:solidFill>
+          <a:ln>
+            <a:noFill/>
+          </a:ln>
+          <a:effectLst/>
+        </p:spPr>
+        <p:style>
+          <a:lnRef idx="1">
+            <a:schemeClr val="accent1"/>
+          </a:lnRef>
+          <a:fillRef idx="3">
+            <a:schemeClr val="accent1"/>
+          </a:fillRef>
+          <a:effectRef idx="2">
+            <a:schemeClr val="accent1"/>
+          </a:effectRef>
+          <a:fontRef idx="minor">
+            <a:schemeClr val="lt1"/>
+          </a:fontRef>
+        </p:style>
+        <p:txBody>
+          <a:bodyPr rtlCol="0" anchor="ctr" wrap="square"/>
+          <a:lstStyle/>
+          <a:p>
+            <a:pPr algn="ctr"/>
+            <a:r>
+              <a:rPr sz="2100" b="1">
+                <a:solidFill>
+                  <a:srgbClr val="FFFFFF"/>
+                </a:solidFill>
+              </a:rPr>
+              <a:t>   Что банк зарабатывает на одном счёте</a:t>
+            </a:r>
+          </a:p>
+        </p:txBody>
+      </p:sp>
+      <p:graphicFrame>
+        <p:nvGraphicFramePr>
+          <p:cNvPr id="5" name="Table 4"/>
+          <p:cNvGraphicFramePr>
+            <a:graphicFrameLocks noGrp="1"/>
+          </p:cNvGraphicFramePr>
+          <p:nvPr/>
+        </p:nvGraphicFramePr>
+        <p:xfrm>
+          <a:off x="685800" y="1828800"/>
+          <a:ext cx="10835640" cy="2926080"/>
+        </p:xfrm>
+        <a:graphic>
+          <a:graphicData uri="http://schemas.openxmlformats.org/drawingml/2006/table">
+            <a:tbl>
+              <a:tblPr firstRow="1" bandRow="1">
+                <a:tableStyleId>{5C22544A-7EE6-4342-B048-85BDC9FD1C3A}</a:tableStyleId>
+              </a:tblPr>
+              <a:tblGrid>
+                <a:gridCol w="2708910"/>
+                <a:gridCol w="2708910"/>
+                <a:gridCol w="2708910"/>
+                <a:gridCol w="2708910"/>
+              </a:tblGrid>
+              <a:tr h="365760">
+                <a:tc>
+                  <a:txBody>
+                    <a:bodyPr/>
+                    <a:lstStyle/>
+                    <a:p>
+                      <a:r>
+                        <a:rPr sz="1100" b="1">
+                          <a:solidFill>
+                            <a:srgbClr val="FFFFFF"/>
+                          </a:solidFill>
+                        </a:rPr>
+                        <a:t>Поток · счёт $10 000 · 85% · 60 дн · 5%</a:t>
+                      </a:r>
+                    </a:p>
+                  </a:txBody>
+                  <a:tcPr>
+                    <a:solidFill>
+                      <a:srgbClr val="1F5D43"/>
+                    </a:solidFill>
+                  </a:tcPr>
+                </a:tc>
+                <a:tc>
+                  <a:txBody>
+                    <a:bodyPr/>
+                    <a:lstStyle/>
+                    <a:p>
+                      <a:r>
+                        <a:rPr sz="1100" b="1">
+                          <a:solidFill>
+                            <a:srgbClr val="FFFFFF"/>
+                          </a:solidFill>
+                        </a:rPr>
+                        <a:t>Сумма</a:t>
+                      </a:r>
+                    </a:p>
+                  </a:txBody>
+                  <a:tcPr>
+                    <a:solidFill>
+                      <a:srgbClr val="1F5D43"/>
+                    </a:solidFill>
+                  </a:tcPr>
+                </a:tc>
+                <a:tc>
+                  <a:txBody>
+                    <a:bodyPr/>
+                    <a:lstStyle/>
+                    <a:p>
+                      <a:r>
+                        <a:rPr sz="1100" b="1">
+                          <a:solidFill>
+                            <a:srgbClr val="FFFFFF"/>
+                          </a:solidFill>
+                        </a:rPr>
+                        <a:t>Направление</a:t>
+                      </a:r>
+                    </a:p>
+                  </a:txBody>
+                  <a:tcPr>
+                    <a:solidFill>
+                      <a:srgbClr val="1F5D43"/>
+                    </a:solidFill>
+                  </a:tcPr>
+                </a:tc>
+                <a:tc>
+                  <a:txBody>
+                    <a:bodyPr/>
+                    <a:lstStyle/>
+                    <a:p>
+                      <a:r>
+                        <a:rPr sz="1100" b="1">
+                          <a:solidFill>
+                            <a:srgbClr val="FFFFFF"/>
+                          </a:solidFill>
+                        </a:rPr>
+                        <a:t>День</a:t>
+                      </a:r>
+                    </a:p>
+                  </a:txBody>
+                  <a:tcPr>
+                    <a:solidFill>
+                      <a:srgbClr val="1F5D43"/>
+                    </a:solidFill>
+                  </a:tcPr>
+                </a:tc>
+              </a:tr>
+              <a:tr h="365760">
+                <a:tc>
+                  <a:txBody>
+                    <a:bodyPr/>
+                    <a:lstStyle/>
+                    <a:p>
+                      <a:r>
+                        <a:rPr sz="1050">
+                          <a:solidFill>
+                            <a:srgbClr val="14231B"/>
+                          </a:solidFill>
+                        </a:rPr>
+                        <a:t>Аванс продавцу (85%)</a:t>
+                      </a:r>
+                    </a:p>
+                  </a:txBody>
+                  <a:tcPr>
+                    <a:solidFill>
+                      <a:srgbClr val="FFFFFF"/>
+                    </a:solidFill>
+                  </a:tcPr>
+                </a:tc>
+                <a:tc>
+                  <a:txBody>
+                    <a:bodyPr/>
+                    <a:lstStyle/>
+                    <a:p>
+                      <a:r>
+                        <a:rPr sz="1050">
+                          <a:solidFill>
+                            <a:srgbClr val="14231B"/>
+                          </a:solidFill>
+                        </a:rPr>
+                        <a:t>$8 500</a:t>
+                      </a:r>
+                    </a:p>
+                  </a:txBody>
+                  <a:tcPr>
+                    <a:solidFill>
+                      <a:srgbClr val="FFFFFF"/>
+                    </a:solidFill>
+                  </a:tcPr>
+                </a:tc>
+                <a:tc>
+                  <a:txBody>
+                    <a:bodyPr/>
+                    <a:lstStyle/>
+                    <a:p>
+                      <a:r>
+                        <a:rPr sz="1050">
+                          <a:solidFill>
+                            <a:srgbClr val="14231B"/>
+                          </a:solidFill>
+                        </a:rPr>
+                        <a:t>Платформа → продавец</a:t>
+                      </a:r>
+                    </a:p>
+                  </a:txBody>
+                  <a:tcPr>
+                    <a:solidFill>
+                      <a:srgbClr val="FFFFFF"/>
+                    </a:solidFill>
+                  </a:tcPr>
+                </a:tc>
+                <a:tc>
+                  <a:txBody>
+                    <a:bodyPr/>
+                    <a:lstStyle/>
+                    <a:p>
+                      <a:r>
+                        <a:rPr sz="1050">
+                          <a:solidFill>
+                            <a:srgbClr val="14231B"/>
+                          </a:solidFill>
+                        </a:rPr>
+                        <a:t>День 1</a:t>
+                      </a:r>
+                    </a:p>
+                  </a:txBody>
+                  <a:tcPr>
+                    <a:solidFill>
+                      <a:srgbClr val="FFFFFF"/>
+                    </a:solidFill>
+                  </a:tcPr>
+                </a:tc>
+              </a:tr>
+              <a:tr h="365760">
+                <a:tc>
+                  <a:txBody>
+                    <a:bodyPr/>
+                    <a:lstStyle/>
+                    <a:p>
+                      <a:r>
+                        <a:rPr sz="1050">
+                          <a:solidFill>
+                            <a:srgbClr val="14231B"/>
+                          </a:solidFill>
+                        </a:rPr>
+                        <a:t>Плательщик (дебитор) платит полностью</a:t>
+                      </a:r>
+                    </a:p>
+                  </a:txBody>
+                  <a:tcPr>
+                    <a:solidFill>
+                      <a:srgbClr val="EEEDE5"/>
+                    </a:solidFill>
+                  </a:tcPr>
+                </a:tc>
+                <a:tc>
+                  <a:txBody>
+                    <a:bodyPr/>
+                    <a:lstStyle/>
+                    <a:p>
+                      <a:r>
+                        <a:rPr sz="1050">
+                          <a:solidFill>
+                            <a:srgbClr val="14231B"/>
+                          </a:solidFill>
+                        </a:rPr>
+                        <a:t>$10 000</a:t>
+                      </a:r>
+                    </a:p>
+                  </a:txBody>
+                  <a:tcPr>
+                    <a:solidFill>
+                      <a:srgbClr val="EEEDE5"/>
+                    </a:solidFill>
+                  </a:tcPr>
+                </a:tc>
+                <a:tc>
+                  <a:txBody>
+                    <a:bodyPr/>
+                    <a:lstStyle/>
+                    <a:p>
+                      <a:r>
+                        <a:rPr sz="1050">
+                          <a:solidFill>
+                            <a:srgbClr val="14231B"/>
+                          </a:solidFill>
+                        </a:rPr>
+                        <a:t>Плательщик → сбор</a:t>
+                      </a:r>
+                    </a:p>
+                  </a:txBody>
+                  <a:tcPr>
+                    <a:solidFill>
+                      <a:srgbClr val="EEEDE5"/>
+                    </a:solidFill>
+                  </a:tcPr>
+                </a:tc>
+                <a:tc>
+                  <a:txBody>
+                    <a:bodyPr/>
+                    <a:lstStyle/>
+                    <a:p>
+                      <a:r>
+                        <a:rPr sz="1050">
+                          <a:solidFill>
+                            <a:srgbClr val="14231B"/>
+                          </a:solidFill>
+                        </a:rPr>
+                        <a:t>День 60</a:t>
+                      </a:r>
+                    </a:p>
+                  </a:txBody>
+                  <a:tcPr>
+                    <a:solidFill>
+                      <a:srgbClr val="EEEDE5"/>
+                    </a:solidFill>
+                  </a:tcPr>
+                </a:tc>
+              </a:tr>
+              <a:tr h="365760">
+                <a:tc>
+                  <a:txBody>
+                    <a:bodyPr/>
+                    <a:lstStyle/>
+                    <a:p>
+                      <a:r>
+                        <a:rPr sz="1050">
+                          <a:solidFill>
+                            <a:srgbClr val="14231B"/>
+                          </a:solidFill>
+                        </a:rPr>
+                        <a:t>Остаток продавцу</a:t>
+                      </a:r>
+                    </a:p>
+                  </a:txBody>
+                  <a:tcPr>
+                    <a:solidFill>
+                      <a:srgbClr val="FFFFFF"/>
+                    </a:solidFill>
+                  </a:tcPr>
+                </a:tc>
+                <a:tc>
+                  <a:txBody>
+                    <a:bodyPr/>
+                    <a:lstStyle/>
+                    <a:p>
+                      <a:r>
+                        <a:rPr sz="1050">
+                          <a:solidFill>
+                            <a:srgbClr val="14231B"/>
+                          </a:solidFill>
+                        </a:rPr>
+                        <a:t>$1 500</a:t>
+                      </a:r>
+                    </a:p>
+                  </a:txBody>
+                  <a:tcPr>
+                    <a:solidFill>
+                      <a:srgbClr val="FFFFFF"/>
+                    </a:solidFill>
+                  </a:tcPr>
+                </a:tc>
+                <a:tc>
+                  <a:txBody>
+                    <a:bodyPr/>
+                    <a:lstStyle/>
+                    <a:p>
+                      <a:r>
+                        <a:rPr sz="1050">
+                          <a:solidFill>
+                            <a:srgbClr val="14231B"/>
+                          </a:solidFill>
+                        </a:rPr>
+                        <a:t>Платформа → продавец</a:t>
+                      </a:r>
+                    </a:p>
+                  </a:txBody>
+                  <a:tcPr>
+                    <a:solidFill>
+                      <a:srgbClr val="FFFFFF"/>
+                    </a:solidFill>
+                  </a:tcPr>
+                </a:tc>
+                <a:tc>
+                  <a:txBody>
+                    <a:bodyPr/>
+                    <a:lstStyle/>
+                    <a:p>
+                      <a:r>
+                        <a:rPr sz="1050">
+                          <a:solidFill>
+                            <a:srgbClr val="14231B"/>
+                          </a:solidFill>
+                        </a:rPr>
+                        <a:t>День 60</a:t>
+                      </a:r>
+                    </a:p>
+                  </a:txBody>
+                  <a:tcPr>
+                    <a:solidFill>
+                      <a:srgbClr val="FFFFFF"/>
+                    </a:solidFill>
+                  </a:tcPr>
+                </a:tc>
+              </a:tr>
+              <a:tr h="365760">
+                <a:tc>
+                  <a:txBody>
+                    <a:bodyPr/>
+                    <a:lstStyle/>
+                    <a:p>
+                      <a:r>
+                        <a:rPr sz="1050">
+                          <a:solidFill>
+                            <a:srgbClr val="14231B"/>
+                          </a:solidFill>
+                        </a:rPr>
+                        <a:t>Дисконтный доход (брутто)</a:t>
+                      </a:r>
+                    </a:p>
+                  </a:txBody>
+                  <a:tcPr>
+                    <a:solidFill>
+                      <a:srgbClr val="EEEDE5"/>
+                    </a:solidFill>
+                  </a:tcPr>
+                </a:tc>
+                <a:tc>
+                  <a:txBody>
+                    <a:bodyPr/>
+                    <a:lstStyle/>
+                    <a:p>
+                      <a:r>
+                        <a:rPr sz="1050">
+                          <a:solidFill>
+                            <a:srgbClr val="14231B"/>
+                          </a:solidFill>
+                        </a:rPr>
+                        <a:t>$500</a:t>
+                      </a:r>
+                    </a:p>
+                  </a:txBody>
+                  <a:tcPr>
+                    <a:solidFill>
+                      <a:srgbClr val="EEEDE5"/>
+                    </a:solidFill>
+                  </a:tcPr>
+                </a:tc>
+                <a:tc>
+                  <a:txBody>
+                    <a:bodyPr/>
+                    <a:lstStyle/>
+                    <a:p>
+                      <a:r>
+                        <a:rPr sz="1050">
+                          <a:solidFill>
+                            <a:srgbClr val="14231B"/>
+                          </a:solidFill>
+                        </a:rPr>
+                        <a:t>Капитал удерживает</a:t>
+                      </a:r>
+                    </a:p>
+                  </a:txBody>
+                  <a:tcPr>
+                    <a:solidFill>
+                      <a:srgbClr val="EEEDE5"/>
+                    </a:solidFill>
+                  </a:tcPr>
+                </a:tc>
+                <a:tc>
+                  <a:txBody>
+                    <a:bodyPr/>
+                    <a:lstStyle/>
+                    <a:p>
+                      <a:r>
+                        <a:rPr sz="1050">
+                          <a:solidFill>
+                            <a:srgbClr val="14231B"/>
+                          </a:solidFill>
+                        </a:rPr>
+                        <a:t>День 60</a:t>
+                      </a:r>
+                    </a:p>
+                  </a:txBody>
+                  <a:tcPr>
+                    <a:solidFill>
+                      <a:srgbClr val="EEEDE5"/>
+                    </a:solidFill>
+                  </a:tcPr>
+                </a:tc>
+              </a:tr>
+              <a:tr h="365760">
+                <a:tc>
+                  <a:txBody>
+                    <a:bodyPr/>
+                    <a:lstStyle/>
+                    <a:p>
+                      <a:r>
+                        <a:rPr sz="1050">
+                          <a:solidFill>
+                            <a:srgbClr val="14231B"/>
+                          </a:solidFill>
+                        </a:rPr>
+                        <a:t>Комиссия платформы (за объём)</a:t>
+                      </a:r>
+                    </a:p>
+                  </a:txBody>
+                  <a:tcPr>
+                    <a:solidFill>
+                      <a:srgbClr val="FFFFFF"/>
+                    </a:solidFill>
+                  </a:tcPr>
+                </a:tc>
+                <a:tc>
+                  <a:txBody>
+                    <a:bodyPr/>
+                    <a:lstStyle/>
+                    <a:p>
+                      <a:r>
+                        <a:rPr sz="1050">
+                          <a:solidFill>
+                            <a:srgbClr val="14231B"/>
+                          </a:solidFill>
+                        </a:rPr>
+                        <a:t>≈ $13</a:t>
+                      </a:r>
+                    </a:p>
+                  </a:txBody>
+                  <a:tcPr>
+                    <a:solidFill>
+                      <a:srgbClr val="FFFFFF"/>
+                    </a:solidFill>
+                  </a:tcPr>
+                </a:tc>
+                <a:tc>
+                  <a:txBody>
+                    <a:bodyPr/>
+                    <a:lstStyle/>
+                    <a:p>
+                      <a:r>
+                        <a:rPr sz="1050">
+                          <a:solidFill>
+                            <a:srgbClr val="14231B"/>
+                          </a:solidFill>
+                        </a:rPr>
+                        <a:t>Банк → Consistente</a:t>
+                      </a:r>
+                    </a:p>
+                  </a:txBody>
+                  <a:tcPr>
+                    <a:solidFill>
+                      <a:srgbClr val="FFFFFF"/>
+                    </a:solidFill>
+                  </a:tcPr>
+                </a:tc>
+                <a:tc>
+                  <a:txBody>
+                    <a:bodyPr/>
+                    <a:lstStyle/>
+                    <a:p>
+                      <a:r>
+                        <a:rPr sz="1050">
+                          <a:solidFill>
+                            <a:srgbClr val="14231B"/>
+                          </a:solidFill>
+                        </a:rPr>
+                        <a:t>День 60</a:t>
+                      </a:r>
+                    </a:p>
+                  </a:txBody>
+                  <a:tcPr>
+                    <a:solidFill>
+                      <a:srgbClr val="FFFFFF"/>
+                    </a:solidFill>
+                  </a:tcPr>
+                </a:tc>
+              </a:tr>
+              <a:tr h="365760">
+                <a:tc>
+                  <a:txBody>
+                    <a:bodyPr/>
+                    <a:lstStyle/>
+                    <a:p>
+                      <a:r>
+                        <a:rPr sz="1050">
+                          <a:solidFill>
+                            <a:srgbClr val="14231B"/>
+                          </a:solidFill>
+                        </a:rPr>
+                        <a:t>Чистый доход по счёту</a:t>
+                      </a:r>
+                    </a:p>
+                  </a:txBody>
+                  <a:tcPr>
+                    <a:solidFill>
+                      <a:srgbClr val="EEEDE5"/>
+                    </a:solidFill>
+                  </a:tcPr>
+                </a:tc>
+                <a:tc>
+                  <a:txBody>
+                    <a:bodyPr/>
+                    <a:lstStyle/>
+                    <a:p>
+                      <a:r>
+                        <a:rPr sz="1050">
+                          <a:solidFill>
+                            <a:srgbClr val="14231B"/>
+                          </a:solidFill>
+                        </a:rPr>
+                        <a:t>≈ $487</a:t>
+                      </a:r>
+                    </a:p>
+                  </a:txBody>
+                  <a:tcPr>
+                    <a:solidFill>
+                      <a:srgbClr val="EEEDE5"/>
+                    </a:solidFill>
+                  </a:tcPr>
+                </a:tc>
+                <a:tc>
+                  <a:txBody>
+                    <a:bodyPr/>
+                    <a:lstStyle/>
+                    <a:p>
+                      <a:r>
+                        <a:rPr sz="1050">
+                          <a:solidFill>
+                            <a:srgbClr val="14231B"/>
+                          </a:solidFill>
+                        </a:rPr>
+                        <a:t>Капитал удерживает</a:t>
+                      </a:r>
+                    </a:p>
+                  </a:txBody>
+                  <a:tcPr>
+                    <a:solidFill>
+                      <a:srgbClr val="EEEDE5"/>
+                    </a:solidFill>
+                  </a:tcPr>
+                </a:tc>
+                <a:tc>
+                  <a:txBody>
+                    <a:bodyPr/>
+                    <a:lstStyle/>
+                    <a:p>
+                      <a:r>
+                        <a:rPr sz="1050">
+                          <a:solidFill>
+                            <a:srgbClr val="14231B"/>
+                          </a:solidFill>
+                        </a:rPr>
+                        <a:t>День 60</a:t>
+                      </a:r>
+                    </a:p>
+                  </a:txBody>
+                  <a:tcPr>
+                    <a:solidFill>
+                      <a:srgbClr val="EEEDE5"/>
+                    </a:solidFill>
+                  </a:tcPr>
+                </a:tc>
+              </a:tr>
+              <a:tr h="365760">
+                <a:tc>
+                  <a:txBody>
+                    <a:bodyPr/>
+                    <a:lstStyle/>
+                    <a:p>
+                      <a:r>
+                        <a:rPr sz="1050">
+                          <a:solidFill>
+                            <a:srgbClr val="14231B"/>
+                          </a:solidFill>
+                        </a:rPr>
+                        <a:t>Годовая доходность на капитал</a:t>
+                      </a:r>
+                    </a:p>
+                  </a:txBody>
+                  <a:tcPr>
+                    <a:solidFill>
+                      <a:srgbClr val="FFFFFF"/>
+                    </a:solidFill>
+                  </a:tcPr>
+                </a:tc>
+                <a:tc>
+                  <a:txBody>
+                    <a:bodyPr/>
+                    <a:lstStyle/>
+                    <a:p>
+                      <a:r>
+                        <a:rPr sz="1050">
+                          <a:solidFill>
+                            <a:srgbClr val="14231B"/>
+                          </a:solidFill>
+                        </a:rPr>
+                        <a:t>≈ 30% год.</a:t>
+                      </a:r>
+                    </a:p>
+                  </a:txBody>
+                  <a:tcPr>
+                    <a:solidFill>
+                      <a:srgbClr val="FFFFFF"/>
+                    </a:solidFill>
+                  </a:tcPr>
+                </a:tc>
+                <a:tc>
+                  <a:txBody>
+                    <a:bodyPr/>
+                    <a:lstStyle/>
+                    <a:p>
+                      <a:r>
+                        <a:rPr sz="1050">
+                          <a:solidFill>
+                            <a:srgbClr val="14231B"/>
+                          </a:solidFill>
+                        </a:rPr>
+                        <a:t>—</a:t>
+                      </a:r>
+                    </a:p>
+                  </a:txBody>
+                  <a:tcPr>
+                    <a:solidFill>
+                      <a:srgbClr val="FFFFFF"/>
+                    </a:solidFill>
+                  </a:tcPr>
+                </a:tc>
+                <a:tc>
+                  <a:txBody>
+                    <a:bodyPr/>
+                    <a:lstStyle/>
+                    <a:p>
+                      <a:r>
+                        <a:rPr sz="1050">
+                          <a:solidFill>
+                            <a:srgbClr val="14231B"/>
+                          </a:solidFill>
+                        </a:rPr>
+                        <a:t>—</a:t>
+                      </a:r>
+                    </a:p>
+                  </a:txBody>
+                  <a:tcPr>
+                    <a:solidFill>
+                      <a:srgbClr val="FFFFFF"/>
+                    </a:solidFill>
+                  </a:tcPr>
+                </a:tc>
+              </a:tr>
+            </a:tbl>
+          </a:graphicData>
+        </a:graphic>
+      </p:graphicFrame>
+      <p:sp>
+        <p:nvSpPr>
+          <p:cNvPr id="6" name="TextBox 5"/>
+          <p:cNvSpPr txBox="1"/>
+          <p:nvPr/>
+        </p:nvSpPr>
+        <p:spPr>
+          <a:xfrm>
+            <a:off x="685800" y="6035040"/>
+            <a:ext cx="10881360" cy="731520"/>
+          </a:xfrm>
+          <a:prstGeom prst="rect">
+            <a:avLst/>
+          </a:prstGeom>
+          <a:noFill/>
+        </p:spPr>
+        <p:txBody>
+          <a:bodyPr wrap="square">
+            <a:spAutoFit/>
+          </a:bodyPr>
+          <a:lstStyle/>
+          <a:p>
+            <a:r>
+              <a:rPr sz="1000" i="1">
+                <a:solidFill>
+                  <a:srgbClr val="415046"/>
+                </a:solidFill>
+              </a:rPr>
+              <a:t>Иллюстративно, по стандартной структуре с проверкой SoliqOnline. ~30% годовых на размещённый капитал против 22–28% по необеспеченному кредитованию МСБ — при меньшем риске: счёт проверен государством, плательщик подтвердил обязательство, банк держит зарегистрированный приоритет в ЦБ. Банк прибылен вплоть до ~4% дефолтов.</a:t>
+            </a:r>
+          </a:p>
+        </p:txBody>
+      </p:sp>
+    </p:spTree>
+  </p:cSld>
+  <p:clrMapOvr>
+    <a:masterClrMapping/>
+  </p:clrMapOvr>
+</p:sld>
+</file>
+
+<file path=ppt/slides/slide13.xml><?xml version="1.0" encoding="utf-8"?>
+<p:sld xmlns:a="http://schemas.openxmlformats.org/drawingml/2006/main" xmlns:p="http://schemas.openxmlformats.org/presentationml/2006/main" xmlns:r="http://schemas.openxmlformats.org/officeDocument/2006/relationships">
+  <p:cSld>
+    <p:spTree>
+      <p:nvGrpSpPr>
+        <p:cNvPr id="1" name=""/>
+        <p:cNvGrpSpPr/>
+        <p:nvPr/>
+      </p:nvGrpSpPr>
+      <p:grpSpPr/>
+      <p:sp>
+        <p:nvSpPr>
+          <p:cNvPr id="2" name="Rectangle 1"/>
+          <p:cNvSpPr/>
+          <p:nvPr/>
+        </p:nvSpPr>
+        <p:spPr>
+          <a:xfrm>
+            <a:off x="0" y="0"/>
+            <a:ext cx="12191695" cy="6858000"/>
+          </a:xfrm>
+          <a:prstGeom prst="rect">
+            <a:avLst/>
+          </a:prstGeom>
+          <a:solidFill>
+            <a:srgbClr val="F7F6F1"/>
+          </a:solidFill>
+          <a:ln>
+            <a:noFill/>
+          </a:ln>
+          <a:effectLst/>
+        </p:spPr>
+        <p:style>
+          <a:lnRef idx="1">
+            <a:schemeClr val="accent1"/>
+          </a:lnRef>
+          <a:fillRef idx="3">
+            <a:schemeClr val="accent1"/>
+          </a:fillRef>
+          <a:effectRef idx="2">
+            <a:schemeClr val="accent1"/>
+          </a:effectRef>
+          <a:fontRef idx="minor">
+            <a:schemeClr val="lt1"/>
+          </a:fontRef>
+        </p:style>
+        <p:txBody>
+          <a:bodyPr rtlCol="0" anchor="ctr"/>
+          <a:lstStyle/>
+          <a:p>
+            <a:pPr algn="ctr"/>
+          </a:p>
+        </p:txBody>
+      </p:sp>
+      <p:sp>
+        <p:nvSpPr>
+          <p:cNvPr id="3" name="TextBox 2"/>
+          <p:cNvSpPr txBox="1"/>
+          <p:nvPr/>
+        </p:nvSpPr>
+        <p:spPr>
+          <a:xfrm>
+            <a:off x="640080" y="365760"/>
+            <a:ext cx="10972800" cy="365760"/>
+          </a:xfrm>
+          <a:prstGeom prst="rect">
+            <a:avLst/>
+          </a:prstGeom>
+          <a:noFill/>
+        </p:spPr>
+        <p:txBody>
+          <a:bodyPr wrap="none">
+            <a:spAutoFit/>
+          </a:bodyPr>
+          <a:lstStyle/>
+          <a:p>
+            <a:r>
+              <a:rPr sz="1100" b="1">
+                <a:solidFill>
+                  <a:srgbClr val="C8A24B"/>
+                </a:solidFill>
+              </a:rPr>
+              <a:t>НАПРАВЛЕНИЕ 1 · КОММЕРЧЕСКАЯ МОДЕЛЬ</a:t>
+            </a:r>
+          </a:p>
+        </p:txBody>
+      </p:sp>
+      <p:sp>
+        <p:nvSpPr>
+          <p:cNvPr id="4" name="Rectangle 3"/>
+          <p:cNvSpPr/>
+          <p:nvPr/>
+        </p:nvSpPr>
+        <p:spPr>
+          <a:xfrm>
+            <a:off x="640080" y="731520"/>
+            <a:ext cx="10881360" cy="777240"/>
+          </a:xfrm>
+          <a:prstGeom prst="rect">
+            <a:avLst/>
+          </a:prstGeom>
+          <a:solidFill>
+            <a:srgbClr val="1F5D43"/>
+          </a:solidFill>
+          <a:ln>
+            <a:noFill/>
+          </a:ln>
+          <a:effectLst/>
+        </p:spPr>
+        <p:style>
+          <a:lnRef idx="1">
+            <a:schemeClr val="accent1"/>
+          </a:lnRef>
+          <a:fillRef idx="3">
+            <a:schemeClr val="accent1"/>
+          </a:fillRef>
+          <a:effectRef idx="2">
+            <a:schemeClr val="accent1"/>
+          </a:effectRef>
+          <a:fontRef idx="minor">
+            <a:schemeClr val="lt1"/>
+          </a:fontRef>
+        </p:style>
+        <p:txBody>
+          <a:bodyPr rtlCol="0" anchor="ctr" wrap="square"/>
+          <a:lstStyle/>
+          <a:p>
+            <a:pPr algn="ctr"/>
+            <a:r>
+              <a:rPr sz="2100" b="1">
+                <a:solidFill>
+                  <a:srgbClr val="FFFFFF"/>
+                </a:solidFill>
+              </a:rPr>
+              <a:t>   Оплата только за объём — интересы совпадают с банком</a:t>
+            </a:r>
+          </a:p>
+        </p:txBody>
+      </p:sp>
+      <p:graphicFrame>
+        <p:nvGraphicFramePr>
+          <p:cNvPr id="5" name="Table 4"/>
+          <p:cNvGraphicFramePr>
+            <a:graphicFrameLocks noGrp="1"/>
+          </p:cNvGraphicFramePr>
+          <p:nvPr/>
+        </p:nvGraphicFramePr>
+        <p:xfrm>
+          <a:off x="685800" y="1828800"/>
+          <a:ext cx="10835640" cy="1828800"/>
+        </p:xfrm>
+        <a:graphic>
+          <a:graphicData uri="http://schemas.openxmlformats.org/drawingml/2006/table">
+            <a:tbl>
+              <a:tblPr firstRow="1" bandRow="1">
+                <a:tableStyleId>{5C22544A-7EE6-4342-B048-85BDC9FD1C3A}</a:tableStyleId>
+              </a:tblPr>
+              <a:tblGrid>
+                <a:gridCol w="5417820"/>
+                <a:gridCol w="5417820"/>
+              </a:tblGrid>
+              <a:tr h="365760">
+                <a:tc>
+                  <a:txBody>
+                    <a:bodyPr/>
+                    <a:lstStyle/>
+                    <a:p>
+                      <a:r>
+                        <a:rPr sz="1100" b="1">
+                          <a:solidFill>
+                            <a:srgbClr val="FFFFFF"/>
+                          </a:solidFill>
+                        </a:rPr>
+                        <a:t>Месячный объём финансирования</a:t>
+                      </a:r>
+                    </a:p>
+                  </a:txBody>
+                  <a:tcPr>
+                    <a:solidFill>
+                      <a:srgbClr val="1F5D43"/>
+                    </a:solidFill>
+                  </a:tcPr>
+                </a:tc>
+                <a:tc>
+                  <a:txBody>
+                    <a:bodyPr/>
+                    <a:lstStyle/>
+                    <a:p>
+                      <a:r>
+                        <a:rPr sz="1100" b="1">
+                          <a:solidFill>
+                            <a:srgbClr val="FFFFFF"/>
+                          </a:solidFill>
+                        </a:rPr>
+                        <a:t>Комиссия платформы (б.п. от объёма)</a:t>
+                      </a:r>
+                    </a:p>
+                  </a:txBody>
+                  <a:tcPr>
+                    <a:solidFill>
+                      <a:srgbClr val="1F5D43"/>
+                    </a:solidFill>
+                  </a:tcPr>
+                </a:tc>
+              </a:tr>
+              <a:tr h="365760">
+                <a:tc>
+                  <a:txBody>
+                    <a:bodyPr/>
+                    <a:lstStyle/>
+                    <a:p>
+                      <a:r>
+                        <a:rPr sz="1050">
+                          <a:solidFill>
+                            <a:srgbClr val="14231B"/>
+                          </a:solidFill>
+                        </a:rPr>
+                        <a:t>До 50 млрд сум</a:t>
+                      </a:r>
+                    </a:p>
+                  </a:txBody>
+                  <a:tcPr>
+                    <a:solidFill>
+                      <a:srgbClr val="FFFFFF"/>
+                    </a:solidFill>
+                  </a:tcPr>
+                </a:tc>
+                <a:tc>
+                  <a:txBody>
+                    <a:bodyPr/>
+                    <a:lstStyle/>
+                    <a:p>
+                      <a:r>
+                        <a:rPr sz="1050">
+                          <a:solidFill>
+                            <a:srgbClr val="14231B"/>
+                          </a:solidFill>
+                        </a:rPr>
+                        <a:t>120 б.п.</a:t>
+                      </a:r>
+                    </a:p>
+                  </a:txBody>
+                  <a:tcPr>
+                    <a:solidFill>
+                      <a:srgbClr val="FFFFFF"/>
+                    </a:solidFill>
+                  </a:tcPr>
+                </a:tc>
+              </a:tr>
+              <a:tr h="365760">
+                <a:tc>
+                  <a:txBody>
+                    <a:bodyPr/>
+                    <a:lstStyle/>
+                    <a:p>
+                      <a:r>
+                        <a:rPr sz="1050">
+                          <a:solidFill>
+                            <a:srgbClr val="14231B"/>
+                          </a:solidFill>
+                        </a:rPr>
+                        <a:t>50–200 млрд сум</a:t>
+                      </a:r>
+                    </a:p>
+                  </a:txBody>
+                  <a:tcPr>
+                    <a:solidFill>
+                      <a:srgbClr val="EEEDE5"/>
+                    </a:solidFill>
+                  </a:tcPr>
+                </a:tc>
+                <a:tc>
+                  <a:txBody>
+                    <a:bodyPr/>
+                    <a:lstStyle/>
+                    <a:p>
+                      <a:r>
+                        <a:rPr sz="1050">
+                          <a:solidFill>
+                            <a:srgbClr val="14231B"/>
+                          </a:solidFill>
+                        </a:rPr>
+                        <a:t>90 б.п.</a:t>
+                      </a:r>
+                    </a:p>
+                  </a:txBody>
+                  <a:tcPr>
+                    <a:solidFill>
+                      <a:srgbClr val="EEEDE5"/>
+                    </a:solidFill>
+                  </a:tcPr>
+                </a:tc>
+              </a:tr>
+              <a:tr h="365760">
+                <a:tc>
+                  <a:txBody>
+                    <a:bodyPr/>
+                    <a:lstStyle/>
+                    <a:p>
+                      <a:r>
+                        <a:rPr sz="1050">
+                          <a:solidFill>
+                            <a:srgbClr val="14231B"/>
+                          </a:solidFill>
+                        </a:rPr>
+                        <a:t>200–500 млрд сум</a:t>
+                      </a:r>
+                    </a:p>
+                  </a:txBody>
+                  <a:tcPr>
+                    <a:solidFill>
+                      <a:srgbClr val="FFFFFF"/>
+                    </a:solidFill>
+                  </a:tcPr>
+                </a:tc>
+                <a:tc>
+                  <a:txBody>
+                    <a:bodyPr/>
+                    <a:lstStyle/>
+                    <a:p>
+                      <a:r>
+                        <a:rPr sz="1050">
+                          <a:solidFill>
+                            <a:srgbClr val="14231B"/>
+                          </a:solidFill>
+                        </a:rPr>
+                        <a:t>70 б.п.</a:t>
+                      </a:r>
+                    </a:p>
+                  </a:txBody>
+                  <a:tcPr>
+                    <a:solidFill>
+                      <a:srgbClr val="FFFFFF"/>
+                    </a:solidFill>
+                  </a:tcPr>
+                </a:tc>
+              </a:tr>
+              <a:tr h="365760">
+                <a:tc>
+                  <a:txBody>
+                    <a:bodyPr/>
+                    <a:lstStyle/>
+                    <a:p>
+                      <a:r>
+                        <a:rPr sz="1050">
+                          <a:solidFill>
+                            <a:srgbClr val="14231B"/>
+                          </a:solidFill>
+                        </a:rPr>
+                        <a:t>Свыше 500 млрд сум</a:t>
+                      </a:r>
+                    </a:p>
+                  </a:txBody>
+                  <a:tcPr>
+                    <a:solidFill>
+                      <a:srgbClr val="EEEDE5"/>
+                    </a:solidFill>
+                  </a:tcPr>
+                </a:tc>
+                <a:tc>
+                  <a:txBody>
+                    <a:bodyPr/>
+                    <a:lstStyle/>
+                    <a:p>
+                      <a:r>
+                        <a:rPr sz="1050">
+                          <a:solidFill>
+                            <a:srgbClr val="14231B"/>
+                          </a:solidFill>
+                        </a:rPr>
+                        <a:t>55 б.п.</a:t>
+                      </a:r>
+                    </a:p>
+                  </a:txBody>
+                  <a:tcPr>
+                    <a:solidFill>
+                      <a:srgbClr val="EEEDE5"/>
+                    </a:solidFill>
+                  </a:tcPr>
+                </a:tc>
+              </a:tr>
+            </a:tbl>
+          </a:graphicData>
+        </a:graphic>
+      </p:graphicFrame>
+      <p:sp>
+        <p:nvSpPr>
+          <p:cNvPr id="6" name="TextBox 5"/>
+          <p:cNvSpPr txBox="1"/>
+          <p:nvPr/>
+        </p:nvSpPr>
+        <p:spPr>
+          <a:xfrm>
+            <a:off x="685800" y="6035040"/>
+            <a:ext cx="10881360" cy="731520"/>
+          </a:xfrm>
+          <a:prstGeom prst="rect">
+            <a:avLst/>
+          </a:prstGeom>
+          <a:noFill/>
+        </p:spPr>
+        <p:txBody>
+          <a:bodyPr wrap="square">
+            <a:spAutoFit/>
+          </a:bodyPr>
+          <a:lstStyle/>
+          <a:p>
+            <a:r>
+              <a:rPr sz="1000" i="1">
+                <a:solidFill>
+                  <a:srgbClr val="415046"/>
+                </a:solidFill>
+              </a:rPr>
+              <a:t>Иллюстративно. Без SaaS-лицензии, без оплаты за место, без платы за внедрение — Consistente получает вознаграждение только когда банк финансирует счёт. Опции на столе: альтернатива с revenue-share (небольшой % дисконтного дохода банка вместо б.п.), 12-месячная эксклюзивность для банка в Узбекистане и отложенный опцион на долю в Год 3 в виде новых акций (без размытия, без прав в совете/вето). Модуль международного SPV: ~60 б.п. в год от инвестированных активов + доля от результата сверх порога. Итоговые цифры — по согласованию с Universalbank.</a:t>
+            </a:r>
+          </a:p>
+        </p:txBody>
+      </p:sp>
+    </p:spTree>
+  </p:cSld>
+  <p:clrMapOvr>
+    <a:masterClrMapping/>
+  </p:clrMapOvr>
+</p:sld>
+</file>
+
+<file path=ppt/slides/slide14.xml><?xml version="1.0" encoding="utf-8"?>
+<p:sld xmlns:a="http://schemas.openxmlformats.org/drawingml/2006/main" xmlns:p="http://schemas.openxmlformats.org/presentationml/2006/main" xmlns:r="http://schemas.openxmlformats.org/officeDocument/2006/relationships">
+  <p:cSld>
+    <p:spTree>
+      <p:nvGrpSpPr>
+        <p:cNvPr id="1" name=""/>
+        <p:cNvGrpSpPr/>
+        <p:nvPr/>
+      </p:nvGrpSpPr>
+      <p:grpSpPr/>
+      <p:sp>
+        <p:nvSpPr>
+          <p:cNvPr id="2" name="Rectangle 1"/>
+          <p:cNvSpPr/>
+          <p:nvPr/>
+        </p:nvSpPr>
+        <p:spPr>
+          <a:xfrm>
+            <a:off x="0" y="0"/>
+            <a:ext cx="12191695" cy="6858000"/>
+          </a:xfrm>
+          <a:prstGeom prst="rect">
+            <a:avLst/>
+          </a:prstGeom>
+          <a:solidFill>
+            <a:srgbClr val="F7F6F1"/>
+          </a:solidFill>
+          <a:ln>
+            <a:noFill/>
+          </a:ln>
+          <a:effectLst/>
+        </p:spPr>
+        <p:style>
+          <a:lnRef idx="1">
+            <a:schemeClr val="accent1"/>
+          </a:lnRef>
+          <a:fillRef idx="3">
+            <a:schemeClr val="accent1"/>
+          </a:fillRef>
+          <a:effectRef idx="2">
+            <a:schemeClr val="accent1"/>
+          </a:effectRef>
+          <a:fontRef idx="minor">
+            <a:schemeClr val="lt1"/>
+          </a:fontRef>
+        </p:style>
+        <p:txBody>
+          <a:bodyPr rtlCol="0" anchor="ctr"/>
+          <a:lstStyle/>
+          <a:p>
+            <a:pPr algn="ctr"/>
+          </a:p>
+        </p:txBody>
+      </p:sp>
+      <p:sp>
+        <p:nvSpPr>
+          <p:cNvPr id="3" name="TextBox 2"/>
+          <p:cNvSpPr txBox="1"/>
+          <p:nvPr/>
+        </p:nvSpPr>
+        <p:spPr>
+          <a:xfrm>
+            <a:off x="640080" y="365760"/>
+            <a:ext cx="10972800" cy="365760"/>
+          </a:xfrm>
+          <a:prstGeom prst="rect">
+            <a:avLst/>
+          </a:prstGeom>
+          <a:noFill/>
+        </p:spPr>
+        <p:txBody>
+          <a:bodyPr wrap="none">
+            <a:spAutoFit/>
+          </a:bodyPr>
+          <a:lstStyle/>
+          <a:p>
+            <a:r>
+              <a:rPr sz="1100" b="1">
+                <a:solidFill>
+                  <a:srgbClr val="C8A24B"/>
+                </a:solidFill>
+              </a:rPr>
               <a:t>НАПРАВЛЕНИЕ 2 · МЕЖДУНАРОДНЫЙ КАПИТАЛ</a:t>
             </a:r>
           </a:p>
@@ -3492,7 +5366,553 @@
 </p:sld>
 </file>
 
-<file path=ppt/slides/slide11.xml><?xml version="1.0" encoding="utf-8"?>
+<file path=ppt/slides/slide15.xml><?xml version="1.0" encoding="utf-8"?>
+<p:sld xmlns:a="http://schemas.openxmlformats.org/drawingml/2006/main" xmlns:p="http://schemas.openxmlformats.org/presentationml/2006/main" xmlns:r="http://schemas.openxmlformats.org/officeDocument/2006/relationships">
+  <p:cSld>
+    <p:spTree>
+      <p:nvGrpSpPr>
+        <p:cNvPr id="1" name=""/>
+        <p:cNvGrpSpPr/>
+        <p:nvPr/>
+      </p:nvGrpSpPr>
+      <p:grpSpPr/>
+      <p:sp>
+        <p:nvSpPr>
+          <p:cNvPr id="2" name="Rectangle 1"/>
+          <p:cNvSpPr/>
+          <p:nvPr/>
+        </p:nvSpPr>
+        <p:spPr>
+          <a:xfrm>
+            <a:off x="0" y="0"/>
+            <a:ext cx="12191695" cy="6858000"/>
+          </a:xfrm>
+          <a:prstGeom prst="rect">
+            <a:avLst/>
+          </a:prstGeom>
+          <a:solidFill>
+            <a:srgbClr val="F7F6F1"/>
+          </a:solidFill>
+          <a:ln>
+            <a:noFill/>
+          </a:ln>
+          <a:effectLst/>
+        </p:spPr>
+        <p:style>
+          <a:lnRef idx="1">
+            <a:schemeClr val="accent1"/>
+          </a:lnRef>
+          <a:fillRef idx="3">
+            <a:schemeClr val="accent1"/>
+          </a:fillRef>
+          <a:effectRef idx="2">
+            <a:schemeClr val="accent1"/>
+          </a:effectRef>
+          <a:fontRef idx="minor">
+            <a:schemeClr val="lt1"/>
+          </a:fontRef>
+        </p:style>
+        <p:txBody>
+          <a:bodyPr rtlCol="0" anchor="ctr"/>
+          <a:lstStyle/>
+          <a:p>
+            <a:pPr algn="ctr"/>
+          </a:p>
+        </p:txBody>
+      </p:sp>
+      <p:sp>
+        <p:nvSpPr>
+          <p:cNvPr id="3" name="TextBox 2"/>
+          <p:cNvSpPr txBox="1"/>
+          <p:nvPr/>
+        </p:nvSpPr>
+        <p:spPr>
+          <a:xfrm>
+            <a:off x="640080" y="365760"/>
+            <a:ext cx="10972800" cy="365760"/>
+          </a:xfrm>
+          <a:prstGeom prst="rect">
+            <a:avLst/>
+          </a:prstGeom>
+          <a:noFill/>
+        </p:spPr>
+        <p:txBody>
+          <a:bodyPr wrap="none">
+            <a:spAutoFit/>
+          </a:bodyPr>
+          <a:lstStyle/>
+          <a:p>
+            <a:r>
+              <a:rPr sz="1100" b="1">
+                <a:solidFill>
+                  <a:srgbClr val="C8A24B"/>
+                </a:solidFill>
+              </a:rPr>
+              <a:t>ПУТЬ · ИНВЕСТОР</a:t>
+            </a:r>
+          </a:p>
+        </p:txBody>
+      </p:sp>
+      <p:sp>
+        <p:nvSpPr>
+          <p:cNvPr id="4" name="Rectangle 3"/>
+          <p:cNvSpPr/>
+          <p:nvPr/>
+        </p:nvSpPr>
+        <p:spPr>
+          <a:xfrm>
+            <a:off x="640080" y="731520"/>
+            <a:ext cx="10881360" cy="777240"/>
+          </a:xfrm>
+          <a:prstGeom prst="rect">
+            <a:avLst/>
+          </a:prstGeom>
+          <a:solidFill>
+            <a:srgbClr val="1F5D43"/>
+          </a:solidFill>
+          <a:ln>
+            <a:noFill/>
+          </a:ln>
+          <a:effectLst/>
+        </p:spPr>
+        <p:style>
+          <a:lnRef idx="1">
+            <a:schemeClr val="accent1"/>
+          </a:lnRef>
+          <a:fillRef idx="3">
+            <a:schemeClr val="accent1"/>
+          </a:fillRef>
+          <a:effectRef idx="2">
+            <a:schemeClr val="accent1"/>
+          </a:effectRef>
+          <a:fontRef idx="minor">
+            <a:schemeClr val="lt1"/>
+          </a:fontRef>
+        </p:style>
+        <p:txBody>
+          <a:bodyPr rtlCol="0" anchor="ctr" wrap="square"/>
+          <a:lstStyle/>
+          <a:p>
+            <a:pPr algn="ctr"/>
+            <a:r>
+              <a:rPr sz="2100" b="1">
+                <a:solidFill>
+                  <a:srgbClr val="FFFFFF"/>
+                </a:solidFill>
+              </a:rPr>
+              <a:t>   Путь инвестора — от онбординга до распределения</a:t>
+            </a:r>
+          </a:p>
+        </p:txBody>
+      </p:sp>
+      <p:pic>
+        <p:nvPicPr>
+          <p:cNvPr id="5" name="Picture 4" descr="ru-17-investor-journey.png"/>
+          <p:cNvPicPr>
+            <a:picLocks noChangeAspect="1"/>
+          </p:cNvPicPr>
+          <p:nvPr/>
+        </p:nvPicPr>
+        <p:blipFill>
+          <a:blip r:embed="rId2"/>
+          <a:stretch>
+            <a:fillRect/>
+          </a:stretch>
+        </p:blipFill>
+        <p:spPr>
+          <a:xfrm>
+            <a:off x="548640" y="3866040"/>
+            <a:ext cx="6583680" cy="406080"/>
+          </a:xfrm>
+          <a:prstGeom prst="rect">
+            <a:avLst/>
+          </a:prstGeom>
+        </p:spPr>
+      </p:pic>
+      <p:sp>
+        <p:nvSpPr>
+          <p:cNvPr id="6" name="TextBox 5"/>
+          <p:cNvSpPr txBox="1"/>
+          <p:nvPr/>
+        </p:nvSpPr>
+        <p:spPr>
+          <a:xfrm>
+            <a:off x="548640" y="6355080"/>
+            <a:ext cx="6583680" cy="365760"/>
+          </a:xfrm>
+          <a:prstGeom prst="rect">
+            <a:avLst/>
+          </a:prstGeom>
+          <a:noFill/>
+        </p:spPr>
+        <p:txBody>
+          <a:bodyPr wrap="none">
+            <a:spAutoFit/>
+          </a:bodyPr>
+          <a:lstStyle/>
+          <a:p>
+            <a:pPr algn="ctr"/>
+            <a:r>
+              <a:rPr sz="1000" i="1">
+                <a:solidFill>
+                  <a:srgbClr val="415046"/>
+                </a:solidFill>
+              </a:rPr>
+              <a:t>Инвестор: онбординг → капитал → удержание с AI-отчётностью → выплата</a:t>
+            </a:r>
+          </a:p>
+        </p:txBody>
+      </p:sp>
+      <p:sp>
+        <p:nvSpPr>
+          <p:cNvPr id="7" name="TextBox 6"/>
+          <p:cNvSpPr txBox="1"/>
+          <p:nvPr/>
+        </p:nvSpPr>
+        <p:spPr>
+          <a:xfrm>
+            <a:off x="7406640" y="1828800"/>
+            <a:ext cx="4480560" cy="4572000"/>
+          </a:xfrm>
+          <a:prstGeom prst="rect">
+            <a:avLst/>
+          </a:prstGeom>
+          <a:noFill/>
+        </p:spPr>
+        <p:txBody>
+          <a:bodyPr wrap="square">
+            <a:spAutoFit/>
+          </a:bodyPr>
+          <a:lstStyle/>
+          <a:p>
+            <a:pPr>
+              <a:spcAft>
+                <a:spcPts val="900"/>
+              </a:spcAft>
+            </a:pPr>
+            <a:r>
+              <a:rPr sz="1300">
+                <a:solidFill>
+                  <a:srgbClr val="14231B"/>
+                </a:solidFill>
+              </a:rPr>
+              <a:t>•  Розничные, институциональные и инвесторы Залива проходят онбординг один раз (KYC / аккредитация), затем финансируют через маркетплейс или SPV.</a:t>
+            </a:r>
+          </a:p>
+          <a:p>
+            <a:pPr>
+              <a:spcAft>
+                <a:spcPts val="900"/>
+              </a:spcAft>
+            </a:pPr>
+            <a:r>
+              <a:rPr sz="1300">
+                <a:solidFill>
+                  <a:srgbClr val="14231B"/>
+                </a:solidFill>
+              </a:rPr>
+              <a:t>•  Они держат позиции с AI-отчётностью по запросу; в срок основная сумма и доход распределяются автоматически.</a:t>
+            </a:r>
+          </a:p>
+          <a:p>
+            <a:pPr>
+              <a:spcAft>
+                <a:spcPts val="900"/>
+              </a:spcAft>
+            </a:pPr>
+            <a:r>
+              <a:rPr sz="1300">
+                <a:solidFill>
+                  <a:srgbClr val="14231B"/>
+                </a:solidFill>
+              </a:rPr>
+              <a:t>•  Это Модуль B — он подключается к тому же движку origination позже, ничего не меняя для продавца или банка.</a:t>
+            </a:r>
+          </a:p>
+        </p:txBody>
+      </p:sp>
+    </p:spTree>
+  </p:cSld>
+  <p:clrMapOvr>
+    <a:masterClrMapping/>
+  </p:clrMapOvr>
+</p:sld>
+</file>
+
+<file path=ppt/slides/slide16.xml><?xml version="1.0" encoding="utf-8"?>
+<p:sld xmlns:a="http://schemas.openxmlformats.org/drawingml/2006/main" xmlns:p="http://schemas.openxmlformats.org/presentationml/2006/main" xmlns:r="http://schemas.openxmlformats.org/officeDocument/2006/relationships">
+  <p:cSld>
+    <p:spTree>
+      <p:nvGrpSpPr>
+        <p:cNvPr id="1" name=""/>
+        <p:cNvGrpSpPr/>
+        <p:nvPr/>
+      </p:nvGrpSpPr>
+      <p:grpSpPr/>
+      <p:sp>
+        <p:nvSpPr>
+          <p:cNvPr id="2" name="Rectangle 1"/>
+          <p:cNvSpPr/>
+          <p:nvPr/>
+        </p:nvSpPr>
+        <p:spPr>
+          <a:xfrm>
+            <a:off x="0" y="0"/>
+            <a:ext cx="12191695" cy="6858000"/>
+          </a:xfrm>
+          <a:prstGeom prst="rect">
+            <a:avLst/>
+          </a:prstGeom>
+          <a:solidFill>
+            <a:srgbClr val="F7F6F1"/>
+          </a:solidFill>
+          <a:ln>
+            <a:noFill/>
+          </a:ln>
+          <a:effectLst/>
+        </p:spPr>
+        <p:style>
+          <a:lnRef idx="1">
+            <a:schemeClr val="accent1"/>
+          </a:lnRef>
+          <a:fillRef idx="3">
+            <a:schemeClr val="accent1"/>
+          </a:fillRef>
+          <a:effectRef idx="2">
+            <a:schemeClr val="accent1"/>
+          </a:effectRef>
+          <a:fontRef idx="minor">
+            <a:schemeClr val="lt1"/>
+          </a:fontRef>
+        </p:style>
+        <p:txBody>
+          <a:bodyPr rtlCol="0" anchor="ctr"/>
+          <a:lstStyle/>
+          <a:p>
+            <a:pPr algn="ctr"/>
+          </a:p>
+        </p:txBody>
+      </p:sp>
+      <p:sp>
+        <p:nvSpPr>
+          <p:cNvPr id="3" name="TextBox 2"/>
+          <p:cNvSpPr txBox="1"/>
+          <p:nvPr/>
+        </p:nvSpPr>
+        <p:spPr>
+          <a:xfrm>
+            <a:off x="640080" y="365760"/>
+            <a:ext cx="10972800" cy="365760"/>
+          </a:xfrm>
+          <a:prstGeom prst="rect">
+            <a:avLst/>
+          </a:prstGeom>
+          <a:noFill/>
+        </p:spPr>
+        <p:txBody>
+          <a:bodyPr wrap="none">
+            <a:spAutoFit/>
+          </a:bodyPr>
+          <a:lstStyle/>
+          <a:p>
+            <a:r>
+              <a:rPr sz="1100" b="1">
+                <a:solidFill>
+                  <a:srgbClr val="C8A24B"/>
+                </a:solidFill>
+              </a:rPr>
+              <a:t>РЕАЛИЗАЦИЯ · ДЕКОМПОЗИРУЕМОСТЬ</a:t>
+            </a:r>
+          </a:p>
+        </p:txBody>
+      </p:sp>
+      <p:sp>
+        <p:nvSpPr>
+          <p:cNvPr id="4" name="Rectangle 3"/>
+          <p:cNvSpPr/>
+          <p:nvPr/>
+        </p:nvSpPr>
+        <p:spPr>
+          <a:xfrm>
+            <a:off x="640080" y="731520"/>
+            <a:ext cx="10881360" cy="777240"/>
+          </a:xfrm>
+          <a:prstGeom prst="rect">
+            <a:avLst/>
+          </a:prstGeom>
+          <a:solidFill>
+            <a:srgbClr val="1F5D43"/>
+          </a:solidFill>
+          <a:ln>
+            <a:noFill/>
+          </a:ln>
+          <a:effectLst/>
+        </p:spPr>
+        <p:style>
+          <a:lnRef idx="1">
+            <a:schemeClr val="accent1"/>
+          </a:lnRef>
+          <a:fillRef idx="3">
+            <a:schemeClr val="accent1"/>
+          </a:fillRef>
+          <a:effectRef idx="2">
+            <a:schemeClr val="accent1"/>
+          </a:effectRef>
+          <a:fontRef idx="minor">
+            <a:schemeClr val="lt1"/>
+          </a:fontRef>
+        </p:style>
+        <p:txBody>
+          <a:bodyPr rtlCol="0" anchor="ctr" wrap="square"/>
+          <a:lstStyle/>
+          <a:p>
+            <a:pPr algn="ctr"/>
+            <a:r>
+              <a:rPr sz="2100" b="1">
+                <a:solidFill>
+                  <a:srgbClr val="FFFFFF"/>
+                </a:solidFill>
+              </a:rPr>
+              <a:t>   Два модуля — берите один или оба, последовательно</a:t>
+            </a:r>
+          </a:p>
+        </p:txBody>
+      </p:sp>
+      <p:pic>
+        <p:nvPicPr>
+          <p:cNvPr id="5" name="Picture 4" descr="ru-18-decomposition.png"/>
+          <p:cNvPicPr>
+            <a:picLocks noChangeAspect="1"/>
+          </p:cNvPicPr>
+          <p:nvPr/>
+        </p:nvPicPr>
+        <p:blipFill>
+          <a:blip r:embed="rId2"/>
+          <a:stretch>
+            <a:fillRect/>
+          </a:stretch>
+        </p:blipFill>
+        <p:spPr>
+          <a:xfrm>
+            <a:off x="548640" y="3706555"/>
+            <a:ext cx="6583680" cy="725049"/>
+          </a:xfrm>
+          <a:prstGeom prst="rect">
+            <a:avLst/>
+          </a:prstGeom>
+        </p:spPr>
+      </p:pic>
+      <p:sp>
+        <p:nvSpPr>
+          <p:cNvPr id="6" name="TextBox 5"/>
+          <p:cNvSpPr txBox="1"/>
+          <p:nvPr/>
+        </p:nvSpPr>
+        <p:spPr>
+          <a:xfrm>
+            <a:off x="548640" y="6355080"/>
+            <a:ext cx="6583680" cy="365760"/>
+          </a:xfrm>
+          <a:prstGeom prst="rect">
+            <a:avLst/>
+          </a:prstGeom>
+          <a:noFill/>
+        </p:spPr>
+        <p:txBody>
+          <a:bodyPr wrap="none">
+            <a:spAutoFit/>
+          </a:bodyPr>
+          <a:lstStyle/>
+          <a:p>
+            <a:pPr algn="ctr"/>
+            <a:r>
+              <a:rPr sz="1000" i="1">
+                <a:solidFill>
+                  <a:srgbClr val="415046"/>
+                </a:solidFill>
+              </a:rPr>
+              <a:t>Origination (Модуль A) и Инвесторы/SPV (Модуль B) внедряются независимо</a:t>
+            </a:r>
+          </a:p>
+        </p:txBody>
+      </p:sp>
+      <p:sp>
+        <p:nvSpPr>
+          <p:cNvPr id="7" name="TextBox 6"/>
+          <p:cNvSpPr txBox="1"/>
+          <p:nvPr/>
+        </p:nvSpPr>
+        <p:spPr>
+          <a:xfrm>
+            <a:off x="7406640" y="1828800"/>
+            <a:ext cx="4480560" cy="4572000"/>
+          </a:xfrm>
+          <a:prstGeom prst="rect">
+            <a:avLst/>
+          </a:prstGeom>
+          <a:noFill/>
+        </p:spPr>
+        <p:txBody>
+          <a:bodyPr wrap="square">
+            <a:spAutoFit/>
+          </a:bodyPr>
+          <a:lstStyle/>
+          <a:p>
+            <a:pPr>
+              <a:spcAft>
+                <a:spcPts val="900"/>
+              </a:spcAft>
+            </a:pPr>
+            <a:r>
+              <a:rPr sz="1300">
+                <a:solidFill>
+                  <a:srgbClr val="14231B"/>
+                </a:solidFill>
+              </a:rPr>
+              <a:t>•  Модуль A — Origination может стать всей первой фазой Universalbank: факторинг за счёт банка, запуск за недели, немедленное выполнение требований Указа № 106.</a:t>
+            </a:r>
+          </a:p>
+          <a:p>
+            <a:pPr>
+              <a:spcAft>
+                <a:spcPts val="900"/>
+              </a:spcAft>
+            </a:pPr>
+            <a:r>
+              <a:rPr sz="1300">
+                <a:solidFill>
+                  <a:srgbClr val="14231B"/>
+                </a:solidFill>
+              </a:rPr>
+              <a:t>•  Модуль B — Инвесторы и SPV добавляет маркетплейс и капитал DIFC/международный позже, поверх того же движка, без переделок.</a:t>
+            </a:r>
+          </a:p>
+          <a:p>
+            <a:pPr>
+              <a:spcAft>
+                <a:spcPts val="900"/>
+              </a:spcAft>
+            </a:pPr>
+            <a:r>
+              <a:rPr sz="1300">
+                <a:solidFill>
+                  <a:srgbClr val="14231B"/>
+                </a:solidFill>
+              </a:rPr>
+              <a:t>•  Слой капитала — это стык: меняйте или добавляйте источники финансирования, не трогая origination — снижая риск программы и инвестиций.</a:t>
+            </a:r>
+          </a:p>
+        </p:txBody>
+      </p:sp>
+    </p:spTree>
+  </p:cSld>
+  <p:clrMapOvr>
+    <a:masterClrMapping/>
+  </p:clrMapOvr>
+</p:sld>
+</file>
+
+<file path=ppt/slides/slide17.xml><?xml version="1.0" encoding="utf-8"?>
 <p:sld xmlns:a="http://schemas.openxmlformats.org/drawingml/2006/main" xmlns:p="http://schemas.openxmlformats.org/presentationml/2006/main" xmlns:r="http://schemas.openxmlformats.org/officeDocument/2006/relationships">
   <p:cSld>
     <p:spTree>
@@ -4557,7 +6977,7 @@
 </p:sld>
 </file>
 
-<file path=ppt/slides/slide12.xml><?xml version="1.0" encoding="utf-8"?>
+<file path=ppt/slides/slide18.xml><?xml version="1.0" encoding="utf-8"?>
 <p:sld xmlns:a="http://schemas.openxmlformats.org/drawingml/2006/main" xmlns:p="http://schemas.openxmlformats.org/presentationml/2006/main" xmlns:r="http://schemas.openxmlformats.org/officeDocument/2006/relationships">
   <p:cSld>
     <p:spTree>
@@ -4787,7 +7207,7 @@
 </p:sld>
 </file>
 
-<file path=ppt/slides/slide13.xml><?xml version="1.0" encoding="utf-8"?>
+<file path=ppt/slides/slide19.xml><?xml version="1.0" encoding="utf-8"?>
 <p:sld xmlns:a="http://schemas.openxmlformats.org/drawingml/2006/main" xmlns:p="http://schemas.openxmlformats.org/presentationml/2006/main" xmlns:r="http://schemas.openxmlformats.org/officeDocument/2006/relationships">
   <p:cSld>
     <p:spTree>
@@ -5048,997 +7468,6 @@
                 </a:solidFill>
               </a:rPr>
               <a:t>•  Grok (x.ai) подключается через OpenAI-совместимый интерфейс — id модели задаётся конфигурацией, что исключает привязку к вендору.</a:t>
-            </a:r>
-          </a:p>
-        </p:txBody>
-      </p:sp>
-    </p:spTree>
-  </p:cSld>
-  <p:clrMapOvr>
-    <a:masterClrMapping/>
-  </p:clrMapOvr>
-</p:sld>
-</file>
-
-<file path=ppt/slides/slide14.xml><?xml version="1.0" encoding="utf-8"?>
-<p:sld xmlns:a="http://schemas.openxmlformats.org/drawingml/2006/main" xmlns:p="http://schemas.openxmlformats.org/presentationml/2006/main" xmlns:r="http://schemas.openxmlformats.org/officeDocument/2006/relationships">
-  <p:cSld>
-    <p:spTree>
-      <p:nvGrpSpPr>
-        <p:cNvPr id="1" name=""/>
-        <p:cNvGrpSpPr/>
-        <p:nvPr/>
-      </p:nvGrpSpPr>
-      <p:grpSpPr/>
-      <p:sp>
-        <p:nvSpPr>
-          <p:cNvPr id="2" name="Rectangle 1"/>
-          <p:cNvSpPr/>
-          <p:nvPr/>
-        </p:nvSpPr>
-        <p:spPr>
-          <a:xfrm>
-            <a:off x="0" y="0"/>
-            <a:ext cx="12191695" cy="6858000"/>
-          </a:xfrm>
-          <a:prstGeom prst="rect">
-            <a:avLst/>
-          </a:prstGeom>
-          <a:solidFill>
-            <a:srgbClr val="F7F6F1"/>
-          </a:solidFill>
-          <a:ln>
-            <a:noFill/>
-          </a:ln>
-          <a:effectLst/>
-        </p:spPr>
-        <p:style>
-          <a:lnRef idx="1">
-            <a:schemeClr val="accent1"/>
-          </a:lnRef>
-          <a:fillRef idx="3">
-            <a:schemeClr val="accent1"/>
-          </a:fillRef>
-          <a:effectRef idx="2">
-            <a:schemeClr val="accent1"/>
-          </a:effectRef>
-          <a:fontRef idx="minor">
-            <a:schemeClr val="lt1"/>
-          </a:fontRef>
-        </p:style>
-        <p:txBody>
-          <a:bodyPr rtlCol="0" anchor="ctr"/>
-          <a:lstStyle/>
-          <a:p>
-            <a:pPr algn="ctr"/>
-          </a:p>
-        </p:txBody>
-      </p:sp>
-      <p:sp>
-        <p:nvSpPr>
-          <p:cNvPr id="3" name="TextBox 2"/>
-          <p:cNvSpPr txBox="1"/>
-          <p:nvPr/>
-        </p:nvSpPr>
-        <p:spPr>
-          <a:xfrm>
-            <a:off x="640080" y="365760"/>
-            <a:ext cx="10972800" cy="365760"/>
-          </a:xfrm>
-          <a:prstGeom prst="rect">
-            <a:avLst/>
-          </a:prstGeom>
-          <a:noFill/>
-        </p:spPr>
-        <p:txBody>
-          <a:bodyPr wrap="none">
-            <a:spAutoFit/>
-          </a:bodyPr>
-          <a:lstStyle/>
-          <a:p>
-            <a:r>
-              <a:rPr sz="1100" b="1">
-                <a:solidFill>
-                  <a:srgbClr val="C8A24B"/>
-                </a:solidFill>
-              </a:rPr>
-              <a:t>ДОКАЗАТЕЛЬСТВО · РАБОТАЕТ УЖЕ СЕГОДНЯ</a:t>
-            </a:r>
-          </a:p>
-        </p:txBody>
-      </p:sp>
-      <p:sp>
-        <p:nvSpPr>
-          <p:cNvPr id="4" name="Rectangle 3"/>
-          <p:cNvSpPr/>
-          <p:nvPr/>
-        </p:nvSpPr>
-        <p:spPr>
-          <a:xfrm>
-            <a:off x="640080" y="731520"/>
-            <a:ext cx="10881360" cy="777240"/>
-          </a:xfrm>
-          <a:prstGeom prst="rect">
-            <a:avLst/>
-          </a:prstGeom>
-          <a:solidFill>
-            <a:srgbClr val="1F5D43"/>
-          </a:solidFill>
-          <a:ln>
-            <a:noFill/>
-          </a:ln>
-          <a:effectLst/>
-        </p:spPr>
-        <p:style>
-          <a:lnRef idx="1">
-            <a:schemeClr val="accent1"/>
-          </a:lnRef>
-          <a:fillRef idx="3">
-            <a:schemeClr val="accent1"/>
-          </a:fillRef>
-          <a:effectRef idx="2">
-            <a:schemeClr val="accent1"/>
-          </a:effectRef>
-          <a:fontRef idx="minor">
-            <a:schemeClr val="lt1"/>
-          </a:fontRef>
-        </p:style>
-        <p:txBody>
-          <a:bodyPr rtlCol="0" anchor="ctr" wrap="square"/>
-          <a:lstStyle/>
-          <a:p>
-            <a:pPr algn="ctr"/>
-            <a:r>
-              <a:rPr sz="2100" b="1">
-                <a:solidFill>
-                  <a:srgbClr val="FFFFFF"/>
-                </a:solidFill>
-              </a:rPr>
-              <a:t>   ИИ — не слайд, он уже внедрён</a:t>
-            </a:r>
-          </a:p>
-        </p:txBody>
-      </p:sp>
-      <p:pic>
-        <p:nvPicPr>
-          <p:cNvPr id="5" name="Picture 4" descr="ru-13-ai-triage.png"/>
-          <p:cNvPicPr>
-            <a:picLocks noChangeAspect="1"/>
-          </p:cNvPicPr>
-          <p:nvPr/>
-        </p:nvPicPr>
-        <p:blipFill>
-          <a:blip r:embed="rId2"/>
-          <a:stretch>
-            <a:fillRect/>
-          </a:stretch>
-        </p:blipFill>
-        <p:spPr>
-          <a:xfrm>
-            <a:off x="548640" y="2011680"/>
-            <a:ext cx="6583680" cy="4114800"/>
-          </a:xfrm>
-          <a:prstGeom prst="rect">
-            <a:avLst/>
-          </a:prstGeom>
-        </p:spPr>
-      </p:pic>
-      <p:sp>
-        <p:nvSpPr>
-          <p:cNvPr id="6" name="TextBox 5"/>
-          <p:cNvSpPr txBox="1"/>
-          <p:nvPr/>
-        </p:nvSpPr>
-        <p:spPr>
-          <a:xfrm>
-            <a:off x="548640" y="6355080"/>
-            <a:ext cx="6583680" cy="365760"/>
-          </a:xfrm>
-          <a:prstGeom prst="rect">
-            <a:avLst/>
-          </a:prstGeom>
-          <a:noFill/>
-        </p:spPr>
-        <p:txBody>
-          <a:bodyPr wrap="none">
-            <a:spAutoFit/>
-          </a:bodyPr>
-          <a:lstStyle/>
-          <a:p>
-            <a:pPr algn="ctr"/>
-            <a:r>
-              <a:rPr sz="1000" i="1">
-                <a:solidFill>
-                  <a:srgbClr val="415046"/>
-                </a:solidFill>
-              </a:rPr>
-              <a:t>Действующий триаж счёта в чате в приложении Factorio</a:t>
-            </a:r>
-          </a:p>
-        </p:txBody>
-      </p:sp>
-      <p:sp>
-        <p:nvSpPr>
-          <p:cNvPr id="7" name="TextBox 6"/>
-          <p:cNvSpPr txBox="1"/>
-          <p:nvPr/>
-        </p:nvSpPr>
-        <p:spPr>
-          <a:xfrm>
-            <a:off x="7406640" y="1828800"/>
-            <a:ext cx="4480560" cy="4572000"/>
-          </a:xfrm>
-          <a:prstGeom prst="rect">
-            <a:avLst/>
-          </a:prstGeom>
-          <a:noFill/>
-        </p:spPr>
-        <p:txBody>
-          <a:bodyPr wrap="square">
-            <a:spAutoFit/>
-          </a:bodyPr>
-          <a:lstStyle/>
-          <a:p>
-            <a:pPr>
-              <a:spcAft>
-                <a:spcPts val="900"/>
-              </a:spcAft>
-            </a:pPr>
-            <a:r>
-              <a:rPr sz="1300">
-                <a:solidFill>
-                  <a:srgbClr val="14231B"/>
-                </a:solidFill>
-              </a:rPr>
-              <a:t>•  Продавец описывает счёт одним предложением; ассистент возвращает индикативный рейтинг, ставку аванса и список документов.</a:t>
-            </a:r>
-          </a:p>
-          <a:p>
-            <a:pPr>
-              <a:spcAft>
-                <a:spcPts val="900"/>
-              </a:spcAft>
-            </a:pPr>
-            <a:r>
-              <a:rPr sz="1300">
-                <a:solidFill>
-                  <a:srgbClr val="14231B"/>
-                </a:solidFill>
-              </a:rPr>
-              <a:t>•  На базе Grok (x.ai), трёхъязычно, с корректным запасным поведением и полным аудитом — тот же подход расширяется на скоринг и отчётность.</a:t>
-            </a:r>
-          </a:p>
-        </p:txBody>
-      </p:sp>
-    </p:spTree>
-  </p:cSld>
-  <p:clrMapOvr>
-    <a:masterClrMapping/>
-  </p:clrMapOvr>
-</p:sld>
-</file>
-
-<file path=ppt/slides/slide15.xml><?xml version="1.0" encoding="utf-8"?>
-<p:sld xmlns:a="http://schemas.openxmlformats.org/drawingml/2006/main" xmlns:p="http://schemas.openxmlformats.org/presentationml/2006/main" xmlns:r="http://schemas.openxmlformats.org/officeDocument/2006/relationships">
-  <p:cSld>
-    <p:spTree>
-      <p:nvGrpSpPr>
-        <p:cNvPr id="1" name=""/>
-        <p:cNvGrpSpPr/>
-        <p:nvPr/>
-      </p:nvGrpSpPr>
-      <p:grpSpPr/>
-      <p:sp>
-        <p:nvSpPr>
-          <p:cNvPr id="2" name="Rectangle 1"/>
-          <p:cNvSpPr/>
-          <p:nvPr/>
-        </p:nvSpPr>
-        <p:spPr>
-          <a:xfrm>
-            <a:off x="0" y="0"/>
-            <a:ext cx="12191695" cy="6858000"/>
-          </a:xfrm>
-          <a:prstGeom prst="rect">
-            <a:avLst/>
-          </a:prstGeom>
-          <a:solidFill>
-            <a:srgbClr val="F7F6F1"/>
-          </a:solidFill>
-          <a:ln>
-            <a:noFill/>
-          </a:ln>
-          <a:effectLst/>
-        </p:spPr>
-        <p:style>
-          <a:lnRef idx="1">
-            <a:schemeClr val="accent1"/>
-          </a:lnRef>
-          <a:fillRef idx="3">
-            <a:schemeClr val="accent1"/>
-          </a:fillRef>
-          <a:effectRef idx="2">
-            <a:schemeClr val="accent1"/>
-          </a:effectRef>
-          <a:fontRef idx="minor">
-            <a:schemeClr val="lt1"/>
-          </a:fontRef>
-        </p:style>
-        <p:txBody>
-          <a:bodyPr rtlCol="0" anchor="ctr"/>
-          <a:lstStyle/>
-          <a:p>
-            <a:pPr algn="ctr"/>
-          </a:p>
-        </p:txBody>
-      </p:sp>
-      <p:sp>
-        <p:nvSpPr>
-          <p:cNvPr id="3" name="TextBox 2"/>
-          <p:cNvSpPr txBox="1"/>
-          <p:nvPr/>
-        </p:nvSpPr>
-        <p:spPr>
-          <a:xfrm>
-            <a:off x="640080" y="365760"/>
-            <a:ext cx="10972800" cy="365760"/>
-          </a:xfrm>
-          <a:prstGeom prst="rect">
-            <a:avLst/>
-          </a:prstGeom>
-          <a:noFill/>
-        </p:spPr>
-        <p:txBody>
-          <a:bodyPr wrap="none">
-            <a:spAutoFit/>
-          </a:bodyPr>
-          <a:lstStyle/>
-          <a:p>
-            <a:r>
-              <a:rPr sz="1100" b="1">
-                <a:solidFill>
-                  <a:srgbClr val="C8A24B"/>
-                </a:solidFill>
-              </a:rPr>
-              <a:t>РЕАЛИЗАЦИЯ</a:t>
-            </a:r>
-          </a:p>
-        </p:txBody>
-      </p:sp>
-      <p:sp>
-        <p:nvSpPr>
-          <p:cNvPr id="4" name="Rectangle 3"/>
-          <p:cNvSpPr/>
-          <p:nvPr/>
-        </p:nvSpPr>
-        <p:spPr>
-          <a:xfrm>
-            <a:off x="640080" y="731520"/>
-            <a:ext cx="10881360" cy="777240"/>
-          </a:xfrm>
-          <a:prstGeom prst="rect">
-            <a:avLst/>
-          </a:prstGeom>
-          <a:solidFill>
-            <a:srgbClr val="1F5D43"/>
-          </a:solidFill>
-          <a:ln>
-            <a:noFill/>
-          </a:ln>
-          <a:effectLst/>
-        </p:spPr>
-        <p:style>
-          <a:lnRef idx="1">
-            <a:schemeClr val="accent1"/>
-          </a:lnRef>
-          <a:fillRef idx="3">
-            <a:schemeClr val="accent1"/>
-          </a:fillRef>
-          <a:effectRef idx="2">
-            <a:schemeClr val="accent1"/>
-          </a:effectRef>
-          <a:fontRef idx="minor">
-            <a:schemeClr val="lt1"/>
-          </a:fontRef>
-        </p:style>
-        <p:txBody>
-          <a:bodyPr rtlCol="0" anchor="ctr" wrap="square"/>
-          <a:lstStyle/>
-          <a:p>
-            <a:pPr algn="ctr"/>
-            <a:r>
-              <a:rPr sz="2100" b="1">
-                <a:solidFill>
-                  <a:srgbClr val="FFFFFF"/>
-                </a:solidFill>
-              </a:rPr>
-              <a:t>   От прототипа к региональной платформе</a:t>
-            </a:r>
-          </a:p>
-        </p:txBody>
-      </p:sp>
-      <p:pic>
-        <p:nvPicPr>
-          <p:cNvPr id="5" name="Picture 4" descr="d5-roadmap.png"/>
-          <p:cNvPicPr>
-            <a:picLocks noChangeAspect="1"/>
-          </p:cNvPicPr>
-          <p:nvPr/>
-        </p:nvPicPr>
-        <p:blipFill>
-          <a:blip r:embed="rId2"/>
-          <a:stretch>
-            <a:fillRect/>
-          </a:stretch>
-        </p:blipFill>
-        <p:spPr>
-          <a:xfrm>
-            <a:off x="548640" y="3740590"/>
-            <a:ext cx="6583680" cy="656980"/>
-          </a:xfrm>
-          <a:prstGeom prst="rect">
-            <a:avLst/>
-          </a:prstGeom>
-        </p:spPr>
-      </p:pic>
-      <p:sp>
-        <p:nvSpPr>
-          <p:cNvPr id="6" name="TextBox 5"/>
-          <p:cNvSpPr txBox="1"/>
-          <p:nvPr/>
-        </p:nvSpPr>
-        <p:spPr>
-          <a:xfrm>
-            <a:off x="548640" y="6355080"/>
-            <a:ext cx="6583680" cy="365760"/>
-          </a:xfrm>
-          <a:prstGeom prst="rect">
-            <a:avLst/>
-          </a:prstGeom>
-          <a:noFill/>
-        </p:spPr>
-        <p:txBody>
-          <a:bodyPr wrap="none">
-            <a:spAutoFit/>
-          </a:bodyPr>
-          <a:lstStyle/>
-          <a:p>
-            <a:pPr algn="ctr"/>
-            <a:r>
-              <a:rPr sz="1000" i="1">
-                <a:solidFill>
-                  <a:srgbClr val="415046"/>
-                </a:solidFill>
-              </a:rPr>
-              <a:t>Поэтапный запуск — каждый этап финансирует следующий</a:t>
-            </a:r>
-          </a:p>
-        </p:txBody>
-      </p:sp>
-      <p:sp>
-        <p:nvSpPr>
-          <p:cNvPr id="7" name="TextBox 6"/>
-          <p:cNvSpPr txBox="1"/>
-          <p:nvPr/>
-        </p:nvSpPr>
-        <p:spPr>
-          <a:xfrm>
-            <a:off x="7406640" y="1828800"/>
-            <a:ext cx="4480560" cy="4572000"/>
-          </a:xfrm>
-          <a:prstGeom prst="rect">
-            <a:avLst/>
-          </a:prstGeom>
-          <a:noFill/>
-        </p:spPr>
-        <p:txBody>
-          <a:bodyPr wrap="square">
-            <a:spAutoFit/>
-          </a:bodyPr>
-          <a:lstStyle/>
-          <a:p>
-            <a:pPr>
-              <a:spcAft>
-                <a:spcPts val="900"/>
-              </a:spcAft>
-            </a:pPr>
-            <a:r>
-              <a:rPr sz="1300">
-                <a:solidFill>
-                  <a:srgbClr val="14231B"/>
-                </a:solidFill>
-              </a:rPr>
-              <a:t>•  Этап 0 (сейчас): прототип ИИ-триажа и отчётности работает.</a:t>
-            </a:r>
-          </a:p>
-          <a:p>
-            <a:pPr>
-              <a:spcAft>
-                <a:spcPts val="900"/>
-              </a:spcAft>
-            </a:pPr>
-            <a:r>
-              <a:rPr sz="1300">
-                <a:solidFill>
-                  <a:srgbClr val="14231B"/>
-                </a:solidFill>
-              </a:rPr>
-              <a:t>•  Этапы 1–2 (M1–6): релиз платформы, интеграция SoliqOnline, скоринг на open banking, оплата за объём.</a:t>
-            </a:r>
-          </a:p>
-          <a:p>
-            <a:pPr>
-              <a:spcAft>
-                <a:spcPts val="900"/>
-              </a:spcAft>
-            </a:pPr>
-            <a:r>
-              <a:rPr sz="1300">
-                <a:solidFill>
-                  <a:srgbClr val="14231B"/>
-                </a:solidFill>
-              </a:rPr>
-              <a:t>•  Этапы 3–4 (M6+): SPV в DIFC и первый международный капитал, затем последовательность Вакала → Сукук и региональный масштаб.</a:t>
-            </a:r>
-          </a:p>
-        </p:txBody>
-      </p:sp>
-    </p:spTree>
-  </p:cSld>
-  <p:clrMapOvr>
-    <a:masterClrMapping/>
-  </p:clrMapOvr>
-</p:sld>
-</file>
-
-<file path=ppt/slides/slide16.xml><?xml version="1.0" encoding="utf-8"?>
-<p:sld xmlns:a="http://schemas.openxmlformats.org/drawingml/2006/main" xmlns:p="http://schemas.openxmlformats.org/presentationml/2006/main" xmlns:r="http://schemas.openxmlformats.org/officeDocument/2006/relationships">
-  <p:cSld>
-    <p:spTree>
-      <p:nvGrpSpPr>
-        <p:cNvPr id="1" name=""/>
-        <p:cNvGrpSpPr/>
-        <p:nvPr/>
-      </p:nvGrpSpPr>
-      <p:grpSpPr/>
-      <p:sp>
-        <p:nvSpPr>
-          <p:cNvPr id="2" name="Rectangle 1"/>
-          <p:cNvSpPr/>
-          <p:nvPr/>
-        </p:nvSpPr>
-        <p:spPr>
-          <a:xfrm>
-            <a:off x="0" y="0"/>
-            <a:ext cx="12191695" cy="6858000"/>
-          </a:xfrm>
-          <a:prstGeom prst="rect">
-            <a:avLst/>
-          </a:prstGeom>
-          <a:solidFill>
-            <a:srgbClr val="F7F6F1"/>
-          </a:solidFill>
-          <a:ln>
-            <a:noFill/>
-          </a:ln>
-          <a:effectLst/>
-        </p:spPr>
-        <p:style>
-          <a:lnRef idx="1">
-            <a:schemeClr val="accent1"/>
-          </a:lnRef>
-          <a:fillRef idx="3">
-            <a:schemeClr val="accent1"/>
-          </a:fillRef>
-          <a:effectRef idx="2">
-            <a:schemeClr val="accent1"/>
-          </a:effectRef>
-          <a:fontRef idx="minor">
-            <a:schemeClr val="lt1"/>
-          </a:fontRef>
-        </p:style>
-        <p:txBody>
-          <a:bodyPr rtlCol="0" anchor="ctr"/>
-          <a:lstStyle/>
-          <a:p>
-            <a:pPr algn="ctr"/>
-          </a:p>
-        </p:txBody>
-      </p:sp>
-      <p:sp>
-        <p:nvSpPr>
-          <p:cNvPr id="3" name="TextBox 2"/>
-          <p:cNvSpPr txBox="1"/>
-          <p:nvPr/>
-        </p:nvSpPr>
-        <p:spPr>
-          <a:xfrm>
-            <a:off x="640080" y="365760"/>
-            <a:ext cx="10972800" cy="365760"/>
-          </a:xfrm>
-          <a:prstGeom prst="rect">
-            <a:avLst/>
-          </a:prstGeom>
-          <a:noFill/>
-        </p:spPr>
-        <p:txBody>
-          <a:bodyPr wrap="none">
-            <a:spAutoFit/>
-          </a:bodyPr>
-          <a:lstStyle/>
-          <a:p>
-            <a:r>
-              <a:rPr sz="1100" b="1">
-                <a:solidFill>
-                  <a:srgbClr val="C8A24B"/>
-                </a:solidFill>
-              </a:rPr>
-              <a:t>ПОЧЕМУ CONSISTENTE</a:t>
-            </a:r>
-          </a:p>
-        </p:txBody>
-      </p:sp>
-      <p:sp>
-        <p:nvSpPr>
-          <p:cNvPr id="4" name="Rectangle 3"/>
-          <p:cNvSpPr/>
-          <p:nvPr/>
-        </p:nvSpPr>
-        <p:spPr>
-          <a:xfrm>
-            <a:off x="640080" y="731520"/>
-            <a:ext cx="10881360" cy="777240"/>
-          </a:xfrm>
-          <a:prstGeom prst="rect">
-            <a:avLst/>
-          </a:prstGeom>
-          <a:solidFill>
-            <a:srgbClr val="1F5D43"/>
-          </a:solidFill>
-          <a:ln>
-            <a:noFill/>
-          </a:ln>
-          <a:effectLst/>
-        </p:spPr>
-        <p:style>
-          <a:lnRef idx="1">
-            <a:schemeClr val="accent1"/>
-          </a:lnRef>
-          <a:fillRef idx="3">
-            <a:schemeClr val="accent1"/>
-          </a:fillRef>
-          <a:effectRef idx="2">
-            <a:schemeClr val="accent1"/>
-          </a:effectRef>
-          <a:fontRef idx="minor">
-            <a:schemeClr val="lt1"/>
-          </a:fontRef>
-        </p:style>
-        <p:txBody>
-          <a:bodyPr rtlCol="0" anchor="ctr" wrap="square"/>
-          <a:lstStyle/>
-          <a:p>
-            <a:pPr algn="ctr"/>
-            <a:r>
-              <a:rPr sz="2100" b="1">
-                <a:solidFill>
-                  <a:srgbClr val="FFFFFF"/>
-                </a:solidFill>
-              </a:rPr>
-              <a:t>   Промышленный ИИ, поставляемый стабильно</a:t>
-            </a:r>
-          </a:p>
-        </p:txBody>
-      </p:sp>
-      <p:sp>
-        <p:nvSpPr>
-          <p:cNvPr id="5" name="TextBox 4"/>
-          <p:cNvSpPr txBox="1"/>
-          <p:nvPr/>
-        </p:nvSpPr>
-        <p:spPr>
-          <a:xfrm>
-            <a:off x="685800" y="1828800"/>
-            <a:ext cx="10881360" cy="4572000"/>
-          </a:xfrm>
-          <a:prstGeom prst="rect">
-            <a:avLst/>
-          </a:prstGeom>
-          <a:noFill/>
-        </p:spPr>
-        <p:txBody>
-          <a:bodyPr wrap="square">
-            <a:spAutoFit/>
-          </a:bodyPr>
-          <a:lstStyle/>
-          <a:p>
-            <a:pPr>
-              <a:spcAft>
-                <a:spcPts val="900"/>
-              </a:spcAft>
-            </a:pPr>
-            <a:r>
-              <a:rPr sz="1500">
-                <a:solidFill>
-                  <a:srgbClr val="14231B"/>
-                </a:solidFill>
-              </a:rPr>
-              <a:t>•  Consistente Ltd (Таллин, ЕС) создаёт промышленный ИИ для предприятий — с воспроизводимыми пайплайнами, версионируемыми моделями и прозрачными промптами, а не «чёрные ящики».</a:t>
-            </a:r>
-          </a:p>
-          <a:p>
-            <a:pPr>
-              <a:spcAft>
-                <a:spcPts val="900"/>
-              </a:spcAft>
-            </a:pPr>
-            <a:r>
-              <a:rPr sz="1500">
-                <a:solidFill>
-                  <a:srgbClr val="14231B"/>
-                </a:solidFill>
-              </a:rPr>
-              <a:t>•  Опыт в финансовых услугах и регулируемых секторах: LSEG, DBRS Morningstar, ARM, Microsoft.</a:t>
-            </a:r>
-          </a:p>
-          <a:p>
-            <a:pPr>
-              <a:spcAft>
-                <a:spcPts val="900"/>
-              </a:spcAft>
-            </a:pPr>
-            <a:r>
-              <a:rPr sz="1500">
-                <a:solidFill>
-                  <a:srgbClr val="14231B"/>
-                </a:solidFill>
-              </a:rPr>
-              <a:t>•  Ключевые компетенции прямо ложатся на проект: интеллектуальная обработка документов, прикладной прогноз/скоринг и агентные процессы с проверкой человеком.</a:t>
-            </a:r>
-          </a:p>
-          <a:p>
-            <a:pPr>
-              <a:spcAft>
-                <a:spcPts val="900"/>
-              </a:spcAft>
-            </a:pPr>
-            <a:r>
-              <a:rPr sz="1500">
-                <a:solidFill>
-                  <a:srgbClr val="14231B"/>
-                </a:solidFill>
-              </a:rPr>
-              <a:t>•  Базируется в ЕС, приоритет аудируемости — верный профиль для банка, строящего ИИ под надзором регулятора.</a:t>
-            </a:r>
-          </a:p>
-        </p:txBody>
-      </p:sp>
-    </p:spTree>
-  </p:cSld>
-  <p:clrMapOvr>
-    <a:masterClrMapping/>
-  </p:clrMapOvr>
-</p:sld>
-</file>
-
-<file path=ppt/slides/slide17.xml><?xml version="1.0" encoding="utf-8"?>
-<p:sld xmlns:a="http://schemas.openxmlformats.org/drawingml/2006/main" xmlns:p="http://schemas.openxmlformats.org/presentationml/2006/main" xmlns:r="http://schemas.openxmlformats.org/officeDocument/2006/relationships">
-  <p:cSld>
-    <p:spTree>
-      <p:nvGrpSpPr>
-        <p:cNvPr id="1" name=""/>
-        <p:cNvGrpSpPr/>
-        <p:nvPr/>
-      </p:nvGrpSpPr>
-      <p:grpSpPr/>
-      <p:sp>
-        <p:nvSpPr>
-          <p:cNvPr id="2" name="Rectangle 1"/>
-          <p:cNvSpPr/>
-          <p:nvPr/>
-        </p:nvSpPr>
-        <p:spPr>
-          <a:xfrm>
-            <a:off x="0" y="0"/>
-            <a:ext cx="12191695" cy="6858000"/>
-          </a:xfrm>
-          <a:prstGeom prst="rect">
-            <a:avLst/>
-          </a:prstGeom>
-          <a:solidFill>
-            <a:srgbClr val="F7F6F1"/>
-          </a:solidFill>
-          <a:ln>
-            <a:noFill/>
-          </a:ln>
-          <a:effectLst/>
-        </p:spPr>
-        <p:style>
-          <a:lnRef idx="1">
-            <a:schemeClr val="accent1"/>
-          </a:lnRef>
-          <a:fillRef idx="3">
-            <a:schemeClr val="accent1"/>
-          </a:fillRef>
-          <a:effectRef idx="2">
-            <a:schemeClr val="accent1"/>
-          </a:effectRef>
-          <a:fontRef idx="minor">
-            <a:schemeClr val="lt1"/>
-          </a:fontRef>
-        </p:style>
-        <p:txBody>
-          <a:bodyPr rtlCol="0" anchor="ctr"/>
-          <a:lstStyle/>
-          <a:p>
-            <a:pPr algn="ctr"/>
-          </a:p>
-        </p:txBody>
-      </p:sp>
-      <p:sp>
-        <p:nvSpPr>
-          <p:cNvPr id="3" name="TextBox 2"/>
-          <p:cNvSpPr txBox="1"/>
-          <p:nvPr/>
-        </p:nvSpPr>
-        <p:spPr>
-          <a:xfrm>
-            <a:off x="640080" y="365760"/>
-            <a:ext cx="10972800" cy="365760"/>
-          </a:xfrm>
-          <a:prstGeom prst="rect">
-            <a:avLst/>
-          </a:prstGeom>
-          <a:noFill/>
-        </p:spPr>
-        <p:txBody>
-          <a:bodyPr wrap="none">
-            <a:spAutoFit/>
-          </a:bodyPr>
-          <a:lstStyle/>
-          <a:p>
-            <a:r>
-              <a:rPr sz="1100" b="1">
-                <a:solidFill>
-                  <a:srgbClr val="C8A24B"/>
-                </a:solidFill>
-              </a:rPr>
-              <a:t>СЛЕДУЮЩИЕ ШАГИ</a:t>
-            </a:r>
-          </a:p>
-        </p:txBody>
-      </p:sp>
-      <p:sp>
-        <p:nvSpPr>
-          <p:cNvPr id="4" name="Rectangle 3"/>
-          <p:cNvSpPr/>
-          <p:nvPr/>
-        </p:nvSpPr>
-        <p:spPr>
-          <a:xfrm>
-            <a:off x="640080" y="731520"/>
-            <a:ext cx="10881360" cy="777240"/>
-          </a:xfrm>
-          <a:prstGeom prst="rect">
-            <a:avLst/>
-          </a:prstGeom>
-          <a:solidFill>
-            <a:srgbClr val="1F5D43"/>
-          </a:solidFill>
-          <a:ln>
-            <a:noFill/>
-          </a:ln>
-          <a:effectLst/>
-        </p:spPr>
-        <p:style>
-          <a:lnRef idx="1">
-            <a:schemeClr val="accent1"/>
-          </a:lnRef>
-          <a:fillRef idx="3">
-            <a:schemeClr val="accent1"/>
-          </a:fillRef>
-          <a:effectRef idx="2">
-            <a:schemeClr val="accent1"/>
-          </a:effectRef>
-          <a:fontRef idx="minor">
-            <a:schemeClr val="lt1"/>
-          </a:fontRef>
-        </p:style>
-        <p:txBody>
-          <a:bodyPr rtlCol="0" anchor="ctr" wrap="square"/>
-          <a:lstStyle/>
-          <a:p>
-            <a:pPr algn="ctr"/>
-            <a:r>
-              <a:rPr sz="2100" b="1">
-                <a:solidFill>
-                  <a:srgbClr val="FFFFFF"/>
-                </a:solidFill>
-              </a:rPr>
-              <a:t>   Что предлагаем сделать первым</a:t>
-            </a:r>
-          </a:p>
-        </p:txBody>
-      </p:sp>
-      <p:sp>
-        <p:nvSpPr>
-          <p:cNvPr id="5" name="TextBox 4"/>
-          <p:cNvSpPr txBox="1"/>
-          <p:nvPr/>
-        </p:nvSpPr>
-        <p:spPr>
-          <a:xfrm>
-            <a:off x="685800" y="1828800"/>
-            <a:ext cx="10881360" cy="4572000"/>
-          </a:xfrm>
-          <a:prstGeom prst="rect">
-            <a:avLst/>
-          </a:prstGeom>
-          <a:noFill/>
-        </p:spPr>
-        <p:txBody>
-          <a:bodyPr wrap="square">
-            <a:spAutoFit/>
-          </a:bodyPr>
-          <a:lstStyle/>
-          <a:p>
-            <a:pPr>
-              <a:spcAft>
-                <a:spcPts val="900"/>
-              </a:spcAft>
-            </a:pPr>
-            <a:r>
-              <a:rPr sz="1500">
-                <a:solidFill>
-                  <a:srgbClr val="14231B"/>
-                </a:solidFill>
-              </a:rPr>
-              <a:t>•  1. Согласовать объём white-label и коммерческие условия на основе объёма.</a:t>
-            </a:r>
-          </a:p>
-          <a:p>
-            <a:pPr>
-              <a:spcAft>
-                <a:spcPts val="900"/>
-              </a:spcAft>
-            </a:pPr>
-            <a:r>
-              <a:rPr sz="1500">
-                <a:solidFill>
-                  <a:srgbClr val="14231B"/>
-                </a:solidFill>
-              </a:rPr>
-              <a:t>•  2. Запустить пилот на реальных данных SoliqOnline; вывести платформу в релиз с ИИ-триажем и движком скоринга.</a:t>
-            </a:r>
-          </a:p>
-          <a:p>
-            <a:pPr>
-              <a:spcAft>
-                <a:spcPts val="900"/>
-              </a:spcAft>
-            </a:pPr>
-            <a:r>
-              <a:rPr sz="1500">
-                <a:solidFill>
-                  <a:srgbClr val="14231B"/>
-                </a:solidFill>
-              </a:rPr>
-              <a:t>•  3. Параллельно начать подготовку SPV в DIFC и фатвы, чтобы международный капитал последовал за операционным портфелем.</a:t>
-            </a:r>
-          </a:p>
-          <a:p>
-            <a:pPr>
-              <a:spcAft>
-                <a:spcPts val="900"/>
-              </a:spcAft>
-            </a:pPr>
-            <a:r>
-              <a:rPr sz="1500">
-                <a:solidFill>
-                  <a:srgbClr val="14231B"/>
-                </a:solidFill>
-              </a:rPr>
-              <a:t>•  Контакт: Consistente Ltd · info@consistente.tech · consistente.tech</a:t>
             </a:r>
           </a:p>
         </p:txBody>
@@ -6223,7 +7652,7 @@
                   <a:srgbClr val="14231B"/>
                 </a:solidFill>
               </a:rPr>
-              <a:t>•  1 · Лучшая платформа. Переосмыслить банковский факторинг в стиле OzPlanet с ИИ-ядром, кредитным скорингом в духе open banking и понятным трёхъязычным UX — с оплатой только за профинансированный объём, без SaaS-лицензии.</a:t>
+              <a:t>•  Разрыв. Каждый узбекский банк арендует факторинговый продукт у OzPlanet или FinMakon — включая Universalbank (соглашение с OzPlanet, сент. 2024). Никто не владеет продуктом, отношениями с клиентом и данными.</a:t>
             </a:r>
           </a:p>
           <a:p>
@@ -6238,7 +7667,7 @@
                   <a:srgbClr val="14231B"/>
                 </a:solidFill>
               </a:rPr>
-              <a:t>•  2 · Международный капитал. Добавить модуль SPV, чтобы глобальные — и прежде всего инвесторы Залива — могли финансировать узбекскую дебиторку, превращая внутренний продукт в трансграничный.</a:t>
+              <a:t>•  1 · Владеть платформой. White-label ИИ-платформа, которую Universalbank ведёт под своим брендом — банк владеет продуктом, клиентами и данными — с оплатой только за профинансированный объём.</a:t>
             </a:r>
           </a:p>
           <a:p>
@@ -6253,7 +7682,7 @@
                   <a:srgbClr val="14231B"/>
                 </a:solidFill>
               </a:rPr>
-              <a:t>•  3 · Выход в ОАЭ. Учредить SPV в DIFC и поэтапную исламскую программу (Мурабаха → Вакала → Сукук) для доступа к исламскому капиталу Дубая / DIFC.</a:t>
+              <a:t>•  2 · Международный капитал. Модуль SPV позволяет глобальным — и прежде всего инвесторам Залива — финансировать узбекскую дебиторку. OzPlanet и FinMakon не принимают иностранные или розничные деньги, поэтому это чистый, незанятый дифференциатор.</a:t>
             </a:r>
           </a:p>
           <a:p>
@@ -6268,7 +7697,1013 @@
                   <a:srgbClr val="14231B"/>
                 </a:solidFill>
               </a:rPr>
-              <a:t>•  Рабочий ИИ-прототип готов уже сегодня — триаж заявок в чате и отчётность для инвесторов в чате уже работают в приложении.</a:t>
+              <a:t>•  3 · Выход в ОАЭ. SPV в DIFC и поэтапная исламская программа (Мурабаха → Вакала → Сукук) для доступа к исламскому капиталу Дубая / DIFC.</a:t>
+            </a:r>
+          </a:p>
+          <a:p>
+            <a:pPr>
+              <a:spcAft>
+                <a:spcPts val="900"/>
+              </a:spcAft>
+            </a:pPr>
+            <a:r>
+              <a:rPr sz="1500">
+                <a:solidFill>
+                  <a:srgbClr val="14231B"/>
+                </a:solidFill>
+              </a:rPr>
+              <a:t>•  Декомпозируемо и уже работает. Сначала запускаем origination, слой инвесторов / SPV добавляем позже — а триаж заявок и отчётность в чате уже работают в приложении.</a:t>
+            </a:r>
+          </a:p>
+        </p:txBody>
+      </p:sp>
+    </p:spTree>
+  </p:cSld>
+  <p:clrMapOvr>
+    <a:masterClrMapping/>
+  </p:clrMapOvr>
+</p:sld>
+</file>
+
+<file path=ppt/slides/slide20.xml><?xml version="1.0" encoding="utf-8"?>
+<p:sld xmlns:a="http://schemas.openxmlformats.org/drawingml/2006/main" xmlns:p="http://schemas.openxmlformats.org/presentationml/2006/main" xmlns:r="http://schemas.openxmlformats.org/officeDocument/2006/relationships">
+  <p:cSld>
+    <p:spTree>
+      <p:nvGrpSpPr>
+        <p:cNvPr id="1" name=""/>
+        <p:cNvGrpSpPr/>
+        <p:nvPr/>
+      </p:nvGrpSpPr>
+      <p:grpSpPr/>
+      <p:sp>
+        <p:nvSpPr>
+          <p:cNvPr id="2" name="Rectangle 1"/>
+          <p:cNvSpPr/>
+          <p:nvPr/>
+        </p:nvSpPr>
+        <p:spPr>
+          <a:xfrm>
+            <a:off x="0" y="0"/>
+            <a:ext cx="12191695" cy="6858000"/>
+          </a:xfrm>
+          <a:prstGeom prst="rect">
+            <a:avLst/>
+          </a:prstGeom>
+          <a:solidFill>
+            <a:srgbClr val="F7F6F1"/>
+          </a:solidFill>
+          <a:ln>
+            <a:noFill/>
+          </a:ln>
+          <a:effectLst/>
+        </p:spPr>
+        <p:style>
+          <a:lnRef idx="1">
+            <a:schemeClr val="accent1"/>
+          </a:lnRef>
+          <a:fillRef idx="3">
+            <a:schemeClr val="accent1"/>
+          </a:fillRef>
+          <a:effectRef idx="2">
+            <a:schemeClr val="accent1"/>
+          </a:effectRef>
+          <a:fontRef idx="minor">
+            <a:schemeClr val="lt1"/>
+          </a:fontRef>
+        </p:style>
+        <p:txBody>
+          <a:bodyPr rtlCol="0" anchor="ctr"/>
+          <a:lstStyle/>
+          <a:p>
+            <a:pPr algn="ctr"/>
+          </a:p>
+        </p:txBody>
+      </p:sp>
+      <p:sp>
+        <p:nvSpPr>
+          <p:cNvPr id="3" name="TextBox 2"/>
+          <p:cNvSpPr txBox="1"/>
+          <p:nvPr/>
+        </p:nvSpPr>
+        <p:spPr>
+          <a:xfrm>
+            <a:off x="640080" y="365760"/>
+            <a:ext cx="10972800" cy="365760"/>
+          </a:xfrm>
+          <a:prstGeom prst="rect">
+            <a:avLst/>
+          </a:prstGeom>
+          <a:noFill/>
+        </p:spPr>
+        <p:txBody>
+          <a:bodyPr wrap="none">
+            <a:spAutoFit/>
+          </a:bodyPr>
+          <a:lstStyle/>
+          <a:p>
+            <a:r>
+              <a:rPr sz="1100" b="1">
+                <a:solidFill>
+                  <a:srgbClr val="C8A24B"/>
+                </a:solidFill>
+              </a:rPr>
+              <a:t>ДОКАЗАТЕЛЬСТВО · РАБОТАЕТ УЖЕ СЕГОДНЯ</a:t>
+            </a:r>
+          </a:p>
+        </p:txBody>
+      </p:sp>
+      <p:sp>
+        <p:nvSpPr>
+          <p:cNvPr id="4" name="Rectangle 3"/>
+          <p:cNvSpPr/>
+          <p:nvPr/>
+        </p:nvSpPr>
+        <p:spPr>
+          <a:xfrm>
+            <a:off x="640080" y="731520"/>
+            <a:ext cx="10881360" cy="777240"/>
+          </a:xfrm>
+          <a:prstGeom prst="rect">
+            <a:avLst/>
+          </a:prstGeom>
+          <a:solidFill>
+            <a:srgbClr val="1F5D43"/>
+          </a:solidFill>
+          <a:ln>
+            <a:noFill/>
+          </a:ln>
+          <a:effectLst/>
+        </p:spPr>
+        <p:style>
+          <a:lnRef idx="1">
+            <a:schemeClr val="accent1"/>
+          </a:lnRef>
+          <a:fillRef idx="3">
+            <a:schemeClr val="accent1"/>
+          </a:fillRef>
+          <a:effectRef idx="2">
+            <a:schemeClr val="accent1"/>
+          </a:effectRef>
+          <a:fontRef idx="minor">
+            <a:schemeClr val="lt1"/>
+          </a:fontRef>
+        </p:style>
+        <p:txBody>
+          <a:bodyPr rtlCol="0" anchor="ctr" wrap="square"/>
+          <a:lstStyle/>
+          <a:p>
+            <a:pPr algn="ctr"/>
+            <a:r>
+              <a:rPr sz="2100" b="1">
+                <a:solidFill>
+                  <a:srgbClr val="FFFFFF"/>
+                </a:solidFill>
+              </a:rPr>
+              <a:t>   ИИ — не слайд, он уже внедрён</a:t>
+            </a:r>
+          </a:p>
+        </p:txBody>
+      </p:sp>
+      <p:pic>
+        <p:nvPicPr>
+          <p:cNvPr id="5" name="Picture 4" descr="ru-13-ai-triage.png"/>
+          <p:cNvPicPr>
+            <a:picLocks noChangeAspect="1"/>
+          </p:cNvPicPr>
+          <p:nvPr/>
+        </p:nvPicPr>
+        <p:blipFill>
+          <a:blip r:embed="rId2"/>
+          <a:stretch>
+            <a:fillRect/>
+          </a:stretch>
+        </p:blipFill>
+        <p:spPr>
+          <a:xfrm>
+            <a:off x="548640" y="2011680"/>
+            <a:ext cx="6583680" cy="4114800"/>
+          </a:xfrm>
+          <a:prstGeom prst="rect">
+            <a:avLst/>
+          </a:prstGeom>
+        </p:spPr>
+      </p:pic>
+      <p:sp>
+        <p:nvSpPr>
+          <p:cNvPr id="6" name="TextBox 5"/>
+          <p:cNvSpPr txBox="1"/>
+          <p:nvPr/>
+        </p:nvSpPr>
+        <p:spPr>
+          <a:xfrm>
+            <a:off x="548640" y="6355080"/>
+            <a:ext cx="6583680" cy="365760"/>
+          </a:xfrm>
+          <a:prstGeom prst="rect">
+            <a:avLst/>
+          </a:prstGeom>
+          <a:noFill/>
+        </p:spPr>
+        <p:txBody>
+          <a:bodyPr wrap="none">
+            <a:spAutoFit/>
+          </a:bodyPr>
+          <a:lstStyle/>
+          <a:p>
+            <a:pPr algn="ctr"/>
+            <a:r>
+              <a:rPr sz="1000" i="1">
+                <a:solidFill>
+                  <a:srgbClr val="415046"/>
+                </a:solidFill>
+              </a:rPr>
+              <a:t>Действующий триаж счёта в чате в приложении Factorio</a:t>
+            </a:r>
+          </a:p>
+        </p:txBody>
+      </p:sp>
+      <p:sp>
+        <p:nvSpPr>
+          <p:cNvPr id="7" name="TextBox 6"/>
+          <p:cNvSpPr txBox="1"/>
+          <p:nvPr/>
+        </p:nvSpPr>
+        <p:spPr>
+          <a:xfrm>
+            <a:off x="7406640" y="1828800"/>
+            <a:ext cx="4480560" cy="4572000"/>
+          </a:xfrm>
+          <a:prstGeom prst="rect">
+            <a:avLst/>
+          </a:prstGeom>
+          <a:noFill/>
+        </p:spPr>
+        <p:txBody>
+          <a:bodyPr wrap="square">
+            <a:spAutoFit/>
+          </a:bodyPr>
+          <a:lstStyle/>
+          <a:p>
+            <a:pPr>
+              <a:spcAft>
+                <a:spcPts val="900"/>
+              </a:spcAft>
+            </a:pPr>
+            <a:r>
+              <a:rPr sz="1300">
+                <a:solidFill>
+                  <a:srgbClr val="14231B"/>
+                </a:solidFill>
+              </a:rPr>
+              <a:t>•  Продавец описывает счёт одним предложением; ассистент возвращает индикативный рейтинг, ставку аванса и список документов.</a:t>
+            </a:r>
+          </a:p>
+          <a:p>
+            <a:pPr>
+              <a:spcAft>
+                <a:spcPts val="900"/>
+              </a:spcAft>
+            </a:pPr>
+            <a:r>
+              <a:rPr sz="1300">
+                <a:solidFill>
+                  <a:srgbClr val="14231B"/>
+                </a:solidFill>
+              </a:rPr>
+              <a:t>•  На базе Grok (x.ai), трёхъязычно, с корректным запасным поведением и полным аудитом — тот же подход расширяется на скоринг и отчётность.</a:t>
+            </a:r>
+          </a:p>
+        </p:txBody>
+      </p:sp>
+    </p:spTree>
+  </p:cSld>
+  <p:clrMapOvr>
+    <a:masterClrMapping/>
+  </p:clrMapOvr>
+</p:sld>
+</file>
+
+<file path=ppt/slides/slide21.xml><?xml version="1.0" encoding="utf-8"?>
+<p:sld xmlns:a="http://schemas.openxmlformats.org/drawingml/2006/main" xmlns:p="http://schemas.openxmlformats.org/presentationml/2006/main" xmlns:r="http://schemas.openxmlformats.org/officeDocument/2006/relationships">
+  <p:cSld>
+    <p:spTree>
+      <p:nvGrpSpPr>
+        <p:cNvPr id="1" name=""/>
+        <p:cNvGrpSpPr/>
+        <p:nvPr/>
+      </p:nvGrpSpPr>
+      <p:grpSpPr/>
+      <p:sp>
+        <p:nvSpPr>
+          <p:cNvPr id="2" name="Rectangle 1"/>
+          <p:cNvSpPr/>
+          <p:nvPr/>
+        </p:nvSpPr>
+        <p:spPr>
+          <a:xfrm>
+            <a:off x="0" y="0"/>
+            <a:ext cx="12191695" cy="6858000"/>
+          </a:xfrm>
+          <a:prstGeom prst="rect">
+            <a:avLst/>
+          </a:prstGeom>
+          <a:solidFill>
+            <a:srgbClr val="F7F6F1"/>
+          </a:solidFill>
+          <a:ln>
+            <a:noFill/>
+          </a:ln>
+          <a:effectLst/>
+        </p:spPr>
+        <p:style>
+          <a:lnRef idx="1">
+            <a:schemeClr val="accent1"/>
+          </a:lnRef>
+          <a:fillRef idx="3">
+            <a:schemeClr val="accent1"/>
+          </a:fillRef>
+          <a:effectRef idx="2">
+            <a:schemeClr val="accent1"/>
+          </a:effectRef>
+          <a:fontRef idx="minor">
+            <a:schemeClr val="lt1"/>
+          </a:fontRef>
+        </p:style>
+        <p:txBody>
+          <a:bodyPr rtlCol="0" anchor="ctr"/>
+          <a:lstStyle/>
+          <a:p>
+            <a:pPr algn="ctr"/>
+          </a:p>
+        </p:txBody>
+      </p:sp>
+      <p:sp>
+        <p:nvSpPr>
+          <p:cNvPr id="3" name="TextBox 2"/>
+          <p:cNvSpPr txBox="1"/>
+          <p:nvPr/>
+        </p:nvSpPr>
+        <p:spPr>
+          <a:xfrm>
+            <a:off x="640080" y="365760"/>
+            <a:ext cx="10972800" cy="365760"/>
+          </a:xfrm>
+          <a:prstGeom prst="rect">
+            <a:avLst/>
+          </a:prstGeom>
+          <a:noFill/>
+        </p:spPr>
+        <p:txBody>
+          <a:bodyPr wrap="none">
+            <a:spAutoFit/>
+          </a:bodyPr>
+          <a:lstStyle/>
+          <a:p>
+            <a:r>
+              <a:rPr sz="1100" b="1">
+                <a:solidFill>
+                  <a:srgbClr val="C8A24B"/>
+                </a:solidFill>
+              </a:rPr>
+              <a:t>РЕАЛИЗАЦИЯ</a:t>
+            </a:r>
+          </a:p>
+        </p:txBody>
+      </p:sp>
+      <p:sp>
+        <p:nvSpPr>
+          <p:cNvPr id="4" name="Rectangle 3"/>
+          <p:cNvSpPr/>
+          <p:nvPr/>
+        </p:nvSpPr>
+        <p:spPr>
+          <a:xfrm>
+            <a:off x="640080" y="731520"/>
+            <a:ext cx="10881360" cy="777240"/>
+          </a:xfrm>
+          <a:prstGeom prst="rect">
+            <a:avLst/>
+          </a:prstGeom>
+          <a:solidFill>
+            <a:srgbClr val="1F5D43"/>
+          </a:solidFill>
+          <a:ln>
+            <a:noFill/>
+          </a:ln>
+          <a:effectLst/>
+        </p:spPr>
+        <p:style>
+          <a:lnRef idx="1">
+            <a:schemeClr val="accent1"/>
+          </a:lnRef>
+          <a:fillRef idx="3">
+            <a:schemeClr val="accent1"/>
+          </a:fillRef>
+          <a:effectRef idx="2">
+            <a:schemeClr val="accent1"/>
+          </a:effectRef>
+          <a:fontRef idx="minor">
+            <a:schemeClr val="lt1"/>
+          </a:fontRef>
+        </p:style>
+        <p:txBody>
+          <a:bodyPr rtlCol="0" anchor="ctr" wrap="square"/>
+          <a:lstStyle/>
+          <a:p>
+            <a:pPr algn="ctr"/>
+            <a:r>
+              <a:rPr sz="2100" b="1">
+                <a:solidFill>
+                  <a:srgbClr val="FFFFFF"/>
+                </a:solidFill>
+              </a:rPr>
+              <a:t>   От прототипа к региональной платформе</a:t>
+            </a:r>
+          </a:p>
+        </p:txBody>
+      </p:sp>
+      <p:pic>
+        <p:nvPicPr>
+          <p:cNvPr id="5" name="Picture 4" descr="d5-roadmap.png"/>
+          <p:cNvPicPr>
+            <a:picLocks noChangeAspect="1"/>
+          </p:cNvPicPr>
+          <p:nvPr/>
+        </p:nvPicPr>
+        <p:blipFill>
+          <a:blip r:embed="rId2"/>
+          <a:stretch>
+            <a:fillRect/>
+          </a:stretch>
+        </p:blipFill>
+        <p:spPr>
+          <a:xfrm>
+            <a:off x="548640" y="3740590"/>
+            <a:ext cx="6583680" cy="656980"/>
+          </a:xfrm>
+          <a:prstGeom prst="rect">
+            <a:avLst/>
+          </a:prstGeom>
+        </p:spPr>
+      </p:pic>
+      <p:sp>
+        <p:nvSpPr>
+          <p:cNvPr id="6" name="TextBox 5"/>
+          <p:cNvSpPr txBox="1"/>
+          <p:nvPr/>
+        </p:nvSpPr>
+        <p:spPr>
+          <a:xfrm>
+            <a:off x="548640" y="6355080"/>
+            <a:ext cx="6583680" cy="365760"/>
+          </a:xfrm>
+          <a:prstGeom prst="rect">
+            <a:avLst/>
+          </a:prstGeom>
+          <a:noFill/>
+        </p:spPr>
+        <p:txBody>
+          <a:bodyPr wrap="none">
+            <a:spAutoFit/>
+          </a:bodyPr>
+          <a:lstStyle/>
+          <a:p>
+            <a:pPr algn="ctr"/>
+            <a:r>
+              <a:rPr sz="1000" i="1">
+                <a:solidFill>
+                  <a:srgbClr val="415046"/>
+                </a:solidFill>
+              </a:rPr>
+              <a:t>Поэтапный запуск — каждый этап финансирует следующий</a:t>
+            </a:r>
+          </a:p>
+        </p:txBody>
+      </p:sp>
+      <p:sp>
+        <p:nvSpPr>
+          <p:cNvPr id="7" name="TextBox 6"/>
+          <p:cNvSpPr txBox="1"/>
+          <p:nvPr/>
+        </p:nvSpPr>
+        <p:spPr>
+          <a:xfrm>
+            <a:off x="7406640" y="1828800"/>
+            <a:ext cx="4480560" cy="4572000"/>
+          </a:xfrm>
+          <a:prstGeom prst="rect">
+            <a:avLst/>
+          </a:prstGeom>
+          <a:noFill/>
+        </p:spPr>
+        <p:txBody>
+          <a:bodyPr wrap="square">
+            <a:spAutoFit/>
+          </a:bodyPr>
+          <a:lstStyle/>
+          <a:p>
+            <a:pPr>
+              <a:spcAft>
+                <a:spcPts val="900"/>
+              </a:spcAft>
+            </a:pPr>
+            <a:r>
+              <a:rPr sz="1300">
+                <a:solidFill>
+                  <a:srgbClr val="14231B"/>
+                </a:solidFill>
+              </a:rPr>
+              <a:t>•  Этап 0 (сейчас): прототип ИИ-триажа и отчётности работает.</a:t>
+            </a:r>
+          </a:p>
+          <a:p>
+            <a:pPr>
+              <a:spcAft>
+                <a:spcPts val="900"/>
+              </a:spcAft>
+            </a:pPr>
+            <a:r>
+              <a:rPr sz="1300">
+                <a:solidFill>
+                  <a:srgbClr val="14231B"/>
+                </a:solidFill>
+              </a:rPr>
+              <a:t>•  Этапы 1–2 (M1–6): релиз платформы, интеграция SoliqOnline, скоринг на open banking, оплата за объём.</a:t>
+            </a:r>
+          </a:p>
+          <a:p>
+            <a:pPr>
+              <a:spcAft>
+                <a:spcPts val="900"/>
+              </a:spcAft>
+            </a:pPr>
+            <a:r>
+              <a:rPr sz="1300">
+                <a:solidFill>
+                  <a:srgbClr val="14231B"/>
+                </a:solidFill>
+              </a:rPr>
+              <a:t>•  Этапы 3–4 (M6+): SPV в DIFC и первый международный капитал, затем последовательность Вакала → Сукук и региональный масштаб.</a:t>
+            </a:r>
+          </a:p>
+        </p:txBody>
+      </p:sp>
+    </p:spTree>
+  </p:cSld>
+  <p:clrMapOvr>
+    <a:masterClrMapping/>
+  </p:clrMapOvr>
+</p:sld>
+</file>
+
+<file path=ppt/slides/slide22.xml><?xml version="1.0" encoding="utf-8"?>
+<p:sld xmlns:a="http://schemas.openxmlformats.org/drawingml/2006/main" xmlns:p="http://schemas.openxmlformats.org/presentationml/2006/main" xmlns:r="http://schemas.openxmlformats.org/officeDocument/2006/relationships">
+  <p:cSld>
+    <p:spTree>
+      <p:nvGrpSpPr>
+        <p:cNvPr id="1" name=""/>
+        <p:cNvGrpSpPr/>
+        <p:nvPr/>
+      </p:nvGrpSpPr>
+      <p:grpSpPr/>
+      <p:sp>
+        <p:nvSpPr>
+          <p:cNvPr id="2" name="Rectangle 1"/>
+          <p:cNvSpPr/>
+          <p:nvPr/>
+        </p:nvSpPr>
+        <p:spPr>
+          <a:xfrm>
+            <a:off x="0" y="0"/>
+            <a:ext cx="12191695" cy="6858000"/>
+          </a:xfrm>
+          <a:prstGeom prst="rect">
+            <a:avLst/>
+          </a:prstGeom>
+          <a:solidFill>
+            <a:srgbClr val="F7F6F1"/>
+          </a:solidFill>
+          <a:ln>
+            <a:noFill/>
+          </a:ln>
+          <a:effectLst/>
+        </p:spPr>
+        <p:style>
+          <a:lnRef idx="1">
+            <a:schemeClr val="accent1"/>
+          </a:lnRef>
+          <a:fillRef idx="3">
+            <a:schemeClr val="accent1"/>
+          </a:fillRef>
+          <a:effectRef idx="2">
+            <a:schemeClr val="accent1"/>
+          </a:effectRef>
+          <a:fontRef idx="minor">
+            <a:schemeClr val="lt1"/>
+          </a:fontRef>
+        </p:style>
+        <p:txBody>
+          <a:bodyPr rtlCol="0" anchor="ctr"/>
+          <a:lstStyle/>
+          <a:p>
+            <a:pPr algn="ctr"/>
+          </a:p>
+        </p:txBody>
+      </p:sp>
+      <p:sp>
+        <p:nvSpPr>
+          <p:cNvPr id="3" name="TextBox 2"/>
+          <p:cNvSpPr txBox="1"/>
+          <p:nvPr/>
+        </p:nvSpPr>
+        <p:spPr>
+          <a:xfrm>
+            <a:off x="640080" y="365760"/>
+            <a:ext cx="10972800" cy="365760"/>
+          </a:xfrm>
+          <a:prstGeom prst="rect">
+            <a:avLst/>
+          </a:prstGeom>
+          <a:noFill/>
+        </p:spPr>
+        <p:txBody>
+          <a:bodyPr wrap="none">
+            <a:spAutoFit/>
+          </a:bodyPr>
+          <a:lstStyle/>
+          <a:p>
+            <a:r>
+              <a:rPr sz="1100" b="1">
+                <a:solidFill>
+                  <a:srgbClr val="C8A24B"/>
+                </a:solidFill>
+              </a:rPr>
+              <a:t>ПОЧЕМУ CONSISTENTE</a:t>
+            </a:r>
+          </a:p>
+        </p:txBody>
+      </p:sp>
+      <p:sp>
+        <p:nvSpPr>
+          <p:cNvPr id="4" name="Rectangle 3"/>
+          <p:cNvSpPr/>
+          <p:nvPr/>
+        </p:nvSpPr>
+        <p:spPr>
+          <a:xfrm>
+            <a:off x="640080" y="731520"/>
+            <a:ext cx="10881360" cy="777240"/>
+          </a:xfrm>
+          <a:prstGeom prst="rect">
+            <a:avLst/>
+          </a:prstGeom>
+          <a:solidFill>
+            <a:srgbClr val="1F5D43"/>
+          </a:solidFill>
+          <a:ln>
+            <a:noFill/>
+          </a:ln>
+          <a:effectLst/>
+        </p:spPr>
+        <p:style>
+          <a:lnRef idx="1">
+            <a:schemeClr val="accent1"/>
+          </a:lnRef>
+          <a:fillRef idx="3">
+            <a:schemeClr val="accent1"/>
+          </a:fillRef>
+          <a:effectRef idx="2">
+            <a:schemeClr val="accent1"/>
+          </a:effectRef>
+          <a:fontRef idx="minor">
+            <a:schemeClr val="lt1"/>
+          </a:fontRef>
+        </p:style>
+        <p:txBody>
+          <a:bodyPr rtlCol="0" anchor="ctr" wrap="square"/>
+          <a:lstStyle/>
+          <a:p>
+            <a:pPr algn="ctr"/>
+            <a:r>
+              <a:rPr sz="2100" b="1">
+                <a:solidFill>
+                  <a:srgbClr val="FFFFFF"/>
+                </a:solidFill>
+              </a:rPr>
+              <a:t>   Промышленный ИИ, поставляемый стабильно</a:t>
+            </a:r>
+          </a:p>
+        </p:txBody>
+      </p:sp>
+      <p:sp>
+        <p:nvSpPr>
+          <p:cNvPr id="5" name="TextBox 4"/>
+          <p:cNvSpPr txBox="1"/>
+          <p:nvPr/>
+        </p:nvSpPr>
+        <p:spPr>
+          <a:xfrm>
+            <a:off x="685800" y="1828800"/>
+            <a:ext cx="10881360" cy="4572000"/>
+          </a:xfrm>
+          <a:prstGeom prst="rect">
+            <a:avLst/>
+          </a:prstGeom>
+          <a:noFill/>
+        </p:spPr>
+        <p:txBody>
+          <a:bodyPr wrap="square">
+            <a:spAutoFit/>
+          </a:bodyPr>
+          <a:lstStyle/>
+          <a:p>
+            <a:pPr>
+              <a:spcAft>
+                <a:spcPts val="900"/>
+              </a:spcAft>
+            </a:pPr>
+            <a:r>
+              <a:rPr sz="1500">
+                <a:solidFill>
+                  <a:srgbClr val="14231B"/>
+                </a:solidFill>
+              </a:rPr>
+              <a:t>•  Consistente Ltd (Таллин, ЕС) создаёт промышленный ИИ для предприятий — с воспроизводимыми пайплайнами, версионируемыми моделями и прозрачными промптами, а не «чёрные ящики».</a:t>
+            </a:r>
+          </a:p>
+          <a:p>
+            <a:pPr>
+              <a:spcAft>
+                <a:spcPts val="900"/>
+              </a:spcAft>
+            </a:pPr>
+            <a:r>
+              <a:rPr sz="1500">
+                <a:solidFill>
+                  <a:srgbClr val="14231B"/>
+                </a:solidFill>
+              </a:rPr>
+              <a:t>•  Опыт в финансовых услугах и регулируемых секторах: LSEG, DBRS Morningstar, ARM, Microsoft.</a:t>
+            </a:r>
+          </a:p>
+          <a:p>
+            <a:pPr>
+              <a:spcAft>
+                <a:spcPts val="900"/>
+              </a:spcAft>
+            </a:pPr>
+            <a:r>
+              <a:rPr sz="1500">
+                <a:solidFill>
+                  <a:srgbClr val="14231B"/>
+                </a:solidFill>
+              </a:rPr>
+              <a:t>•  Ключевые компетенции прямо ложатся на проект: интеллектуальная обработка документов, прикладной прогноз/скоринг и агентные процессы с проверкой человеком.</a:t>
+            </a:r>
+          </a:p>
+          <a:p>
+            <a:pPr>
+              <a:spcAft>
+                <a:spcPts val="900"/>
+              </a:spcAft>
+            </a:pPr>
+            <a:r>
+              <a:rPr sz="1500">
+                <a:solidFill>
+                  <a:srgbClr val="14231B"/>
+                </a:solidFill>
+              </a:rPr>
+              <a:t>•  Базируется в ЕС, приоритет аудируемости — верный профиль для банка, строящего ИИ под надзором регулятора.</a:t>
+            </a:r>
+          </a:p>
+        </p:txBody>
+      </p:sp>
+    </p:spTree>
+  </p:cSld>
+  <p:clrMapOvr>
+    <a:masterClrMapping/>
+  </p:clrMapOvr>
+</p:sld>
+</file>
+
+<file path=ppt/slides/slide23.xml><?xml version="1.0" encoding="utf-8"?>
+<p:sld xmlns:a="http://schemas.openxmlformats.org/drawingml/2006/main" xmlns:p="http://schemas.openxmlformats.org/presentationml/2006/main" xmlns:r="http://schemas.openxmlformats.org/officeDocument/2006/relationships">
+  <p:cSld>
+    <p:spTree>
+      <p:nvGrpSpPr>
+        <p:cNvPr id="1" name=""/>
+        <p:cNvGrpSpPr/>
+        <p:nvPr/>
+      </p:nvGrpSpPr>
+      <p:grpSpPr/>
+      <p:sp>
+        <p:nvSpPr>
+          <p:cNvPr id="2" name="Rectangle 1"/>
+          <p:cNvSpPr/>
+          <p:nvPr/>
+        </p:nvSpPr>
+        <p:spPr>
+          <a:xfrm>
+            <a:off x="0" y="0"/>
+            <a:ext cx="12191695" cy="6858000"/>
+          </a:xfrm>
+          <a:prstGeom prst="rect">
+            <a:avLst/>
+          </a:prstGeom>
+          <a:solidFill>
+            <a:srgbClr val="F7F6F1"/>
+          </a:solidFill>
+          <a:ln>
+            <a:noFill/>
+          </a:ln>
+          <a:effectLst/>
+        </p:spPr>
+        <p:style>
+          <a:lnRef idx="1">
+            <a:schemeClr val="accent1"/>
+          </a:lnRef>
+          <a:fillRef idx="3">
+            <a:schemeClr val="accent1"/>
+          </a:fillRef>
+          <a:effectRef idx="2">
+            <a:schemeClr val="accent1"/>
+          </a:effectRef>
+          <a:fontRef idx="minor">
+            <a:schemeClr val="lt1"/>
+          </a:fontRef>
+        </p:style>
+        <p:txBody>
+          <a:bodyPr rtlCol="0" anchor="ctr"/>
+          <a:lstStyle/>
+          <a:p>
+            <a:pPr algn="ctr"/>
+          </a:p>
+        </p:txBody>
+      </p:sp>
+      <p:sp>
+        <p:nvSpPr>
+          <p:cNvPr id="3" name="TextBox 2"/>
+          <p:cNvSpPr txBox="1"/>
+          <p:nvPr/>
+        </p:nvSpPr>
+        <p:spPr>
+          <a:xfrm>
+            <a:off x="640080" y="365760"/>
+            <a:ext cx="10972800" cy="365760"/>
+          </a:xfrm>
+          <a:prstGeom prst="rect">
+            <a:avLst/>
+          </a:prstGeom>
+          <a:noFill/>
+        </p:spPr>
+        <p:txBody>
+          <a:bodyPr wrap="none">
+            <a:spAutoFit/>
+          </a:bodyPr>
+          <a:lstStyle/>
+          <a:p>
+            <a:r>
+              <a:rPr sz="1100" b="1">
+                <a:solidFill>
+                  <a:srgbClr val="C8A24B"/>
+                </a:solidFill>
+              </a:rPr>
+              <a:t>СЛЕДУЮЩИЕ ШАГИ</a:t>
+            </a:r>
+          </a:p>
+        </p:txBody>
+      </p:sp>
+      <p:sp>
+        <p:nvSpPr>
+          <p:cNvPr id="4" name="Rectangle 3"/>
+          <p:cNvSpPr/>
+          <p:nvPr/>
+        </p:nvSpPr>
+        <p:spPr>
+          <a:xfrm>
+            <a:off x="640080" y="731520"/>
+            <a:ext cx="10881360" cy="777240"/>
+          </a:xfrm>
+          <a:prstGeom prst="rect">
+            <a:avLst/>
+          </a:prstGeom>
+          <a:solidFill>
+            <a:srgbClr val="1F5D43"/>
+          </a:solidFill>
+          <a:ln>
+            <a:noFill/>
+          </a:ln>
+          <a:effectLst/>
+        </p:spPr>
+        <p:style>
+          <a:lnRef idx="1">
+            <a:schemeClr val="accent1"/>
+          </a:lnRef>
+          <a:fillRef idx="3">
+            <a:schemeClr val="accent1"/>
+          </a:fillRef>
+          <a:effectRef idx="2">
+            <a:schemeClr val="accent1"/>
+          </a:effectRef>
+          <a:fontRef idx="minor">
+            <a:schemeClr val="lt1"/>
+          </a:fontRef>
+        </p:style>
+        <p:txBody>
+          <a:bodyPr rtlCol="0" anchor="ctr" wrap="square"/>
+          <a:lstStyle/>
+          <a:p>
+            <a:pPr algn="ctr"/>
+            <a:r>
+              <a:rPr sz="2100" b="1">
+                <a:solidFill>
+                  <a:srgbClr val="FFFFFF"/>
+                </a:solidFill>
+              </a:rPr>
+              <a:t>   Что предлагаем сделать первым</a:t>
+            </a:r>
+          </a:p>
+        </p:txBody>
+      </p:sp>
+      <p:sp>
+        <p:nvSpPr>
+          <p:cNvPr id="5" name="TextBox 4"/>
+          <p:cNvSpPr txBox="1"/>
+          <p:nvPr/>
+        </p:nvSpPr>
+        <p:spPr>
+          <a:xfrm>
+            <a:off x="685800" y="1828800"/>
+            <a:ext cx="10881360" cy="4572000"/>
+          </a:xfrm>
+          <a:prstGeom prst="rect">
+            <a:avLst/>
+          </a:prstGeom>
+          <a:noFill/>
+        </p:spPr>
+        <p:txBody>
+          <a:bodyPr wrap="square">
+            <a:spAutoFit/>
+          </a:bodyPr>
+          <a:lstStyle/>
+          <a:p>
+            <a:pPr>
+              <a:spcAft>
+                <a:spcPts val="900"/>
+              </a:spcAft>
+            </a:pPr>
+            <a:r>
+              <a:rPr sz="1500">
+                <a:solidFill>
+                  <a:srgbClr val="14231B"/>
+                </a:solidFill>
+              </a:rPr>
+              <a:t>•  1. Согласовать объём white-label и коммерческие условия на основе объёма.</a:t>
+            </a:r>
+          </a:p>
+          <a:p>
+            <a:pPr>
+              <a:spcAft>
+                <a:spcPts val="900"/>
+              </a:spcAft>
+            </a:pPr>
+            <a:r>
+              <a:rPr sz="1500">
+                <a:solidFill>
+                  <a:srgbClr val="14231B"/>
+                </a:solidFill>
+              </a:rPr>
+              <a:t>•  2. Запустить пилот на реальных данных SoliqOnline; вывести платформу в релиз с ИИ-триажем и движком скоринга.</a:t>
+            </a:r>
+          </a:p>
+          <a:p>
+            <a:pPr>
+              <a:spcAft>
+                <a:spcPts val="900"/>
+              </a:spcAft>
+            </a:pPr>
+            <a:r>
+              <a:rPr sz="1500">
+                <a:solidFill>
+                  <a:srgbClr val="14231B"/>
+                </a:solidFill>
+              </a:rPr>
+              <a:t>•  3. Параллельно начать подготовку SPV в DIFC и фатвы, чтобы международный капитал последовал за операционным портфелем.</a:t>
+            </a:r>
+          </a:p>
+          <a:p>
+            <a:pPr>
+              <a:spcAft>
+                <a:spcPts val="900"/>
+              </a:spcAft>
+            </a:pPr>
+            <a:r>
+              <a:rPr sz="1500">
+                <a:solidFill>
+                  <a:srgbClr val="14231B"/>
+                </a:solidFill>
+              </a:rPr>
+              <a:t>•  Контакт: Consistente Ltd · info@consistente.tech · consistente.tech</a:t>
             </a:r>
           </a:p>
         </p:txBody>
@@ -6498,7 +8933,7 @@
                   <a:srgbClr val="14231B"/>
                 </a:solidFill>
               </a:rPr>
-              <a:t>•  Адресный рынок — ~$2 млрд, проникновение — менее 2,5%: рано и быстро растёт.</a:t>
+              <a:t>•  Рынок быстро растёт: ЦБ сообщает о ~10,6 трлн сум (~$835 млн) факторинга за янв–сен 2025, около половины — цифровой, при адресном рынке ~$2 млрд с всё ещё низким проникновением.</a:t>
             </a:r>
           </a:p>
         </p:txBody>
@@ -6823,7 +9258,7 @@
                   <a:srgbClr val="C8A24B"/>
                 </a:solidFill>
               </a:rPr>
-              <a:t>ДЕЙСТВУЮЩИЙ ИГРОК</a:t>
+              <a:t>ДЕЙСТВУЮЩИЕ ИГРОКИ</a:t>
             </a:r>
           </a:p>
         </p:txBody>
@@ -6875,7 +9310,7 @@
                   <a:srgbClr val="FFFFFF"/>
                 </a:solidFill>
               </a:rPr>
-              <a:t>   OzPlanet создал рынок — и оставил его уязвимым</a:t>
+              <a:t>   OzPlanet и FinMakon владеют рынком — как агрегаторы</a:t>
             </a:r>
           </a:p>
         </p:txBody>
@@ -6890,7 +9325,7 @@
         </p:nvGraphicFramePr>
         <p:xfrm>
           <a:off x="685800" y="1828800"/>
-          <a:ext cx="10835640" cy="2560320"/>
+          <a:ext cx="10835640" cy="2926080"/>
         </p:xfrm>
         <a:graphic>
           <a:graphicData uri="http://schemas.openxmlformats.org/drawingml/2006/table">
@@ -6899,9 +9334,10 @@
                 <a:tableStyleId>{5C22544A-7EE6-4342-B048-85BDC9FD1C3A}</a:tableStyleId>
               </a:tblPr>
               <a:tblGrid>
-                <a:gridCol w="3611880"/>
-                <a:gridCol w="3611880"/>
-                <a:gridCol w="3611880"/>
+                <a:gridCol w="2708910"/>
+                <a:gridCol w="2708910"/>
+                <a:gridCol w="2708910"/>
+                <a:gridCol w="2708910"/>
               </a:tblGrid>
               <a:tr h="365760">
                 <a:tc>
@@ -6936,7 +9372,7 @@
                             <a:srgbClr val="FFFFFF"/>
                           </a:solidFill>
                         </a:rPr>
-                        <a:t>OzPlanet (действующий)</a:t>
+                        <a:t>OzPlanet</a:t>
                       </a:r>
                     </a:p>
                   </a:txBody>
@@ -6957,7 +9393,28 @@
                             <a:srgbClr val="FFFFFF"/>
                           </a:solidFill>
                         </a:rPr>
-                        <a:t>Factorio от Consistente</a:t>
+                        <a:t>FinMakon</a:t>
+                      </a:r>
+                    </a:p>
+                  </a:txBody>
+                  <a:tcPr>
+                    <a:solidFill>
+                      <a:srgbClr val="1F5D43"/>
+                    </a:solidFill>
+                  </a:tcPr>
+                </a:tc>
+                <a:tc>
+                  <a:txBody>
+                    <a:bodyPr/>
+                    <a:lstStyle/>
+                    <a:p>
+                      <a:r>
+                        <a:rPr sz="1100" b="1">
+                          <a:solidFill>
+                            <a:srgbClr val="FFFFFF"/>
+                          </a:solidFill>
+                        </a:rPr>
+                        <a:t>Factorio (Consistente)</a:t>
                       </a:r>
                     </a:p>
                   </a:txBody>
@@ -6980,7 +9437,7 @@
                             <a:srgbClr val="14231B"/>
                           </a:solidFill>
                         </a:rPr>
-                        <a:t>Коммерческая модель</a:t>
+                        <a:t>Модель</a:t>
                       </a:r>
                     </a:p>
                   </a:txBody>
@@ -7001,7 +9458,7 @@
                             <a:srgbClr val="14231B"/>
                           </a:solidFill>
                         </a:rPr>
-                        <a:t>SaaS-лицензия / подписка для банка</a:t>
+                        <a:t>Агрегатор; ставки банка</a:t>
                       </a:r>
                     </a:p>
                   </a:txBody>
@@ -7022,7 +9479,28 @@
                             <a:srgbClr val="14231B"/>
                           </a:solidFill>
                         </a:rPr>
-                        <a:t>White-label, оплата только за объём — когда банк финансирует</a:t>
+                        <a:t>Агрегатор (при Didox)</a:t>
+                      </a:r>
+                    </a:p>
+                  </a:txBody>
+                  <a:tcPr>
+                    <a:solidFill>
+                      <a:srgbClr val="FFFFFF"/>
+                    </a:solidFill>
+                  </a:tcPr>
+                </a:tc>
+                <a:tc>
+                  <a:txBody>
+                    <a:bodyPr/>
+                    <a:lstStyle/>
+                    <a:p>
+                      <a:r>
+                        <a:rPr sz="1050">
+                          <a:solidFill>
+                            <a:srgbClr val="14231B"/>
+                          </a:solidFill>
+                        </a:rPr>
+                        <a:t>White-label маркетплейс — владеет банк</a:t>
                       </a:r>
                     </a:p>
                   </a:txBody>
@@ -7045,7 +9523,7 @@
                             <a:srgbClr val="14231B"/>
                           </a:solidFill>
                         </a:rPr>
-                        <a:t>Кредитный скоринг</a:t>
+                        <a:t>Доля в цифре (Q3 2025)</a:t>
                       </a:r>
                     </a:p>
                   </a:txBody>
@@ -7066,7 +9544,7 @@
                             <a:srgbClr val="14231B"/>
                           </a:solidFill>
                         </a:rPr>
-                        <a:t>Ручная / внутренняя проверка банка</a:t>
+                        <a:t>56% цифрового объёма</a:t>
                       </a:r>
                     </a:p>
                   </a:txBody>
@@ -7087,7 +9565,28 @@
                             <a:srgbClr val="14231B"/>
                           </a:solidFill>
                         </a:rPr>
-                        <a:t>Автоматический скоринг в духе open banking (SoliqOnline + транзакции + CRIF)</a:t>
+                        <a:t>44% цифрового объёма</a:t>
+                      </a:r>
+                    </a:p>
+                  </a:txBody>
+                  <a:tcPr>
+                    <a:solidFill>
+                      <a:srgbClr val="EEEDE5"/>
+                    </a:solidFill>
+                  </a:tcPr>
+                </a:tc>
+                <a:tc>
+                  <a:txBody>
+                    <a:bodyPr/>
+                    <a:lstStyle/>
+                    <a:p>
+                      <a:r>
+                        <a:rPr sz="1050">
+                          <a:solidFill>
+                            <a:srgbClr val="14231B"/>
+                          </a:solidFill>
+                        </a:rPr>
+                        <a:t>Новичок — набирает долю</a:t>
                       </a:r>
                     </a:p>
                   </a:txBody>
@@ -7110,7 +9609,7 @@
                             <a:srgbClr val="14231B"/>
                           </a:solidFill>
                         </a:rPr>
-                        <a:t>ИИ</a:t>
+                        <a:t>Источники капитала</a:t>
                       </a:r>
                     </a:p>
                   </a:txBody>
@@ -7131,7 +9630,7 @@
                             <a:srgbClr val="14231B"/>
                           </a:solidFill>
                         </a:rPr>
-                        <a:t>—</a:t>
+                        <a:t>Только банки / МФО</a:t>
                       </a:r>
                     </a:p>
                   </a:txBody>
@@ -7152,7 +9651,28 @@
                             <a:srgbClr val="14231B"/>
                           </a:solidFill>
                         </a:rPr>
-                        <a:t>Триаж и отчётность в чате (Grok), интеллектуальная обработка документов</a:t>
+                        <a:t>Банки / факторинг-компании</a:t>
+                      </a:r>
+                    </a:p>
+                  </a:txBody>
+                  <a:tcPr>
+                    <a:solidFill>
+                      <a:srgbClr val="FFFFFF"/>
+                    </a:solidFill>
+                  </a:tcPr>
+                </a:tc>
+                <a:tc>
+                  <a:txBody>
+                    <a:bodyPr/>
+                    <a:lstStyle/>
+                    <a:p>
+                      <a:r>
+                        <a:rPr sz="1050">
+                          <a:solidFill>
+                            <a:srgbClr val="14231B"/>
+                          </a:solidFill>
+                        </a:rPr>
+                        <a:t>Банки + инвесторы + розница + SPV</a:t>
                       </a:r>
                     </a:p>
                   </a:txBody>
@@ -7175,7 +9695,7 @@
                             <a:srgbClr val="14231B"/>
                           </a:solidFill>
                         </a:rPr>
-                        <a:t>UX онбординга</a:t>
+                        <a:t>Иностр. / розн. капитал</a:t>
                       </a:r>
                     </a:p>
                   </a:txBody>
@@ -7196,7 +9716,7 @@
                             <a:srgbClr val="14231B"/>
                           </a:solidFill>
                         </a:rPr>
-                        <a:t>Ведёт банк, много форм</a:t>
+                        <a:t>Нет</a:t>
                       </a:r>
                     </a:p>
                   </a:txBody>
@@ -7217,7 +9737,28 @@
                             <a:srgbClr val="14231B"/>
                           </a:solidFill>
                         </a:rPr>
-                        <a:t>Самообслуживание, трёхъязычный, за минуты</a:t>
+                        <a:t>Нет</a:t>
+                      </a:r>
+                    </a:p>
+                  </a:txBody>
+                  <a:tcPr>
+                    <a:solidFill>
+                      <a:srgbClr val="EEEDE5"/>
+                    </a:solidFill>
+                  </a:tcPr>
+                </a:tc>
+                <a:tc>
+                  <a:txBody>
+                    <a:bodyPr/>
+                    <a:lstStyle/>
+                    <a:p>
+                      <a:r>
+                        <a:rPr sz="1050">
+                          <a:solidFill>
+                            <a:srgbClr val="14231B"/>
+                          </a:solidFill>
+                        </a:rPr>
+                        <a:t>Да — SPV + маркетплейс</a:t>
                       </a:r>
                     </a:p>
                   </a:txBody>
@@ -7240,7 +9781,7 @@
                             <a:srgbClr val="14231B"/>
                           </a:solidFill>
                         </a:rPr>
-                        <a:t>Международный капитал</a:t>
+                        <a:t>Банк владеет продуктом и данными</a:t>
                       </a:r>
                     </a:p>
                   </a:txBody>
@@ -7261,7 +9802,7 @@
                             <a:srgbClr val="14231B"/>
                           </a:solidFill>
                         </a:rPr>
-                        <a:t>Только местные банки</a:t>
+                        <a:t>Нет — владеет OzPlanet</a:t>
                       </a:r>
                     </a:p>
                   </a:txBody>
@@ -7282,7 +9823,28 @@
                             <a:srgbClr val="14231B"/>
                           </a:solidFill>
                         </a:rPr>
-                        <a:t>SPV в DIFC для глобальных инвесторов и инвесторов Залива</a:t>
+                        <a:t>Нет — владеет FinMakon</a:t>
+                      </a:r>
+                    </a:p>
+                  </a:txBody>
+                  <a:tcPr>
+                    <a:solidFill>
+                      <a:srgbClr val="FFFFFF"/>
+                    </a:solidFill>
+                  </a:tcPr>
+                </a:tc>
+                <a:tc>
+                  <a:txBody>
+                    <a:bodyPr/>
+                    <a:lstStyle/>
+                    <a:p>
+                      <a:r>
+                        <a:rPr sz="1050">
+                          <a:solidFill>
+                            <a:srgbClr val="14231B"/>
+                          </a:solidFill>
+                        </a:rPr>
+                        <a:t>Да — полностью банка</a:t>
                       </a:r>
                     </a:p>
                   </a:txBody>
@@ -7305,7 +9867,7 @@
                             <a:srgbClr val="14231B"/>
                           </a:solidFill>
                         </a:rPr>
-                        <a:t>Время до индикативного решения</a:t>
+                        <a:t>ИИ-ядро</a:t>
                       </a:r>
                     </a:p>
                   </a:txBody>
@@ -7326,7 +9888,7 @@
                             <a:srgbClr val="14231B"/>
                           </a:solidFill>
                         </a:rPr>
-                        <a:t>Дни</a:t>
+                        <a:t>Правила; зачаточно</a:t>
                       </a:r>
                     </a:p>
                   </a:txBody>
@@ -7347,1100 +9909,7 @@
                             <a:srgbClr val="14231B"/>
                           </a:solidFill>
                         </a:rPr>
-                        <a:t>Секунды (индикативно) · часы (финально)</a:t>
-                      </a:r>
-                    </a:p>
-                  </a:txBody>
-                  <a:tcPr>
-                    <a:solidFill>
-                      <a:srgbClr val="EEEDE5"/>
-                    </a:solidFill>
-                  </a:tcPr>
-                </a:tc>
-              </a:tr>
-            </a:tbl>
-          </a:graphicData>
-        </a:graphic>
-      </p:graphicFrame>
-      <p:sp>
-        <p:nvSpPr>
-          <p:cNvPr id="6" name="TextBox 5"/>
-          <p:cNvSpPr txBox="1"/>
-          <p:nvPr/>
-        </p:nvSpPr>
-        <p:spPr>
-          <a:xfrm>
-            <a:off x="685800" y="6035040"/>
-            <a:ext cx="10881360" cy="731520"/>
-          </a:xfrm>
-          <a:prstGeom prst="rect">
-            <a:avLst/>
-          </a:prstGeom>
-          <a:noFill/>
-        </p:spPr>
-        <p:txBody>
-          <a:bodyPr wrap="square">
-            <a:spAutoFit/>
-          </a:bodyPr>
-          <a:lstStyle/>
-          <a:p>
-            <a:r>
-              <a:rPr sz="1000" i="1">
-                <a:solidFill>
-                  <a:srgbClr val="415046"/>
-                </a:solidFill>
-              </a:rPr>
-              <a:t>По имеющимся данным, через OzPlanet проходит ~52% факторинга на электронных платформах, он обслуживает ~50% банков — доказательство реального спроса и того, что более совершенный продукт заберёт долю.</a:t>
-            </a:r>
-          </a:p>
-        </p:txBody>
-      </p:sp>
-    </p:spTree>
-  </p:cSld>
-  <p:clrMapOvr>
-    <a:masterClrMapping/>
-  </p:clrMapOvr>
-</p:sld>
-</file>
-
-<file path=ppt/slides/slide6.xml><?xml version="1.0" encoding="utf-8"?>
-<p:sld xmlns:a="http://schemas.openxmlformats.org/drawingml/2006/main" xmlns:p="http://schemas.openxmlformats.org/presentationml/2006/main" xmlns:r="http://schemas.openxmlformats.org/officeDocument/2006/relationships">
-  <p:cSld>
-    <p:spTree>
-      <p:nvGrpSpPr>
-        <p:cNvPr id="1" name=""/>
-        <p:cNvGrpSpPr/>
-        <p:nvPr/>
-      </p:nvGrpSpPr>
-      <p:grpSpPr/>
-      <p:sp>
-        <p:nvSpPr>
-          <p:cNvPr id="2" name="Rectangle 1"/>
-          <p:cNvSpPr/>
-          <p:nvPr/>
-        </p:nvSpPr>
-        <p:spPr>
-          <a:xfrm>
-            <a:off x="0" y="0"/>
-            <a:ext cx="12191695" cy="6858000"/>
-          </a:xfrm>
-          <a:prstGeom prst="rect">
-            <a:avLst/>
-          </a:prstGeom>
-          <a:solidFill>
-            <a:srgbClr val="F7F6F1"/>
-          </a:solidFill>
-          <a:ln>
-            <a:noFill/>
-          </a:ln>
-          <a:effectLst/>
-        </p:spPr>
-        <p:style>
-          <a:lnRef idx="1">
-            <a:schemeClr val="accent1"/>
-          </a:lnRef>
-          <a:fillRef idx="3">
-            <a:schemeClr val="accent1"/>
-          </a:fillRef>
-          <a:effectRef idx="2">
-            <a:schemeClr val="accent1"/>
-          </a:effectRef>
-          <a:fontRef idx="minor">
-            <a:schemeClr val="lt1"/>
-          </a:fontRef>
-        </p:style>
-        <p:txBody>
-          <a:bodyPr rtlCol="0" anchor="ctr"/>
-          <a:lstStyle/>
-          <a:p>
-            <a:pPr algn="ctr"/>
-          </a:p>
-        </p:txBody>
-      </p:sp>
-      <p:sp>
-        <p:nvSpPr>
-          <p:cNvPr id="3" name="TextBox 2"/>
-          <p:cNvSpPr txBox="1"/>
-          <p:nvPr/>
-        </p:nvSpPr>
-        <p:spPr>
-          <a:xfrm>
-            <a:off x="640080" y="365760"/>
-            <a:ext cx="10972800" cy="365760"/>
-          </a:xfrm>
-          <a:prstGeom prst="rect">
-            <a:avLst/>
-          </a:prstGeom>
-          <a:noFill/>
-        </p:spPr>
-        <p:txBody>
-          <a:bodyPr wrap="none">
-            <a:spAutoFit/>
-          </a:bodyPr>
-          <a:lstStyle/>
-          <a:p>
-            <a:r>
-              <a:rPr sz="1100" b="1">
-                <a:solidFill>
-                  <a:srgbClr val="C8A24B"/>
-                </a:solidFill>
-              </a:rPr>
-              <a:t>НАПРАВЛЕНИЕ 1 · ЛУЧШАЯ ПЛАТФОРМА</a:t>
-            </a:r>
-          </a:p>
-        </p:txBody>
-      </p:sp>
-      <p:sp>
-        <p:nvSpPr>
-          <p:cNvPr id="4" name="Rectangle 3"/>
-          <p:cNvSpPr/>
-          <p:nvPr/>
-        </p:nvSpPr>
-        <p:spPr>
-          <a:xfrm>
-            <a:off x="640080" y="731520"/>
-            <a:ext cx="10881360" cy="777240"/>
-          </a:xfrm>
-          <a:prstGeom prst="rect">
-            <a:avLst/>
-          </a:prstGeom>
-          <a:solidFill>
-            <a:srgbClr val="1F5D43"/>
-          </a:solidFill>
-          <a:ln>
-            <a:noFill/>
-          </a:ln>
-          <a:effectLst/>
-        </p:spPr>
-        <p:style>
-          <a:lnRef idx="1">
-            <a:schemeClr val="accent1"/>
-          </a:lnRef>
-          <a:fillRef idx="3">
-            <a:schemeClr val="accent1"/>
-          </a:fillRef>
-          <a:effectRef idx="2">
-            <a:schemeClr val="accent1"/>
-          </a:effectRef>
-          <a:fontRef idx="minor">
-            <a:schemeClr val="lt1"/>
-          </a:fontRef>
-        </p:style>
-        <p:txBody>
-          <a:bodyPr rtlCol="0" anchor="ctr" wrap="square"/>
-          <a:lstStyle/>
-          <a:p>
-            <a:pPr algn="ctr"/>
-            <a:r>
-              <a:rPr sz="2100" b="1">
-                <a:solidFill>
-                  <a:srgbClr val="FFFFFF"/>
-                </a:solidFill>
-              </a:rPr>
-              <a:t>   ИИ в основе, а не сбоку</a:t>
-            </a:r>
-          </a:p>
-        </p:txBody>
-      </p:sp>
-      <p:sp>
-        <p:nvSpPr>
-          <p:cNvPr id="5" name="TextBox 4"/>
-          <p:cNvSpPr txBox="1"/>
-          <p:nvPr/>
-        </p:nvSpPr>
-        <p:spPr>
-          <a:xfrm>
-            <a:off x="685800" y="1828800"/>
-            <a:ext cx="10881360" cy="4572000"/>
-          </a:xfrm>
-          <a:prstGeom prst="rect">
-            <a:avLst/>
-          </a:prstGeom>
-          <a:noFill/>
-        </p:spPr>
-        <p:txBody>
-          <a:bodyPr wrap="square">
-            <a:spAutoFit/>
-          </a:bodyPr>
-          <a:lstStyle/>
-          <a:p>
-            <a:pPr>
-              <a:spcAft>
-                <a:spcPts val="900"/>
-              </a:spcAft>
-            </a:pPr>
-            <a:r>
-              <a:rPr sz="1500">
-                <a:solidFill>
-                  <a:srgbClr val="14231B"/>
-                </a:solidFill>
-              </a:rPr>
-              <a:t>•  Тот же сквозной процесс факторинга — подача, проверка, финансирование, расчёт — но с ИИ в триаже, скоринге, документах и отчётности.</a:t>
-            </a:r>
-          </a:p>
-          <a:p>
-            <a:pPr>
-              <a:spcAft>
-                <a:spcPts val="900"/>
-              </a:spcAft>
-            </a:pPr>
-            <a:r>
-              <a:rPr sz="1500">
-                <a:solidFill>
-                  <a:srgbClr val="14231B"/>
-                </a:solidFill>
-              </a:rPr>
-              <a:t>•  На лёгком серверном стеке (FastHTML + PostgreSQL) — быстро менять, дёшево эксплуатировать, легко брендировать под банк.</a:t>
-            </a:r>
-          </a:p>
-          <a:p>
-            <a:pPr>
-              <a:spcAft>
-                <a:spcPts val="900"/>
-              </a:spcAft>
-            </a:pPr>
-            <a:r>
-              <a:rPr sz="1500">
-                <a:solidFill>
-                  <a:srgbClr val="14231B"/>
-                </a:solidFill>
-              </a:rPr>
-              <a:t>•  Трёхъязычность заложена в дизайн (английский · узбекский · русский); ИИ отвечает на языке пользователя.</a:t>
-            </a:r>
-          </a:p>
-          <a:p>
-            <a:pPr>
-              <a:spcAft>
-                <a:spcPts val="900"/>
-              </a:spcAft>
-            </a:pPr>
-            <a:r>
-              <a:rPr sz="1500">
-                <a:solidFill>
-                  <a:srgbClr val="14231B"/>
-                </a:solidFill>
-              </a:rPr>
-              <a:t>•  Следующие три слайда раскрывают ИИ, движок кредитного скоринга и коммерческую модель.</a:t>
-            </a:r>
-          </a:p>
-        </p:txBody>
-      </p:sp>
-    </p:spTree>
-  </p:cSld>
-  <p:clrMapOvr>
-    <a:masterClrMapping/>
-  </p:clrMapOvr>
-</p:sld>
-</file>
-
-<file path=ppt/slides/slide7.xml><?xml version="1.0" encoding="utf-8"?>
-<p:sld xmlns:a="http://schemas.openxmlformats.org/drawingml/2006/main" xmlns:p="http://schemas.openxmlformats.org/presentationml/2006/main" xmlns:r="http://schemas.openxmlformats.org/officeDocument/2006/relationships">
-  <p:cSld>
-    <p:spTree>
-      <p:nvGrpSpPr>
-        <p:cNvPr id="1" name=""/>
-        <p:cNvGrpSpPr/>
-        <p:nvPr/>
-      </p:nvGrpSpPr>
-      <p:grpSpPr/>
-      <p:sp>
-        <p:nvSpPr>
-          <p:cNvPr id="2" name="Rectangle 1"/>
-          <p:cNvSpPr/>
-          <p:nvPr/>
-        </p:nvSpPr>
-        <p:spPr>
-          <a:xfrm>
-            <a:off x="0" y="0"/>
-            <a:ext cx="12191695" cy="6858000"/>
-          </a:xfrm>
-          <a:prstGeom prst="rect">
-            <a:avLst/>
-          </a:prstGeom>
-          <a:solidFill>
-            <a:srgbClr val="F7F6F1"/>
-          </a:solidFill>
-          <a:ln>
-            <a:noFill/>
-          </a:ln>
-          <a:effectLst/>
-        </p:spPr>
-        <p:style>
-          <a:lnRef idx="1">
-            <a:schemeClr val="accent1"/>
-          </a:lnRef>
-          <a:fillRef idx="3">
-            <a:schemeClr val="accent1"/>
-          </a:fillRef>
-          <a:effectRef idx="2">
-            <a:schemeClr val="accent1"/>
-          </a:effectRef>
-          <a:fontRef idx="minor">
-            <a:schemeClr val="lt1"/>
-          </a:fontRef>
-        </p:style>
-        <p:txBody>
-          <a:bodyPr rtlCol="0" anchor="ctr"/>
-          <a:lstStyle/>
-          <a:p>
-            <a:pPr algn="ctr"/>
-          </a:p>
-        </p:txBody>
-      </p:sp>
-      <p:sp>
-        <p:nvSpPr>
-          <p:cNvPr id="3" name="TextBox 2"/>
-          <p:cNvSpPr txBox="1"/>
-          <p:nvPr/>
-        </p:nvSpPr>
-        <p:spPr>
-          <a:xfrm>
-            <a:off x="640080" y="365760"/>
-            <a:ext cx="10972800" cy="365760"/>
-          </a:xfrm>
-          <a:prstGeom prst="rect">
-            <a:avLst/>
-          </a:prstGeom>
-          <a:noFill/>
-        </p:spPr>
-        <p:txBody>
-          <a:bodyPr wrap="none">
-            <a:spAutoFit/>
-          </a:bodyPr>
-          <a:lstStyle/>
-          <a:p>
-            <a:r>
-              <a:rPr sz="1100" b="1">
-                <a:solidFill>
-                  <a:srgbClr val="C8A24B"/>
-                </a:solidFill>
-              </a:rPr>
-              <a:t>НАПРАВЛЕНИЕ 1 · ИИ</a:t>
-            </a:r>
-          </a:p>
-        </p:txBody>
-      </p:sp>
-      <p:sp>
-        <p:nvSpPr>
-          <p:cNvPr id="4" name="Rectangle 3"/>
-          <p:cNvSpPr/>
-          <p:nvPr/>
-        </p:nvSpPr>
-        <p:spPr>
-          <a:xfrm>
-            <a:off x="640080" y="731520"/>
-            <a:ext cx="10881360" cy="777240"/>
-          </a:xfrm>
-          <a:prstGeom prst="rect">
-            <a:avLst/>
-          </a:prstGeom>
-          <a:solidFill>
-            <a:srgbClr val="1F5D43"/>
-          </a:solidFill>
-          <a:ln>
-            <a:noFill/>
-          </a:ln>
-          <a:effectLst/>
-        </p:spPr>
-        <p:style>
-          <a:lnRef idx="1">
-            <a:schemeClr val="accent1"/>
-          </a:lnRef>
-          <a:fillRef idx="3">
-            <a:schemeClr val="accent1"/>
-          </a:fillRef>
-          <a:effectRef idx="2">
-            <a:schemeClr val="accent1"/>
-          </a:effectRef>
-          <a:fontRef idx="minor">
-            <a:schemeClr val="lt1"/>
-          </a:fontRef>
-        </p:style>
-        <p:txBody>
-          <a:bodyPr rtlCol="0" anchor="ctr" wrap="square"/>
-          <a:lstStyle/>
-          <a:p>
-            <a:pPr algn="ctr"/>
-            <a:r>
-              <a:rPr sz="2100" b="1">
-                <a:solidFill>
-                  <a:srgbClr val="FFFFFF"/>
-                </a:solidFill>
-              </a:rPr>
-              <a:t>   Две разговорные поверхности, одно ядро Grok</a:t>
-            </a:r>
-          </a:p>
-        </p:txBody>
-      </p:sp>
-      <p:pic>
-        <p:nvPicPr>
-          <p:cNvPr id="5" name="Picture 4" descr="d2-ai-chat.png"/>
-          <p:cNvPicPr>
-            <a:picLocks noChangeAspect="1"/>
-          </p:cNvPicPr>
-          <p:nvPr/>
-        </p:nvPicPr>
-        <p:blipFill>
-          <a:blip r:embed="rId2"/>
-          <a:stretch>
-            <a:fillRect/>
-          </a:stretch>
-        </p:blipFill>
-        <p:spPr>
-          <a:xfrm>
-            <a:off x="548640" y="3366474"/>
-            <a:ext cx="6583680" cy="1405212"/>
-          </a:xfrm>
-          <a:prstGeom prst="rect">
-            <a:avLst/>
-          </a:prstGeom>
-        </p:spPr>
-      </p:pic>
-      <p:sp>
-        <p:nvSpPr>
-          <p:cNvPr id="6" name="TextBox 5"/>
-          <p:cNvSpPr txBox="1"/>
-          <p:nvPr/>
-        </p:nvSpPr>
-        <p:spPr>
-          <a:xfrm>
-            <a:off x="548640" y="6355080"/>
-            <a:ext cx="6583680" cy="365760"/>
-          </a:xfrm>
-          <a:prstGeom prst="rect">
-            <a:avLst/>
-          </a:prstGeom>
-          <a:noFill/>
-        </p:spPr>
-        <p:txBody>
-          <a:bodyPr wrap="none">
-            <a:spAutoFit/>
-          </a:bodyPr>
-          <a:lstStyle/>
-          <a:p>
-            <a:pPr algn="ctr"/>
-            <a:r>
-              <a:rPr sz="1000" i="1">
-                <a:solidFill>
-                  <a:srgbClr val="415046"/>
-                </a:solidFill>
-              </a:rPr>
-              <a:t>Триаж заявок в чате и отчётность для инвесторов в чате</a:t>
-            </a:r>
-          </a:p>
-        </p:txBody>
-      </p:sp>
-      <p:sp>
-        <p:nvSpPr>
-          <p:cNvPr id="7" name="TextBox 6"/>
-          <p:cNvSpPr txBox="1"/>
-          <p:nvPr/>
-        </p:nvSpPr>
-        <p:spPr>
-          <a:xfrm>
-            <a:off x="7406640" y="1828800"/>
-            <a:ext cx="4480560" cy="4572000"/>
-          </a:xfrm>
-          <a:prstGeom prst="rect">
-            <a:avLst/>
-          </a:prstGeom>
-          <a:noFill/>
-        </p:spPr>
-        <p:txBody>
-          <a:bodyPr wrap="square">
-            <a:spAutoFit/>
-          </a:bodyPr>
-          <a:lstStyle/>
-          <a:p>
-            <a:pPr>
-              <a:spcAft>
-                <a:spcPts val="900"/>
-              </a:spcAft>
-            </a:pPr>
-            <a:r>
-              <a:rPr sz="1300">
-                <a:solidFill>
-                  <a:srgbClr val="14231B"/>
-                </a:solidFill>
-              </a:rPr>
-              <a:t>•  Триаж превращает описание продавца на естественном языке в индикативный рейтинг, ставку аванса и список документов — за секунды.</a:t>
-            </a:r>
-          </a:p>
-          <a:p>
-            <a:pPr>
-              <a:spcAft>
-                <a:spcPts val="900"/>
-              </a:spcAft>
-            </a:pPr>
-            <a:r>
-              <a:rPr sz="1300">
-                <a:solidFill>
-                  <a:srgbClr val="14231B"/>
-                </a:solidFill>
-              </a:rPr>
-              <a:t>•  Отчётность отвечает на вопросы инвестора на основе его реальных позиций — без выдуманных цифр.</a:t>
-            </a:r>
-          </a:p>
-          <a:p>
-            <a:pPr>
-              <a:spcAft>
-                <a:spcPts val="900"/>
-              </a:spcAft>
-            </a:pPr>
-            <a:r>
-              <a:rPr sz="1300">
-                <a:solidFill>
-                  <a:srgbClr val="14231B"/>
-                </a:solidFill>
-              </a:rPr>
-              <a:t>•  Grok оценивает и объясняет; финальное решение всегда за человеком. Каждое решение ИИ логируется и проверяемо.</a:t>
-            </a:r>
-          </a:p>
-        </p:txBody>
-      </p:sp>
-    </p:spTree>
-  </p:cSld>
-  <p:clrMapOvr>
-    <a:masterClrMapping/>
-  </p:clrMapOvr>
-</p:sld>
-</file>
-
-<file path=ppt/slides/slide8.xml><?xml version="1.0" encoding="utf-8"?>
-<p:sld xmlns:a="http://schemas.openxmlformats.org/drawingml/2006/main" xmlns:p="http://schemas.openxmlformats.org/presentationml/2006/main" xmlns:r="http://schemas.openxmlformats.org/officeDocument/2006/relationships">
-  <p:cSld>
-    <p:spTree>
-      <p:nvGrpSpPr>
-        <p:cNvPr id="1" name=""/>
-        <p:cNvGrpSpPr/>
-        <p:nvPr/>
-      </p:nvGrpSpPr>
-      <p:grpSpPr/>
-      <p:sp>
-        <p:nvSpPr>
-          <p:cNvPr id="2" name="Rectangle 1"/>
-          <p:cNvSpPr/>
-          <p:nvPr/>
-        </p:nvSpPr>
-        <p:spPr>
-          <a:xfrm>
-            <a:off x="0" y="0"/>
-            <a:ext cx="12191695" cy="6858000"/>
-          </a:xfrm>
-          <a:prstGeom prst="rect">
-            <a:avLst/>
-          </a:prstGeom>
-          <a:solidFill>
-            <a:srgbClr val="F7F6F1"/>
-          </a:solidFill>
-          <a:ln>
-            <a:noFill/>
-          </a:ln>
-          <a:effectLst/>
-        </p:spPr>
-        <p:style>
-          <a:lnRef idx="1">
-            <a:schemeClr val="accent1"/>
-          </a:lnRef>
-          <a:fillRef idx="3">
-            <a:schemeClr val="accent1"/>
-          </a:fillRef>
-          <a:effectRef idx="2">
-            <a:schemeClr val="accent1"/>
-          </a:effectRef>
-          <a:fontRef idx="minor">
-            <a:schemeClr val="lt1"/>
-          </a:fontRef>
-        </p:style>
-        <p:txBody>
-          <a:bodyPr rtlCol="0" anchor="ctr"/>
-          <a:lstStyle/>
-          <a:p>
-            <a:pPr algn="ctr"/>
-          </a:p>
-        </p:txBody>
-      </p:sp>
-      <p:sp>
-        <p:nvSpPr>
-          <p:cNvPr id="3" name="TextBox 2"/>
-          <p:cNvSpPr txBox="1"/>
-          <p:nvPr/>
-        </p:nvSpPr>
-        <p:spPr>
-          <a:xfrm>
-            <a:off x="640080" y="365760"/>
-            <a:ext cx="10972800" cy="365760"/>
-          </a:xfrm>
-          <a:prstGeom prst="rect">
-            <a:avLst/>
-          </a:prstGeom>
-          <a:noFill/>
-        </p:spPr>
-        <p:txBody>
-          <a:bodyPr wrap="none">
-            <a:spAutoFit/>
-          </a:bodyPr>
-          <a:lstStyle/>
-          <a:p>
-            <a:r>
-              <a:rPr sz="1100" b="1">
-                <a:solidFill>
-                  <a:srgbClr val="C8A24B"/>
-                </a:solidFill>
-              </a:rPr>
-              <a:t>НАПРАВЛЕНИЕ 1 · КРЕДИТНЫЙ СКОРИНГ</a:t>
-            </a:r>
-          </a:p>
-        </p:txBody>
-      </p:sp>
-      <p:sp>
-        <p:nvSpPr>
-          <p:cNvPr id="4" name="Rectangle 3"/>
-          <p:cNvSpPr/>
-          <p:nvPr/>
-        </p:nvSpPr>
-        <p:spPr>
-          <a:xfrm>
-            <a:off x="640080" y="731520"/>
-            <a:ext cx="10881360" cy="777240"/>
-          </a:xfrm>
-          <a:prstGeom prst="rect">
-            <a:avLst/>
-          </a:prstGeom>
-          <a:solidFill>
-            <a:srgbClr val="1F5D43"/>
-          </a:solidFill>
-          <a:ln>
-            <a:noFill/>
-          </a:ln>
-          <a:effectLst/>
-        </p:spPr>
-        <p:style>
-          <a:lnRef idx="1">
-            <a:schemeClr val="accent1"/>
-          </a:lnRef>
-          <a:fillRef idx="3">
-            <a:schemeClr val="accent1"/>
-          </a:fillRef>
-          <a:effectRef idx="2">
-            <a:schemeClr val="accent1"/>
-          </a:effectRef>
-          <a:fontRef idx="minor">
-            <a:schemeClr val="lt1"/>
-          </a:fontRef>
-        </p:style>
-        <p:txBody>
-          <a:bodyPr rtlCol="0" anchor="ctr" wrap="square"/>
-          <a:lstStyle/>
-          <a:p>
-            <a:pPr algn="ctr"/>
-            <a:r>
-              <a:rPr sz="2100" b="1">
-                <a:solidFill>
-                  <a:srgbClr val="FFFFFF"/>
-                </a:solidFill>
-              </a:rPr>
-              <a:t>   Скоринг в духе open banking, узбекская версия</a:t>
-            </a:r>
-          </a:p>
-        </p:txBody>
-      </p:sp>
-      <p:pic>
-        <p:nvPicPr>
-          <p:cNvPr id="5" name="Picture 4" descr="d3-scoring.png"/>
-          <p:cNvPicPr>
-            <a:picLocks noChangeAspect="1"/>
-          </p:cNvPicPr>
-          <p:nvPr/>
-        </p:nvPicPr>
-        <p:blipFill>
-          <a:blip r:embed="rId2"/>
-          <a:stretch>
-            <a:fillRect/>
-          </a:stretch>
-        </p:blipFill>
-        <p:spPr>
-          <a:xfrm>
-            <a:off x="548640" y="3192925"/>
-            <a:ext cx="6583680" cy="1752310"/>
-          </a:xfrm>
-          <a:prstGeom prst="rect">
-            <a:avLst/>
-          </a:prstGeom>
-        </p:spPr>
-      </p:pic>
-      <p:sp>
-        <p:nvSpPr>
-          <p:cNvPr id="6" name="TextBox 5"/>
-          <p:cNvSpPr txBox="1"/>
-          <p:nvPr/>
-        </p:nvSpPr>
-        <p:spPr>
-          <a:xfrm>
-            <a:off x="548640" y="6355080"/>
-            <a:ext cx="6583680" cy="365760"/>
-          </a:xfrm>
-          <a:prstGeom prst="rect">
-            <a:avLst/>
-          </a:prstGeom>
-          <a:noFill/>
-        </p:spPr>
-        <p:txBody>
-          <a:bodyPr wrap="none">
-            <a:spAutoFit/>
-          </a:bodyPr>
-          <a:lstStyle/>
-          <a:p>
-            <a:pPr algn="ctr"/>
-            <a:r>
-              <a:rPr sz="1000" i="1">
-                <a:solidFill>
-                  <a:srgbClr val="415046"/>
-                </a:solidFill>
-              </a:rPr>
-              <a:t>Слияние данных в стиле Plaid, адаптированное к инфраструктуре Узбекистана</a:t>
-            </a:r>
-          </a:p>
-        </p:txBody>
-      </p:sp>
-      <p:sp>
-        <p:nvSpPr>
-          <p:cNvPr id="7" name="TextBox 6"/>
-          <p:cNvSpPr txBox="1"/>
-          <p:nvPr/>
-        </p:nvSpPr>
-        <p:spPr>
-          <a:xfrm>
-            <a:off x="7406640" y="1828800"/>
-            <a:ext cx="4480560" cy="4572000"/>
-          </a:xfrm>
-          <a:prstGeom prst="rect">
-            <a:avLst/>
-          </a:prstGeom>
-          <a:noFill/>
-        </p:spPr>
-        <p:txBody>
-          <a:bodyPr wrap="square">
-            <a:spAutoFit/>
-          </a:bodyPr>
-          <a:lstStyle/>
-          <a:p>
-            <a:pPr>
-              <a:spcAft>
-                <a:spcPts val="900"/>
-              </a:spcAft>
-            </a:pPr>
-            <a:r>
-              <a:rPr sz="1300">
-                <a:solidFill>
-                  <a:srgbClr val="14231B"/>
-                </a:solidFill>
-              </a:rPr>
-              <a:t>•  Модель Plaid — это подключи счёт, прочитай денежные потоки, прими решение. В Узбекистане богатейший источник — SoliqOnline (проверенные счета и налоговый оборот) плюс банковские транзакции и бюро CRIF.</a:t>
-            </a:r>
-          </a:p>
-          <a:p>
-            <a:pPr>
-              <a:spcAft>
-                <a:spcPts val="900"/>
-              </a:spcAft>
-            </a:pPr>
-            <a:r>
-              <a:rPr sz="1300">
-                <a:solidFill>
-                  <a:srgbClr val="14231B"/>
-                </a:solidFill>
-              </a:rPr>
-              <a:t>•  Модель выдаёт рейтинг, ставку аванса и цену; Grok формирует понятное обоснование и причины отказа.</a:t>
-            </a:r>
-          </a:p>
-          <a:p>
-            <a:pPr>
-              <a:spcAft>
-                <a:spcPts val="900"/>
-              </a:spcAft>
-            </a:pPr>
-            <a:r>
-              <a:rPr sz="1300">
-                <a:solidFill>
-                  <a:srgbClr val="14231B"/>
-                </a:solidFill>
-              </a:rPr>
-              <a:t>•  Каждое решение версионируется и воспроизводимо — ключевая методология Consistente и то, что запросит регулятор.</a:t>
-            </a:r>
-          </a:p>
-        </p:txBody>
-      </p:sp>
-    </p:spTree>
-  </p:cSld>
-  <p:clrMapOvr>
-    <a:masterClrMapping/>
-  </p:clrMapOvr>
-</p:sld>
-</file>
-
-<file path=ppt/slides/slide9.xml><?xml version="1.0" encoding="utf-8"?>
-<p:sld xmlns:a="http://schemas.openxmlformats.org/drawingml/2006/main" xmlns:p="http://schemas.openxmlformats.org/presentationml/2006/main" xmlns:r="http://schemas.openxmlformats.org/officeDocument/2006/relationships">
-  <p:cSld>
-    <p:spTree>
-      <p:nvGrpSpPr>
-        <p:cNvPr id="1" name=""/>
-        <p:cNvGrpSpPr/>
-        <p:nvPr/>
-      </p:nvGrpSpPr>
-      <p:grpSpPr/>
-      <p:sp>
-        <p:nvSpPr>
-          <p:cNvPr id="2" name="Rectangle 1"/>
-          <p:cNvSpPr/>
-          <p:nvPr/>
-        </p:nvSpPr>
-        <p:spPr>
-          <a:xfrm>
-            <a:off x="0" y="0"/>
-            <a:ext cx="12191695" cy="6858000"/>
-          </a:xfrm>
-          <a:prstGeom prst="rect">
-            <a:avLst/>
-          </a:prstGeom>
-          <a:solidFill>
-            <a:srgbClr val="F7F6F1"/>
-          </a:solidFill>
-          <a:ln>
-            <a:noFill/>
-          </a:ln>
-          <a:effectLst/>
-        </p:spPr>
-        <p:style>
-          <a:lnRef idx="1">
-            <a:schemeClr val="accent1"/>
-          </a:lnRef>
-          <a:fillRef idx="3">
-            <a:schemeClr val="accent1"/>
-          </a:fillRef>
-          <a:effectRef idx="2">
-            <a:schemeClr val="accent1"/>
-          </a:effectRef>
-          <a:fontRef idx="minor">
-            <a:schemeClr val="lt1"/>
-          </a:fontRef>
-        </p:style>
-        <p:txBody>
-          <a:bodyPr rtlCol="0" anchor="ctr"/>
-          <a:lstStyle/>
-          <a:p>
-            <a:pPr algn="ctr"/>
-          </a:p>
-        </p:txBody>
-      </p:sp>
-      <p:sp>
-        <p:nvSpPr>
-          <p:cNvPr id="3" name="TextBox 2"/>
-          <p:cNvSpPr txBox="1"/>
-          <p:nvPr/>
-        </p:nvSpPr>
-        <p:spPr>
-          <a:xfrm>
-            <a:off x="640080" y="365760"/>
-            <a:ext cx="10972800" cy="365760"/>
-          </a:xfrm>
-          <a:prstGeom prst="rect">
-            <a:avLst/>
-          </a:prstGeom>
-          <a:noFill/>
-        </p:spPr>
-        <p:txBody>
-          <a:bodyPr wrap="none">
-            <a:spAutoFit/>
-          </a:bodyPr>
-          <a:lstStyle/>
-          <a:p>
-            <a:r>
-              <a:rPr sz="1100" b="1">
-                <a:solidFill>
-                  <a:srgbClr val="C8A24B"/>
-                </a:solidFill>
-              </a:rPr>
-              <a:t>НАПРАВЛЕНИЕ 1 · КОММЕРЧЕСКАЯ МОДЕЛЬ</a:t>
-            </a:r>
-          </a:p>
-        </p:txBody>
-      </p:sp>
-      <p:sp>
-        <p:nvSpPr>
-          <p:cNvPr id="4" name="Rectangle 3"/>
-          <p:cNvSpPr/>
-          <p:nvPr/>
-        </p:nvSpPr>
-        <p:spPr>
-          <a:xfrm>
-            <a:off x="640080" y="731520"/>
-            <a:ext cx="10881360" cy="777240"/>
-          </a:xfrm>
-          <a:prstGeom prst="rect">
-            <a:avLst/>
-          </a:prstGeom>
-          <a:solidFill>
-            <a:srgbClr val="1F5D43"/>
-          </a:solidFill>
-          <a:ln>
-            <a:noFill/>
-          </a:ln>
-          <a:effectLst/>
-        </p:spPr>
-        <p:style>
-          <a:lnRef idx="1">
-            <a:schemeClr val="accent1"/>
-          </a:lnRef>
-          <a:fillRef idx="3">
-            <a:schemeClr val="accent1"/>
-          </a:fillRef>
-          <a:effectRef idx="2">
-            <a:schemeClr val="accent1"/>
-          </a:effectRef>
-          <a:fontRef idx="minor">
-            <a:schemeClr val="lt1"/>
-          </a:fontRef>
-        </p:style>
-        <p:txBody>
-          <a:bodyPr rtlCol="0" anchor="ctr" wrap="square"/>
-          <a:lstStyle/>
-          <a:p>
-            <a:pPr algn="ctr"/>
-            <a:r>
-              <a:rPr sz="2100" b="1">
-                <a:solidFill>
-                  <a:srgbClr val="FFFFFF"/>
-                </a:solidFill>
-              </a:rPr>
-              <a:t>   Оплата только за объём — интересы совпадают с банком</a:t>
-            </a:r>
-          </a:p>
-        </p:txBody>
-      </p:sp>
-      <p:graphicFrame>
-        <p:nvGraphicFramePr>
-          <p:cNvPr id="5" name="Table 4"/>
-          <p:cNvGraphicFramePr>
-            <a:graphicFrameLocks noGrp="1"/>
-          </p:cNvGraphicFramePr>
-          <p:nvPr/>
-        </p:nvGraphicFramePr>
-        <p:xfrm>
-          <a:off x="685800" y="1828800"/>
-          <a:ext cx="10835640" cy="1828800"/>
-        </p:xfrm>
-        <a:graphic>
-          <a:graphicData uri="http://schemas.openxmlformats.org/drawingml/2006/table">
-            <a:tbl>
-              <a:tblPr firstRow="1" bandRow="1">
-                <a:tableStyleId>{5C22544A-7EE6-4342-B048-85BDC9FD1C3A}</a:tableStyleId>
-              </a:tblPr>
-              <a:tblGrid>
-                <a:gridCol w="5417820"/>
-                <a:gridCol w="5417820"/>
-              </a:tblGrid>
-              <a:tr h="365760">
-                <a:tc>
-                  <a:txBody>
-                    <a:bodyPr/>
-                    <a:lstStyle/>
-                    <a:p>
-                      <a:r>
-                        <a:rPr sz="1100" b="1">
-                          <a:solidFill>
-                            <a:srgbClr val="FFFFFF"/>
-                          </a:solidFill>
-                        </a:rPr>
-                        <a:t>Месячный объём финансирования</a:t>
-                      </a:r>
-                    </a:p>
-                  </a:txBody>
-                  <a:tcPr>
-                    <a:solidFill>
-                      <a:srgbClr val="1F5D43"/>
-                    </a:solidFill>
-                  </a:tcPr>
-                </a:tc>
-                <a:tc>
-                  <a:txBody>
-                    <a:bodyPr/>
-                    <a:lstStyle/>
-                    <a:p>
-                      <a:r>
-                        <a:rPr sz="1100" b="1">
-                          <a:solidFill>
-                            <a:srgbClr val="FFFFFF"/>
-                          </a:solidFill>
-                        </a:rPr>
-                        <a:t>Комиссия платформы (б.п. от объёма)</a:t>
-                      </a:r>
-                    </a:p>
-                  </a:txBody>
-                  <a:tcPr>
-                    <a:solidFill>
-                      <a:srgbClr val="1F5D43"/>
-                    </a:solidFill>
-                  </a:tcPr>
-                </a:tc>
-              </a:tr>
-              <a:tr h="365760">
-                <a:tc>
-                  <a:txBody>
-                    <a:bodyPr/>
-                    <a:lstStyle/>
-                    <a:p>
-                      <a:r>
-                        <a:rPr sz="1050">
-                          <a:solidFill>
-                            <a:srgbClr val="14231B"/>
-                          </a:solidFill>
-                        </a:rPr>
-                        <a:t>До 50 млрд сум</a:t>
-                      </a:r>
-                    </a:p>
-                  </a:txBody>
-                  <a:tcPr>
-                    <a:solidFill>
-                      <a:srgbClr val="FFFFFF"/>
-                    </a:solidFill>
-                  </a:tcPr>
-                </a:tc>
-                <a:tc>
-                  <a:txBody>
-                    <a:bodyPr/>
-                    <a:lstStyle/>
-                    <a:p>
-                      <a:r>
-                        <a:rPr sz="1050">
-                          <a:solidFill>
-                            <a:srgbClr val="14231B"/>
-                          </a:solidFill>
-                        </a:rPr>
-                        <a:t>120 б.п.</a:t>
-                      </a:r>
-                    </a:p>
-                  </a:txBody>
-                  <a:tcPr>
-                    <a:solidFill>
-                      <a:srgbClr val="FFFFFF"/>
-                    </a:solidFill>
-                  </a:tcPr>
-                </a:tc>
-              </a:tr>
-              <a:tr h="365760">
-                <a:tc>
-                  <a:txBody>
-                    <a:bodyPr/>
-                    <a:lstStyle/>
-                    <a:p>
-                      <a:r>
-                        <a:rPr sz="1050">
-                          <a:solidFill>
-                            <a:srgbClr val="14231B"/>
-                          </a:solidFill>
-                        </a:rPr>
-                        <a:t>50–200 млрд сум</a:t>
+                        <a:t>Зачаточно</a:t>
                       </a:r>
                     </a:p>
                   </a:txBody>
@@ -8461,7 +9930,7 @@
                             <a:srgbClr val="14231B"/>
                           </a:solidFill>
                         </a:rPr>
-                        <a:t>90 б.п.</a:t>
+                        <a:t>Grok: триаж + отчётность, обработка документов</a:t>
                       </a:r>
                     </a:p>
                   </a:txBody>
@@ -8484,7 +9953,7 @@
                             <a:srgbClr val="14231B"/>
                           </a:solidFill>
                         </a:rPr>
-                        <a:t>200–500 млрд сум</a:t>
+                        <a:t>Цена для банка</a:t>
                       </a:r>
                     </a:p>
                   </a:txBody>
@@ -8505,36 +9974,13 @@
                             <a:srgbClr val="14231B"/>
                           </a:solidFill>
                         </a:rPr>
-                        <a:t>70 б.п.</a:t>
+                        <a:t>Комиссия за транзакцию</a:t>
                       </a:r>
                     </a:p>
                   </a:txBody>
                   <a:tcPr>
                     <a:solidFill>
                       <a:srgbClr val="FFFFFF"/>
-                    </a:solidFill>
-                  </a:tcPr>
-                </a:tc>
-              </a:tr>
-              <a:tr h="365760">
-                <a:tc>
-                  <a:txBody>
-                    <a:bodyPr/>
-                    <a:lstStyle/>
-                    <a:p>
-                      <a:r>
-                        <a:rPr sz="1050">
-                          <a:solidFill>
-                            <a:srgbClr val="14231B"/>
-                          </a:solidFill>
-                        </a:rPr>
-                        <a:t>Свыше 500 млрд сум</a:t>
-                      </a:r>
-                    </a:p>
-                  </a:txBody>
-                  <a:tcPr>
-                    <a:solidFill>
-                      <a:srgbClr val="EEEDE5"/>
                     </a:solidFill>
                   </a:tcPr>
                 </a:tc>
@@ -8549,13 +9995,34 @@
                             <a:srgbClr val="14231B"/>
                           </a:solidFill>
                         </a:rPr>
-                        <a:t>55 б.п.</a:t>
+                        <a:t>Комиссия за транзакцию</a:t>
                       </a:r>
                     </a:p>
                   </a:txBody>
                   <a:tcPr>
                     <a:solidFill>
-                      <a:srgbClr val="EEEDE5"/>
+                      <a:srgbClr val="FFFFFF"/>
+                    </a:solidFill>
+                  </a:tcPr>
+                </a:tc>
+                <a:tc>
+                  <a:txBody>
+                    <a:bodyPr/>
+                    <a:lstStyle/>
+                    <a:p>
+                      <a:r>
+                        <a:rPr sz="1050">
+                          <a:solidFill>
+                            <a:srgbClr val="14231B"/>
+                          </a:solidFill>
+                        </a:rPr>
+                        <a:t>Только б.п. от объёма (без SaaS)</a:t>
+                      </a:r>
+                    </a:p>
+                  </a:txBody>
+                  <a:tcPr>
+                    <a:solidFill>
+                      <a:srgbClr val="FFFFFF"/>
                     </a:solidFill>
                   </a:tcPr>
                 </a:tc>
@@ -8592,7 +10059,1013 @@
                   <a:srgbClr val="415046"/>
                 </a:solidFill>
               </a:rPr>
-              <a:t>Иллюстративно. Без SaaS-лицензии, без оплаты за место, без платы за внедрение — Consistente получает вознаграждение только когда банк финансирует счёт. Модуль международного SPV: ~60 б.п. в год от инвестированных активов + доля от результата сверх согласованного порога. Итоговые цифры — по согласованию с Universalbank.</a:t>
+              <a:t>Universalbank уже подписал соглашение о сотрудничестве с OzPlanet (сент. 2024) — то есть знает модель. Смысл этого предложения — не арендовать более удобный агрегатор, а владеть продуктом полностью. (Данные рынка: ЦБ, Q3 2025.)</a:t>
+            </a:r>
+          </a:p>
+        </p:txBody>
+      </p:sp>
+    </p:spTree>
+  </p:cSld>
+  <p:clrMapOvr>
+    <a:masterClrMapping/>
+  </p:clrMapOvr>
+</p:sld>
+</file>
+
+<file path=ppt/slides/slide6.xml><?xml version="1.0" encoding="utf-8"?>
+<p:sld xmlns:a="http://schemas.openxmlformats.org/drawingml/2006/main" xmlns:p="http://schemas.openxmlformats.org/presentationml/2006/main" xmlns:r="http://schemas.openxmlformats.org/officeDocument/2006/relationships">
+  <p:cSld>
+    <p:spTree>
+      <p:nvGrpSpPr>
+        <p:cNvPr id="1" name=""/>
+        <p:cNvGrpSpPr/>
+        <p:nvPr/>
+      </p:nvGrpSpPr>
+      <p:grpSpPr/>
+      <p:sp>
+        <p:nvSpPr>
+          <p:cNvPr id="2" name="Rectangle 1"/>
+          <p:cNvSpPr/>
+          <p:nvPr/>
+        </p:nvSpPr>
+        <p:spPr>
+          <a:xfrm>
+            <a:off x="0" y="0"/>
+            <a:ext cx="12191695" cy="6858000"/>
+          </a:xfrm>
+          <a:prstGeom prst="rect">
+            <a:avLst/>
+          </a:prstGeom>
+          <a:solidFill>
+            <a:srgbClr val="F7F6F1"/>
+          </a:solidFill>
+          <a:ln>
+            <a:noFill/>
+          </a:ln>
+          <a:effectLst/>
+        </p:spPr>
+        <p:style>
+          <a:lnRef idx="1">
+            <a:schemeClr val="accent1"/>
+          </a:lnRef>
+          <a:fillRef idx="3">
+            <a:schemeClr val="accent1"/>
+          </a:fillRef>
+          <a:effectRef idx="2">
+            <a:schemeClr val="accent1"/>
+          </a:effectRef>
+          <a:fontRef idx="minor">
+            <a:schemeClr val="lt1"/>
+          </a:fontRef>
+        </p:style>
+        <p:txBody>
+          <a:bodyPr rtlCol="0" anchor="ctr"/>
+          <a:lstStyle/>
+          <a:p>
+            <a:pPr algn="ctr"/>
+          </a:p>
+        </p:txBody>
+      </p:sp>
+      <p:sp>
+        <p:nvSpPr>
+          <p:cNvPr id="3" name="TextBox 2"/>
+          <p:cNvSpPr txBox="1"/>
+          <p:nvPr/>
+        </p:nvSpPr>
+        <p:spPr>
+          <a:xfrm>
+            <a:off x="640080" y="365760"/>
+            <a:ext cx="10972800" cy="365760"/>
+          </a:xfrm>
+          <a:prstGeom prst="rect">
+            <a:avLst/>
+          </a:prstGeom>
+          <a:noFill/>
+        </p:spPr>
+        <p:txBody>
+          <a:bodyPr wrap="none">
+            <a:spAutoFit/>
+          </a:bodyPr>
+          <a:lstStyle/>
+          <a:p>
+            <a:r>
+              <a:rPr sz="1100" b="1">
+                <a:solidFill>
+                  <a:srgbClr val="C8A24B"/>
+                </a:solidFill>
+              </a:rPr>
+              <a:t>СТРАТЕГИЧЕСКИЙ РАЗРЫВ</a:t>
+            </a:r>
+          </a:p>
+        </p:txBody>
+      </p:sp>
+      <p:sp>
+        <p:nvSpPr>
+          <p:cNvPr id="4" name="Rectangle 3"/>
+          <p:cNvSpPr/>
+          <p:nvPr/>
+        </p:nvSpPr>
+        <p:spPr>
+          <a:xfrm>
+            <a:off x="640080" y="731520"/>
+            <a:ext cx="10881360" cy="777240"/>
+          </a:xfrm>
+          <a:prstGeom prst="rect">
+            <a:avLst/>
+          </a:prstGeom>
+          <a:solidFill>
+            <a:srgbClr val="1F5D43"/>
+          </a:solidFill>
+          <a:ln>
+            <a:noFill/>
+          </a:ln>
+          <a:effectLst/>
+        </p:spPr>
+        <p:style>
+          <a:lnRef idx="1">
+            <a:schemeClr val="accent1"/>
+          </a:lnRef>
+          <a:fillRef idx="3">
+            <a:schemeClr val="accent1"/>
+          </a:fillRef>
+          <a:effectRef idx="2">
+            <a:schemeClr val="accent1"/>
+          </a:effectRef>
+          <a:fontRef idx="minor">
+            <a:schemeClr val="lt1"/>
+          </a:fontRef>
+        </p:style>
+        <p:txBody>
+          <a:bodyPr rtlCol="0" anchor="ctr" wrap="square"/>
+          <a:lstStyle/>
+          <a:p>
+            <a:pPr algn="ctr"/>
+            <a:r>
+              <a:rPr sz="2100" b="1">
+                <a:solidFill>
+                  <a:srgbClr val="FFFFFF"/>
+                </a:solidFill>
+              </a:rPr>
+              <a:t>   Ни один узбекский банк не владеет своим факторингом</a:t>
+            </a:r>
+          </a:p>
+        </p:txBody>
+      </p:sp>
+      <p:sp>
+        <p:nvSpPr>
+          <p:cNvPr id="5" name="TextBox 4"/>
+          <p:cNvSpPr txBox="1"/>
+          <p:nvPr/>
+        </p:nvSpPr>
+        <p:spPr>
+          <a:xfrm>
+            <a:off x="685800" y="1828800"/>
+            <a:ext cx="10881360" cy="4572000"/>
+          </a:xfrm>
+          <a:prstGeom prst="rect">
+            <a:avLst/>
+          </a:prstGeom>
+          <a:noFill/>
+        </p:spPr>
+        <p:txBody>
+          <a:bodyPr wrap="square">
+            <a:spAutoFit/>
+          </a:bodyPr>
+          <a:lstStyle/>
+          <a:p>
+            <a:pPr>
+              <a:spcAft>
+                <a:spcPts val="900"/>
+              </a:spcAft>
+            </a:pPr>
+            <a:r>
+              <a:rPr sz="1500">
+                <a:solidFill>
+                  <a:srgbClr val="14231B"/>
+                </a:solidFill>
+              </a:rPr>
+              <a:t>•  Сегодня банк, подключённый к OzPlanet или FinMakon, — это партнёр по финансированию на чужой платформе: агрегатор владеет брендом, отношениями с клиентом и данными.</a:t>
+            </a:r>
+          </a:p>
+          <a:p>
+            <a:pPr>
+              <a:spcAft>
+                <a:spcPts val="900"/>
+              </a:spcAft>
+            </a:pPr>
+            <a:r>
+              <a:rPr sz="1500">
+                <a:solidFill>
+                  <a:srgbClr val="14231B"/>
+                </a:solidFill>
+              </a:rPr>
+              <a:t>•  Это стратегическая зависимость: банк не может дифференцироваться, не может продавать по своим данным и не может сменить поставщика, не потеряв клиентов.</a:t>
+            </a:r>
+          </a:p>
+          <a:p>
+            <a:pPr>
+              <a:spcAft>
+                <a:spcPts val="900"/>
+              </a:spcAft>
+            </a:pPr>
+            <a:r>
+              <a:rPr sz="1500">
+                <a:solidFill>
+                  <a:srgbClr val="14231B"/>
+                </a:solidFill>
+              </a:rPr>
+              <a:t>•  Factorio это переворачивает. Universalbank ведёт платформу под своим брендом, владеет всеми клиентскими и транзакционными данными и может их выгрузить и перенести — без привязки к платформе.</a:t>
+            </a:r>
+          </a:p>
+          <a:p>
+            <a:pPr>
+              <a:spcAft>
+                <a:spcPts val="900"/>
+              </a:spcAft>
+            </a:pPr>
+            <a:r>
+              <a:rPr sz="1500">
+                <a:solidFill>
+                  <a:srgbClr val="14231B"/>
+                </a:solidFill>
+              </a:rPr>
+              <a:t>•  Та же гос. инфраструктура (SoliqOnline, реестр ЦБ), та же скорость — но банк владеет активом, а не арендует рельсы. Именно это владение и есть продукт.</a:t>
+            </a:r>
+          </a:p>
+        </p:txBody>
+      </p:sp>
+    </p:spTree>
+  </p:cSld>
+  <p:clrMapOvr>
+    <a:masterClrMapping/>
+  </p:clrMapOvr>
+</p:sld>
+</file>
+
+<file path=ppt/slides/slide7.xml><?xml version="1.0" encoding="utf-8"?>
+<p:sld xmlns:a="http://schemas.openxmlformats.org/drawingml/2006/main" xmlns:p="http://schemas.openxmlformats.org/presentationml/2006/main" xmlns:r="http://schemas.openxmlformats.org/officeDocument/2006/relationships">
+  <p:cSld>
+    <p:spTree>
+      <p:nvGrpSpPr>
+        <p:cNvPr id="1" name=""/>
+        <p:cNvGrpSpPr/>
+        <p:nvPr/>
+      </p:nvGrpSpPr>
+      <p:grpSpPr/>
+      <p:sp>
+        <p:nvSpPr>
+          <p:cNvPr id="2" name="Rectangle 1"/>
+          <p:cNvSpPr/>
+          <p:nvPr/>
+        </p:nvSpPr>
+        <p:spPr>
+          <a:xfrm>
+            <a:off x="0" y="0"/>
+            <a:ext cx="12191695" cy="6858000"/>
+          </a:xfrm>
+          <a:prstGeom prst="rect">
+            <a:avLst/>
+          </a:prstGeom>
+          <a:solidFill>
+            <a:srgbClr val="F7F6F1"/>
+          </a:solidFill>
+          <a:ln>
+            <a:noFill/>
+          </a:ln>
+          <a:effectLst/>
+        </p:spPr>
+        <p:style>
+          <a:lnRef idx="1">
+            <a:schemeClr val="accent1"/>
+          </a:lnRef>
+          <a:fillRef idx="3">
+            <a:schemeClr val="accent1"/>
+          </a:fillRef>
+          <a:effectRef idx="2">
+            <a:schemeClr val="accent1"/>
+          </a:effectRef>
+          <a:fontRef idx="minor">
+            <a:schemeClr val="lt1"/>
+          </a:fontRef>
+        </p:style>
+        <p:txBody>
+          <a:bodyPr rtlCol="0" anchor="ctr"/>
+          <a:lstStyle/>
+          <a:p>
+            <a:pPr algn="ctr"/>
+          </a:p>
+        </p:txBody>
+      </p:sp>
+      <p:sp>
+        <p:nvSpPr>
+          <p:cNvPr id="3" name="TextBox 2"/>
+          <p:cNvSpPr txBox="1"/>
+          <p:nvPr/>
+        </p:nvSpPr>
+        <p:spPr>
+          <a:xfrm>
+            <a:off x="640080" y="365760"/>
+            <a:ext cx="10972800" cy="365760"/>
+          </a:xfrm>
+          <a:prstGeom prst="rect">
+            <a:avLst/>
+          </a:prstGeom>
+          <a:noFill/>
+        </p:spPr>
+        <p:txBody>
+          <a:bodyPr wrap="none">
+            <a:spAutoFit/>
+          </a:bodyPr>
+          <a:lstStyle/>
+          <a:p>
+            <a:r>
+              <a:rPr sz="1100" b="1">
+                <a:solidFill>
+                  <a:srgbClr val="C8A24B"/>
+                </a:solidFill>
+              </a:rPr>
+              <a:t>КАК ЭТО РАБОТАЕТ</a:t>
+            </a:r>
+          </a:p>
+        </p:txBody>
+      </p:sp>
+      <p:sp>
+        <p:nvSpPr>
+          <p:cNvPr id="4" name="Rectangle 3"/>
+          <p:cNvSpPr/>
+          <p:nvPr/>
+        </p:nvSpPr>
+        <p:spPr>
+          <a:xfrm>
+            <a:off x="640080" y="731520"/>
+            <a:ext cx="10881360" cy="777240"/>
+          </a:xfrm>
+          <a:prstGeom prst="rect">
+            <a:avLst/>
+          </a:prstGeom>
+          <a:solidFill>
+            <a:srgbClr val="1F5D43"/>
+          </a:solidFill>
+          <a:ln>
+            <a:noFill/>
+          </a:ln>
+          <a:effectLst/>
+        </p:spPr>
+        <p:style>
+          <a:lnRef idx="1">
+            <a:schemeClr val="accent1"/>
+          </a:lnRef>
+          <a:fillRef idx="3">
+            <a:schemeClr val="accent1"/>
+          </a:fillRef>
+          <a:effectRef idx="2">
+            <a:schemeClr val="accent1"/>
+          </a:effectRef>
+          <a:fontRef idx="minor">
+            <a:schemeClr val="lt1"/>
+          </a:fontRef>
+        </p:style>
+        <p:txBody>
+          <a:bodyPr rtlCol="0" anchor="ctr" wrap="square"/>
+          <a:lstStyle/>
+          <a:p>
+            <a:pPr algn="ctr"/>
+            <a:r>
+              <a:rPr sz="2100" b="1">
+                <a:solidFill>
+                  <a:srgbClr val="FFFFFF"/>
+                </a:solidFill>
+              </a:rPr>
+              <a:t>   Как движутся деньги — и кто получает оплату</a:t>
+            </a:r>
+          </a:p>
+        </p:txBody>
+      </p:sp>
+      <p:pic>
+        <p:nvPicPr>
+          <p:cNvPr id="5" name="Picture 4" descr="ru-15-money-flow.png"/>
+          <p:cNvPicPr>
+            <a:picLocks noChangeAspect="1"/>
+          </p:cNvPicPr>
+          <p:nvPr/>
+        </p:nvPicPr>
+        <p:blipFill>
+          <a:blip r:embed="rId2"/>
+          <a:stretch>
+            <a:fillRect/>
+          </a:stretch>
+        </p:blipFill>
+        <p:spPr>
+          <a:xfrm>
+            <a:off x="548640" y="3257821"/>
+            <a:ext cx="6583680" cy="1622518"/>
+          </a:xfrm>
+          <a:prstGeom prst="rect">
+            <a:avLst/>
+          </a:prstGeom>
+        </p:spPr>
+      </p:pic>
+      <p:sp>
+        <p:nvSpPr>
+          <p:cNvPr id="6" name="TextBox 5"/>
+          <p:cNvSpPr txBox="1"/>
+          <p:nvPr/>
+        </p:nvSpPr>
+        <p:spPr>
+          <a:xfrm>
+            <a:off x="548640" y="6355080"/>
+            <a:ext cx="6583680" cy="365760"/>
+          </a:xfrm>
+          <a:prstGeom prst="rect">
+            <a:avLst/>
+          </a:prstGeom>
+          <a:noFill/>
+        </p:spPr>
+        <p:txBody>
+          <a:bodyPr wrap="none">
+            <a:spAutoFit/>
+          </a:bodyPr>
+          <a:lstStyle/>
+          <a:p>
+            <a:pPr algn="ctr"/>
+            <a:r>
+              <a:rPr sz="1000" i="1">
+                <a:solidFill>
+                  <a:srgbClr val="415046"/>
+                </a:solidFill>
+              </a:rPr>
+              <a:t>Поток денег и платежей — продавец, плательщик (дебитор), платформа, капитал</a:t>
+            </a:r>
+          </a:p>
+        </p:txBody>
+      </p:sp>
+      <p:sp>
+        <p:nvSpPr>
+          <p:cNvPr id="7" name="TextBox 6"/>
+          <p:cNvSpPr txBox="1"/>
+          <p:nvPr/>
+        </p:nvSpPr>
+        <p:spPr>
+          <a:xfrm>
+            <a:off x="7406640" y="1828800"/>
+            <a:ext cx="4480560" cy="4572000"/>
+          </a:xfrm>
+          <a:prstGeom prst="rect">
+            <a:avLst/>
+          </a:prstGeom>
+          <a:noFill/>
+        </p:spPr>
+        <p:txBody>
+          <a:bodyPr wrap="square">
+            <a:spAutoFit/>
+          </a:bodyPr>
+          <a:lstStyle/>
+          <a:p>
+            <a:pPr>
+              <a:spcAft>
+                <a:spcPts val="900"/>
+              </a:spcAft>
+            </a:pPr>
+            <a:r>
+              <a:rPr sz="1300">
+                <a:solidFill>
+                  <a:srgbClr val="14231B"/>
+                </a:solidFill>
+              </a:rPr>
+              <a:t>•  Плательщик (дебитор) — якорь: конкретное, подтверждённое покупателем обязательство в реестре SoliqOnline.</a:t>
+            </a:r>
+          </a:p>
+          <a:p>
+            <a:pPr>
+              <a:spcAft>
+                <a:spcPts val="900"/>
+              </a:spcAft>
+            </a:pPr>
+            <a:r>
+              <a:rPr sz="1300">
+                <a:solidFill>
+                  <a:srgbClr val="14231B"/>
+                </a:solidFill>
+              </a:rPr>
+              <a:t>•  Платформа выдаёт ~85% сразу из источника капитала (банк, инвестор или SPV); в срок плательщик гасит 100%, и водопад платит продавцу, капиталу и платформе.</a:t>
+            </a:r>
+          </a:p>
+          <a:p>
+            <a:pPr>
+              <a:spcAft>
+                <a:spcPts val="900"/>
+              </a:spcAft>
+            </a:pPr>
+            <a:r>
+              <a:rPr sz="1300">
+                <a:solidFill>
+                  <a:srgbClr val="14231B"/>
+                </a:solidFill>
+              </a:rPr>
+              <a:t>•  Поскольку поток одинаков независимо от источника финансирования, слой капитала подключаемый — сначала банк, инвесторы/SPV позже.</a:t>
+            </a:r>
+          </a:p>
+        </p:txBody>
+      </p:sp>
+    </p:spTree>
+  </p:cSld>
+  <p:clrMapOvr>
+    <a:masterClrMapping/>
+  </p:clrMapOvr>
+</p:sld>
+</file>
+
+<file path=ppt/slides/slide8.xml><?xml version="1.0" encoding="utf-8"?>
+<p:sld xmlns:a="http://schemas.openxmlformats.org/drawingml/2006/main" xmlns:p="http://schemas.openxmlformats.org/presentationml/2006/main" xmlns:r="http://schemas.openxmlformats.org/officeDocument/2006/relationships">
+  <p:cSld>
+    <p:spTree>
+      <p:nvGrpSpPr>
+        <p:cNvPr id="1" name=""/>
+        <p:cNvGrpSpPr/>
+        <p:nvPr/>
+      </p:nvGrpSpPr>
+      <p:grpSpPr/>
+      <p:sp>
+        <p:nvSpPr>
+          <p:cNvPr id="2" name="Rectangle 1"/>
+          <p:cNvSpPr/>
+          <p:nvPr/>
+        </p:nvSpPr>
+        <p:spPr>
+          <a:xfrm>
+            <a:off x="0" y="0"/>
+            <a:ext cx="12191695" cy="6858000"/>
+          </a:xfrm>
+          <a:prstGeom prst="rect">
+            <a:avLst/>
+          </a:prstGeom>
+          <a:solidFill>
+            <a:srgbClr val="F7F6F1"/>
+          </a:solidFill>
+          <a:ln>
+            <a:noFill/>
+          </a:ln>
+          <a:effectLst/>
+        </p:spPr>
+        <p:style>
+          <a:lnRef idx="1">
+            <a:schemeClr val="accent1"/>
+          </a:lnRef>
+          <a:fillRef idx="3">
+            <a:schemeClr val="accent1"/>
+          </a:fillRef>
+          <a:effectRef idx="2">
+            <a:schemeClr val="accent1"/>
+          </a:effectRef>
+          <a:fontRef idx="minor">
+            <a:schemeClr val="lt1"/>
+          </a:fontRef>
+        </p:style>
+        <p:txBody>
+          <a:bodyPr rtlCol="0" anchor="ctr"/>
+          <a:lstStyle/>
+          <a:p>
+            <a:pPr algn="ctr"/>
+          </a:p>
+        </p:txBody>
+      </p:sp>
+      <p:sp>
+        <p:nvSpPr>
+          <p:cNvPr id="3" name="TextBox 2"/>
+          <p:cNvSpPr txBox="1"/>
+          <p:nvPr/>
+        </p:nvSpPr>
+        <p:spPr>
+          <a:xfrm>
+            <a:off x="640080" y="365760"/>
+            <a:ext cx="10972800" cy="365760"/>
+          </a:xfrm>
+          <a:prstGeom prst="rect">
+            <a:avLst/>
+          </a:prstGeom>
+          <a:noFill/>
+        </p:spPr>
+        <p:txBody>
+          <a:bodyPr wrap="none">
+            <a:spAutoFit/>
+          </a:bodyPr>
+          <a:lstStyle/>
+          <a:p>
+            <a:r>
+              <a:rPr sz="1100" b="1">
+                <a:solidFill>
+                  <a:srgbClr val="C8A24B"/>
+                </a:solidFill>
+              </a:rPr>
+              <a:t>НАПРАВЛЕНИЕ 1 · ЛУЧШАЯ ПЛАТФОРМА</a:t>
+            </a:r>
+          </a:p>
+        </p:txBody>
+      </p:sp>
+      <p:sp>
+        <p:nvSpPr>
+          <p:cNvPr id="4" name="Rectangle 3"/>
+          <p:cNvSpPr/>
+          <p:nvPr/>
+        </p:nvSpPr>
+        <p:spPr>
+          <a:xfrm>
+            <a:off x="640080" y="731520"/>
+            <a:ext cx="10881360" cy="777240"/>
+          </a:xfrm>
+          <a:prstGeom prst="rect">
+            <a:avLst/>
+          </a:prstGeom>
+          <a:solidFill>
+            <a:srgbClr val="1F5D43"/>
+          </a:solidFill>
+          <a:ln>
+            <a:noFill/>
+          </a:ln>
+          <a:effectLst/>
+        </p:spPr>
+        <p:style>
+          <a:lnRef idx="1">
+            <a:schemeClr val="accent1"/>
+          </a:lnRef>
+          <a:fillRef idx="3">
+            <a:schemeClr val="accent1"/>
+          </a:fillRef>
+          <a:effectRef idx="2">
+            <a:schemeClr val="accent1"/>
+          </a:effectRef>
+          <a:fontRef idx="minor">
+            <a:schemeClr val="lt1"/>
+          </a:fontRef>
+        </p:style>
+        <p:txBody>
+          <a:bodyPr rtlCol="0" anchor="ctr" wrap="square"/>
+          <a:lstStyle/>
+          <a:p>
+            <a:pPr algn="ctr"/>
+            <a:r>
+              <a:rPr sz="2100" b="1">
+                <a:solidFill>
+                  <a:srgbClr val="FFFFFF"/>
+                </a:solidFill>
+              </a:rPr>
+              <a:t>   ИИ в основе, а не сбоку</a:t>
+            </a:r>
+          </a:p>
+        </p:txBody>
+      </p:sp>
+      <p:sp>
+        <p:nvSpPr>
+          <p:cNvPr id="5" name="TextBox 4"/>
+          <p:cNvSpPr txBox="1"/>
+          <p:nvPr/>
+        </p:nvSpPr>
+        <p:spPr>
+          <a:xfrm>
+            <a:off x="685800" y="1828800"/>
+            <a:ext cx="10881360" cy="4572000"/>
+          </a:xfrm>
+          <a:prstGeom prst="rect">
+            <a:avLst/>
+          </a:prstGeom>
+          <a:noFill/>
+        </p:spPr>
+        <p:txBody>
+          <a:bodyPr wrap="square">
+            <a:spAutoFit/>
+          </a:bodyPr>
+          <a:lstStyle/>
+          <a:p>
+            <a:pPr>
+              <a:spcAft>
+                <a:spcPts val="900"/>
+              </a:spcAft>
+            </a:pPr>
+            <a:r>
+              <a:rPr sz="1500">
+                <a:solidFill>
+                  <a:srgbClr val="14231B"/>
+                </a:solidFill>
+              </a:rPr>
+              <a:t>•  Тот же сквозной процесс факторинга — подача, проверка, финансирование, расчёт — но с ИИ в триаже, скоринге, документах и отчётности.</a:t>
+            </a:r>
+          </a:p>
+          <a:p>
+            <a:pPr>
+              <a:spcAft>
+                <a:spcPts val="900"/>
+              </a:spcAft>
+            </a:pPr>
+            <a:r>
+              <a:rPr sz="1500">
+                <a:solidFill>
+                  <a:srgbClr val="14231B"/>
+                </a:solidFill>
+              </a:rPr>
+              <a:t>•  На лёгком серверном стеке (FastHTML + PostgreSQL) — быстро менять, дёшево эксплуатировать, легко брендировать под банк.</a:t>
+            </a:r>
+          </a:p>
+          <a:p>
+            <a:pPr>
+              <a:spcAft>
+                <a:spcPts val="900"/>
+              </a:spcAft>
+            </a:pPr>
+            <a:r>
+              <a:rPr sz="1500">
+                <a:solidFill>
+                  <a:srgbClr val="14231B"/>
+                </a:solidFill>
+              </a:rPr>
+              <a:t>•  Трёхъязычность заложена в дизайн (английский · узбекский · русский); ИИ отвечает на языке пользователя.</a:t>
+            </a:r>
+          </a:p>
+          <a:p>
+            <a:pPr>
+              <a:spcAft>
+                <a:spcPts val="900"/>
+              </a:spcAft>
+            </a:pPr>
+            <a:r>
+              <a:rPr sz="1500">
+                <a:solidFill>
+                  <a:srgbClr val="14231B"/>
+                </a:solidFill>
+              </a:rPr>
+              <a:t>•  Следующие три слайда раскрывают ИИ, движок кредитного скоринга и коммерческую модель.</a:t>
+            </a:r>
+          </a:p>
+        </p:txBody>
+      </p:sp>
+    </p:spTree>
+  </p:cSld>
+  <p:clrMapOvr>
+    <a:masterClrMapping/>
+  </p:clrMapOvr>
+</p:sld>
+</file>
+
+<file path=ppt/slides/slide9.xml><?xml version="1.0" encoding="utf-8"?>
+<p:sld xmlns:a="http://schemas.openxmlformats.org/drawingml/2006/main" xmlns:p="http://schemas.openxmlformats.org/presentationml/2006/main" xmlns:r="http://schemas.openxmlformats.org/officeDocument/2006/relationships">
+  <p:cSld>
+    <p:spTree>
+      <p:nvGrpSpPr>
+        <p:cNvPr id="1" name=""/>
+        <p:cNvGrpSpPr/>
+        <p:nvPr/>
+      </p:nvGrpSpPr>
+      <p:grpSpPr/>
+      <p:sp>
+        <p:nvSpPr>
+          <p:cNvPr id="2" name="Rectangle 1"/>
+          <p:cNvSpPr/>
+          <p:nvPr/>
+        </p:nvSpPr>
+        <p:spPr>
+          <a:xfrm>
+            <a:off x="0" y="0"/>
+            <a:ext cx="12191695" cy="6858000"/>
+          </a:xfrm>
+          <a:prstGeom prst="rect">
+            <a:avLst/>
+          </a:prstGeom>
+          <a:solidFill>
+            <a:srgbClr val="F7F6F1"/>
+          </a:solidFill>
+          <a:ln>
+            <a:noFill/>
+          </a:ln>
+          <a:effectLst/>
+        </p:spPr>
+        <p:style>
+          <a:lnRef idx="1">
+            <a:schemeClr val="accent1"/>
+          </a:lnRef>
+          <a:fillRef idx="3">
+            <a:schemeClr val="accent1"/>
+          </a:fillRef>
+          <a:effectRef idx="2">
+            <a:schemeClr val="accent1"/>
+          </a:effectRef>
+          <a:fontRef idx="minor">
+            <a:schemeClr val="lt1"/>
+          </a:fontRef>
+        </p:style>
+        <p:txBody>
+          <a:bodyPr rtlCol="0" anchor="ctr"/>
+          <a:lstStyle/>
+          <a:p>
+            <a:pPr algn="ctr"/>
+          </a:p>
+        </p:txBody>
+      </p:sp>
+      <p:sp>
+        <p:nvSpPr>
+          <p:cNvPr id="3" name="TextBox 2"/>
+          <p:cNvSpPr txBox="1"/>
+          <p:nvPr/>
+        </p:nvSpPr>
+        <p:spPr>
+          <a:xfrm>
+            <a:off x="640080" y="365760"/>
+            <a:ext cx="10972800" cy="365760"/>
+          </a:xfrm>
+          <a:prstGeom prst="rect">
+            <a:avLst/>
+          </a:prstGeom>
+          <a:noFill/>
+        </p:spPr>
+        <p:txBody>
+          <a:bodyPr wrap="none">
+            <a:spAutoFit/>
+          </a:bodyPr>
+          <a:lstStyle/>
+          <a:p>
+            <a:r>
+              <a:rPr sz="1100" b="1">
+                <a:solidFill>
+                  <a:srgbClr val="C8A24B"/>
+                </a:solidFill>
+              </a:rPr>
+              <a:t>ПУТЬ · ЗАЁМЩИК (ORIGINATION)</a:t>
+            </a:r>
+          </a:p>
+        </p:txBody>
+      </p:sp>
+      <p:sp>
+        <p:nvSpPr>
+          <p:cNvPr id="4" name="Rectangle 3"/>
+          <p:cNvSpPr/>
+          <p:nvPr/>
+        </p:nvSpPr>
+        <p:spPr>
+          <a:xfrm>
+            <a:off x="640080" y="731520"/>
+            <a:ext cx="10881360" cy="777240"/>
+          </a:xfrm>
+          <a:prstGeom prst="rect">
+            <a:avLst/>
+          </a:prstGeom>
+          <a:solidFill>
+            <a:srgbClr val="1F5D43"/>
+          </a:solidFill>
+          <a:ln>
+            <a:noFill/>
+          </a:ln>
+          <a:effectLst/>
+        </p:spPr>
+        <p:style>
+          <a:lnRef idx="1">
+            <a:schemeClr val="accent1"/>
+          </a:lnRef>
+          <a:fillRef idx="3">
+            <a:schemeClr val="accent1"/>
+          </a:fillRef>
+          <a:effectRef idx="2">
+            <a:schemeClr val="accent1"/>
+          </a:effectRef>
+          <a:fontRef idx="minor">
+            <a:schemeClr val="lt1"/>
+          </a:fontRef>
+        </p:style>
+        <p:txBody>
+          <a:bodyPr rtlCol="0" anchor="ctr" wrap="square"/>
+          <a:lstStyle/>
+          <a:p>
+            <a:pPr algn="ctr"/>
+            <a:r>
+              <a:rPr sz="2100" b="1">
+                <a:solidFill>
+                  <a:srgbClr val="FFFFFF"/>
+                </a:solidFill>
+              </a:rPr>
+              <a:t>   Путь продавца — от регистрации до денег за 24–48 ч</a:t>
+            </a:r>
+          </a:p>
+        </p:txBody>
+      </p:sp>
+      <p:pic>
+        <p:nvPicPr>
+          <p:cNvPr id="5" name="Picture 4" descr="ru-16-origination-journey.png"/>
+          <p:cNvPicPr>
+            <a:picLocks noChangeAspect="1"/>
+          </p:cNvPicPr>
+          <p:nvPr/>
+        </p:nvPicPr>
+        <p:blipFill>
+          <a:blip r:embed="rId2"/>
+          <a:stretch>
+            <a:fillRect/>
+          </a:stretch>
+        </p:blipFill>
+        <p:spPr>
+          <a:xfrm>
+            <a:off x="548640" y="3903253"/>
+            <a:ext cx="6583680" cy="331653"/>
+          </a:xfrm>
+          <a:prstGeom prst="rect">
+            <a:avLst/>
+          </a:prstGeom>
+        </p:spPr>
+      </p:pic>
+      <p:sp>
+        <p:nvSpPr>
+          <p:cNvPr id="6" name="TextBox 5"/>
+          <p:cNvSpPr txBox="1"/>
+          <p:nvPr/>
+        </p:nvSpPr>
+        <p:spPr>
+          <a:xfrm>
+            <a:off x="548640" y="6355080"/>
+            <a:ext cx="6583680" cy="365760"/>
+          </a:xfrm>
+          <a:prstGeom prst="rect">
+            <a:avLst/>
+          </a:prstGeom>
+          <a:noFill/>
+        </p:spPr>
+        <p:txBody>
+          <a:bodyPr wrap="none">
+            <a:spAutoFit/>
+          </a:bodyPr>
+          <a:lstStyle/>
+          <a:p>
+            <a:pPr algn="ctr"/>
+            <a:r>
+              <a:rPr sz="1000" i="1">
+                <a:solidFill>
+                  <a:srgbClr val="415046"/>
+                </a:solidFill>
+              </a:rPr>
+              <a:t>Origination: импорт из SoliqOnline → AI-триаж → одобрение в один клик → аванс</a:t>
+            </a:r>
+          </a:p>
+        </p:txBody>
+      </p:sp>
+      <p:sp>
+        <p:nvSpPr>
+          <p:cNvPr id="7" name="TextBox 6"/>
+          <p:cNvSpPr txBox="1"/>
+          <p:nvPr/>
+        </p:nvSpPr>
+        <p:spPr>
+          <a:xfrm>
+            <a:off x="7406640" y="1828800"/>
+            <a:ext cx="4480560" cy="4572000"/>
+          </a:xfrm>
+          <a:prstGeom prst="rect">
+            <a:avLst/>
+          </a:prstGeom>
+          <a:noFill/>
+        </p:spPr>
+        <p:txBody>
+          <a:bodyPr wrap="square">
+            <a:spAutoFit/>
+          </a:bodyPr>
+          <a:lstStyle/>
+          <a:p>
+            <a:pPr>
+              <a:spcAft>
+                <a:spcPts val="900"/>
+              </a:spcAft>
+            </a:pPr>
+            <a:r>
+              <a:rPr sz="1300">
+                <a:solidFill>
+                  <a:srgbClr val="14231B"/>
+                </a:solidFill>
+              </a:rPr>
+              <a:t>•  Ручное участие банка — один клик одобрения на заранее заполненном экране; всё остальное автоматизировано.</a:t>
+            </a:r>
+          </a:p>
+          <a:p>
+            <a:pPr>
+              <a:spcAft>
+                <a:spcPts val="900"/>
+              </a:spcAft>
+            </a:pPr>
+            <a:r>
+              <a:rPr sz="1300">
+                <a:solidFill>
+                  <a:srgbClr val="14231B"/>
+                </a:solidFill>
+              </a:rPr>
+              <a:t>•  Счёт импортируется и проверяется из SoliqOnline; дебитор скорится; залог регистрируется в ЦБ менее чем за 60 минут.</a:t>
+            </a:r>
+          </a:p>
+          <a:p>
+            <a:pPr>
+              <a:spcAft>
+                <a:spcPts val="900"/>
+              </a:spcAft>
+            </a:pPr>
+            <a:r>
+              <a:rPr sz="1300">
+                <a:solidFill>
+                  <a:srgbClr val="14231B"/>
+                </a:solidFill>
+              </a:rPr>
+              <a:t>•  Это Модуль A — он самодостаточен и может быть запущен первым, полностью за счёт баланса банка.</a:t>
             </a:r>
           </a:p>
         </p:txBody>
